--- a/All Sufficient Merit.pptx
+++ b/All Sufficient Merit.pptx
@@ -6,19 +6,20 @@
   </p:sldMasterIdLst>
   <p:sldIdLst>
     <p:sldId id="261" r:id="rId2"/>
-    <p:sldId id="262" r:id="rId3"/>
-    <p:sldId id="263" r:id="rId4"/>
-    <p:sldId id="264" r:id="rId5"/>
-    <p:sldId id="265" r:id="rId6"/>
-    <p:sldId id="266" r:id="rId7"/>
-    <p:sldId id="267" r:id="rId8"/>
-    <p:sldId id="268" r:id="rId9"/>
-    <p:sldId id="269" r:id="rId10"/>
-    <p:sldId id="270" r:id="rId11"/>
-    <p:sldId id="271" r:id="rId12"/>
-    <p:sldId id="272" r:id="rId13"/>
-    <p:sldId id="273" r:id="rId14"/>
-    <p:sldId id="274" r:id="rId15"/>
+    <p:sldId id="275" r:id="rId3"/>
+    <p:sldId id="262" r:id="rId4"/>
+    <p:sldId id="263" r:id="rId5"/>
+    <p:sldId id="264" r:id="rId6"/>
+    <p:sldId id="265" r:id="rId7"/>
+    <p:sldId id="266" r:id="rId8"/>
+    <p:sldId id="267" r:id="rId9"/>
+    <p:sldId id="268" r:id="rId10"/>
+    <p:sldId id="269" r:id="rId11"/>
+    <p:sldId id="270" r:id="rId12"/>
+    <p:sldId id="271" r:id="rId13"/>
+    <p:sldId id="272" r:id="rId14"/>
+    <p:sldId id="273" r:id="rId15"/>
+    <p:sldId id="274" r:id="rId16"/>
   </p:sldIdLst>
   <p:sldSz cx="12192000" cy="6858000"/>
   <p:notesSz cx="6858000" cy="9144000"/>
@@ -117,6 +118,11 @@
       </a:defRPr>
     </a:lvl9pPr>
   </p:defaultTextStyle>
+  <p:extLst>
+    <p:ext uri="{EFAFB233-063F-42B5-8137-9DF3F51BA10A}">
+      <p15:sldGuideLst xmlns:p15="http://schemas.microsoft.com/office/powerpoint/2012/main"/>
+    </p:ext>
+  </p:extLst>
 </p:presentation>
 </file>
 
@@ -267,7 +273,7 @@
           <a:p>
             <a:fld id="{E759A0DE-F190-5444-87AC-4719D5F20D15}" type="datetimeFigureOut">
               <a:rPr lang="en-US" smtClean="0"/>
-              <a:t>11/11/25</a:t>
+              <a:t>11/15/25</a:t>
             </a:fld>
             <a:endParaRPr lang="en-US"/>
           </a:p>
@@ -465,7 +471,7 @@
           <a:p>
             <a:fld id="{E759A0DE-F190-5444-87AC-4719D5F20D15}" type="datetimeFigureOut">
               <a:rPr lang="en-US" smtClean="0"/>
-              <a:t>11/11/25</a:t>
+              <a:t>11/15/25</a:t>
             </a:fld>
             <a:endParaRPr lang="en-US"/>
           </a:p>
@@ -673,7 +679,7 @@
           <a:p>
             <a:fld id="{E759A0DE-F190-5444-87AC-4719D5F20D15}" type="datetimeFigureOut">
               <a:rPr lang="en-US" smtClean="0"/>
-              <a:t>11/11/25</a:t>
+              <a:t>11/15/25</a:t>
             </a:fld>
             <a:endParaRPr lang="en-US"/>
           </a:p>
@@ -871,7 +877,7 @@
           <a:p>
             <a:fld id="{E759A0DE-F190-5444-87AC-4719D5F20D15}" type="datetimeFigureOut">
               <a:rPr lang="en-US" smtClean="0"/>
-              <a:t>11/11/25</a:t>
+              <a:t>11/15/25</a:t>
             </a:fld>
             <a:endParaRPr lang="en-US"/>
           </a:p>
@@ -1146,7 +1152,7 @@
           <a:p>
             <a:fld id="{E759A0DE-F190-5444-87AC-4719D5F20D15}" type="datetimeFigureOut">
               <a:rPr lang="en-US" smtClean="0"/>
-              <a:t>11/11/25</a:t>
+              <a:t>11/15/25</a:t>
             </a:fld>
             <a:endParaRPr lang="en-US"/>
           </a:p>
@@ -1411,7 +1417,7 @@
           <a:p>
             <a:fld id="{E759A0DE-F190-5444-87AC-4719D5F20D15}" type="datetimeFigureOut">
               <a:rPr lang="en-US" smtClean="0"/>
-              <a:t>11/11/25</a:t>
+              <a:t>11/15/25</a:t>
             </a:fld>
             <a:endParaRPr lang="en-US"/>
           </a:p>
@@ -1823,7 +1829,7 @@
           <a:p>
             <a:fld id="{E759A0DE-F190-5444-87AC-4719D5F20D15}" type="datetimeFigureOut">
               <a:rPr lang="en-US" smtClean="0"/>
-              <a:t>11/11/25</a:t>
+              <a:t>11/15/25</a:t>
             </a:fld>
             <a:endParaRPr lang="en-US"/>
           </a:p>
@@ -1964,7 +1970,7 @@
           <a:p>
             <a:fld id="{E759A0DE-F190-5444-87AC-4719D5F20D15}" type="datetimeFigureOut">
               <a:rPr lang="en-US" smtClean="0"/>
-              <a:t>11/11/25</a:t>
+              <a:t>11/15/25</a:t>
             </a:fld>
             <a:endParaRPr lang="en-US"/>
           </a:p>
@@ -2077,7 +2083,7 @@
           <a:p>
             <a:fld id="{E759A0DE-F190-5444-87AC-4719D5F20D15}" type="datetimeFigureOut">
               <a:rPr lang="en-US" smtClean="0"/>
-              <a:t>11/11/25</a:t>
+              <a:t>11/15/25</a:t>
             </a:fld>
             <a:endParaRPr lang="en-US"/>
           </a:p>
@@ -2388,7 +2394,7 @@
           <a:p>
             <a:fld id="{E759A0DE-F190-5444-87AC-4719D5F20D15}" type="datetimeFigureOut">
               <a:rPr lang="en-US" smtClean="0"/>
-              <a:t>11/11/25</a:t>
+              <a:t>11/15/25</a:t>
             </a:fld>
             <a:endParaRPr lang="en-US"/>
           </a:p>
@@ -2676,7 +2682,7 @@
           <a:p>
             <a:fld id="{E759A0DE-F190-5444-87AC-4719D5F20D15}" type="datetimeFigureOut">
               <a:rPr lang="en-US" smtClean="0"/>
-              <a:t>11/11/25</a:t>
+              <a:t>11/15/25</a:t>
             </a:fld>
             <a:endParaRPr lang="en-US"/>
           </a:p>
@@ -2917,7 +2923,7 @@
           <a:p>
             <a:fld id="{E759A0DE-F190-5444-87AC-4719D5F20D15}" type="datetimeFigureOut">
               <a:rPr lang="en-US" smtClean="0"/>
-              <a:t>11/11/25</a:t>
+              <a:t>11/15/25</a:t>
             </a:fld>
             <a:endParaRPr lang="en-US"/>
           </a:p>
@@ -3323,7 +3329,7 @@
     <p:bg>
       <p:bgPr>
         <a:solidFill>
-          <a:schemeClr val="accent1"/>
+          <a:schemeClr val="bg1"/>
         </a:solidFill>
         <a:effectLst/>
       </p:bgPr>
@@ -3348,116 +3354,394 @@
           <a:chExt cx="0" cy="0"/>
         </a:xfrm>
       </p:grpSpPr>
-      <p:sp>
-        <p:nvSpPr>
-          <p:cNvPr id="3" name="Subtitle 2">
-            <a:extLst>
-              <a:ext uri="{FF2B5EF4-FFF2-40B4-BE49-F238E27FC236}">
-                <a16:creationId xmlns:a16="http://schemas.microsoft.com/office/drawing/2014/main" id="{F0FD9A51-1655-DF8C-52C5-2398AD7832C4}"/>
-              </a:ext>
-            </a:extLst>
-          </p:cNvPr>
-          <p:cNvSpPr>
-            <a:spLocks noGrp="1"/>
-          </p:cNvSpPr>
-          <p:nvPr>
-            <p:ph type="subTitle" idx="1"/>
+      <p:sp useBgFill="1">
+        <p:nvSpPr>
+          <p:cNvPr id="14" name="Rectangle 13">
+            <a:extLst>
+              <a:ext uri="{FF2B5EF4-FFF2-40B4-BE49-F238E27FC236}">
+                <a16:creationId xmlns:a16="http://schemas.microsoft.com/office/drawing/2014/main" id="{E91DC736-0EF8-4F87-9146-EBF1D2EE4D3D}"/>
+              </a:ext>
+              <a:ext uri="{C183D7F6-B498-43B3-948B-1728B52AA6E4}">
+                <adec:decorative xmlns:adec="http://schemas.microsoft.com/office/drawing/2017/decorative" val="1"/>
+              </a:ext>
+            </a:extLst>
+          </p:cNvPr>
+          <p:cNvSpPr>
+            <a:spLocks noGrp="1" noRot="1" noChangeAspect="1" noMove="1" noResize="1" noEditPoints="1" noAdjustHandles="1" noChangeArrowheads="1" noChangeShapeType="1" noTextEdit="1"/>
+          </p:cNvSpPr>
+          <p:nvPr>
+            <p:extLst>
+              <p:ext uri="{386F3935-93C4-4BCD-93E2-E3B085C9AB24}">
+                <p16:designElem xmlns:p16="http://schemas.microsoft.com/office/powerpoint/2015/main" val="1"/>
+              </p:ext>
+            </p:extLst>
           </p:nvPr>
         </p:nvSpPr>
         <p:spPr>
           <a:xfrm>
-            <a:off x="682831" y="497702"/>
-            <a:ext cx="10826338" cy="5862596"/>
+            <a:off x="0" y="0"/>
+            <a:ext cx="12192000" cy="6858000"/>
+          </a:xfrm>
+          <a:prstGeom prst="rect">
+            <a:avLst/>
+          </a:prstGeom>
+          <a:ln>
+            <a:noFill/>
+          </a:ln>
+        </p:spPr>
+        <p:style>
+          <a:lnRef idx="2">
+            <a:schemeClr val="accent1">
+              <a:shade val="50000"/>
+            </a:schemeClr>
+          </a:lnRef>
+          <a:fillRef idx="1">
+            <a:schemeClr val="accent1"/>
+          </a:fillRef>
+          <a:effectRef idx="0">
+            <a:schemeClr val="accent1"/>
+          </a:effectRef>
+          <a:fontRef idx="minor">
+            <a:schemeClr val="lt1"/>
+          </a:fontRef>
+        </p:style>
+        <p:txBody>
+          <a:bodyPr rtlCol="0" anchor="ctr"/>
+          <a:lstStyle/>
+          <a:p>
+            <a:pPr algn="ctr"/>
+            <a:endParaRPr lang="en-US"/>
+          </a:p>
+        </p:txBody>
+      </p:sp>
+      <p:pic>
+        <p:nvPicPr>
+          <p:cNvPr id="4" name="Picture 3" descr="Matterhorn with snow and stars in the sky&#10;&#10;AI-generated content may be incorrect.">
+            <a:extLst>
+              <a:ext uri="{FF2B5EF4-FFF2-40B4-BE49-F238E27FC236}">
+                <a16:creationId xmlns:a16="http://schemas.microsoft.com/office/drawing/2014/main" id="{20FF3D56-E105-8F19-A54E-4F173C83BFB7}"/>
+              </a:ext>
+            </a:extLst>
+          </p:cNvPr>
+          <p:cNvPicPr>
+            <a:picLocks noChangeAspect="1"/>
+          </p:cNvPicPr>
+          <p:nvPr/>
+        </p:nvPicPr>
+        <p:blipFill>
+          <a:blip r:embed="rId2"/>
+          <a:srcRect l="10159" t="9091" r="25205"/>
+          <a:stretch>
+            <a:fillRect/>
+          </a:stretch>
+        </p:blipFill>
+        <p:spPr>
+          <a:xfrm>
+            <a:off x="3523488" y="10"/>
+            <a:ext cx="8668512" cy="6857990"/>
+          </a:xfrm>
+          <a:prstGeom prst="rect">
+            <a:avLst/>
+          </a:prstGeom>
+        </p:spPr>
+      </p:pic>
+      <p:sp>
+        <p:nvSpPr>
+          <p:cNvPr id="16" name="Rectangle 15">
+            <a:extLst>
+              <a:ext uri="{FF2B5EF4-FFF2-40B4-BE49-F238E27FC236}">
+                <a16:creationId xmlns:a16="http://schemas.microsoft.com/office/drawing/2014/main" id="{097CD68E-23E3-4007-8847-CD0944C4F7BE}"/>
+              </a:ext>
+              <a:ext uri="{C183D7F6-B498-43B3-948B-1728B52AA6E4}">
+                <adec:decorative xmlns:adec="http://schemas.microsoft.com/office/drawing/2017/decorative" val="1"/>
+              </a:ext>
+            </a:extLst>
+          </p:cNvPr>
+          <p:cNvSpPr>
+            <a:spLocks noGrp="1" noRot="1" noChangeAspect="1" noMove="1" noResize="1" noEditPoints="1" noAdjustHandles="1" noChangeArrowheads="1" noChangeShapeType="1" noTextEdit="1"/>
+          </p:cNvSpPr>
+          <p:nvPr>
+            <p:extLst>
+              <p:ext uri="{386F3935-93C4-4BCD-93E2-E3B085C9AB24}">
+                <p16:designElem xmlns:p16="http://schemas.microsoft.com/office/powerpoint/2015/main" val="1"/>
+              </p:ext>
+            </p:extLst>
+          </p:nvPr>
+        </p:nvSpPr>
+        <p:spPr>
+          <a:xfrm>
+            <a:off x="0" y="0"/>
+            <a:ext cx="9756601" cy="6858000"/>
+          </a:xfrm>
+          <a:prstGeom prst="rect">
+            <a:avLst/>
+          </a:prstGeom>
+          <a:gradFill>
+            <a:gsLst>
+              <a:gs pos="58000">
+                <a:schemeClr val="bg1"/>
+              </a:gs>
+              <a:gs pos="35000">
+                <a:schemeClr val="bg1">
+                  <a:alpha val="79000"/>
+                </a:schemeClr>
+              </a:gs>
+              <a:gs pos="19000">
+                <a:schemeClr val="bg1">
+                  <a:alpha val="38000"/>
+                </a:schemeClr>
+              </a:gs>
+              <a:gs pos="0">
+                <a:schemeClr val="bg1">
+                  <a:alpha val="0"/>
+                </a:schemeClr>
+              </a:gs>
+              <a:gs pos="100000">
+                <a:schemeClr val="bg1"/>
+              </a:gs>
+            </a:gsLst>
+            <a:lin ang="10800000" scaled="0"/>
+          </a:gradFill>
+          <a:ln>
+            <a:noFill/>
+          </a:ln>
+        </p:spPr>
+        <p:style>
+          <a:lnRef idx="2">
+            <a:schemeClr val="accent1">
+              <a:shade val="50000"/>
+            </a:schemeClr>
+          </a:lnRef>
+          <a:fillRef idx="1">
+            <a:schemeClr val="accent1"/>
+          </a:fillRef>
+          <a:effectRef idx="0">
+            <a:schemeClr val="accent1"/>
+          </a:effectRef>
+          <a:fontRef idx="minor">
+            <a:schemeClr val="lt1"/>
+          </a:fontRef>
+        </p:style>
+        <p:txBody>
+          <a:bodyPr rtlCol="0" anchor="ctr"/>
+          <a:lstStyle/>
+          <a:p>
+            <a:pPr algn="ctr"/>
+            <a:endParaRPr lang="en-US" dirty="0"/>
+          </a:p>
+        </p:txBody>
+      </p:sp>
+      <p:sp>
+        <p:nvSpPr>
+          <p:cNvPr id="3" name="Subtitle 2">
+            <a:extLst>
+              <a:ext uri="{FF2B5EF4-FFF2-40B4-BE49-F238E27FC236}">
+                <a16:creationId xmlns:a16="http://schemas.microsoft.com/office/drawing/2014/main" id="{F0FD9A51-1655-DF8C-52C5-2398AD7832C4}"/>
+              </a:ext>
+            </a:extLst>
+          </p:cNvPr>
+          <p:cNvSpPr>
+            <a:spLocks noGrp="1"/>
+          </p:cNvSpPr>
+          <p:nvPr>
+            <p:ph type="subTitle" idx="1"/>
+          </p:nvPr>
+        </p:nvSpPr>
+        <p:spPr>
+          <a:xfrm>
+            <a:off x="477980" y="4872922"/>
+            <a:ext cx="4023359" cy="1208141"/>
           </a:xfrm>
         </p:spPr>
         <p:txBody>
           <a:bodyPr>
-            <a:noAutofit/>
+            <a:normAutofit fontScale="92500"/>
           </a:bodyPr>
           <a:lstStyle/>
           <a:p>
-            <a:endParaRPr lang="en-US" sz="4400" dirty="0">
-              <a:solidFill>
-                <a:schemeClr val="bg1"/>
-              </a:solidFill>
+            <a:pPr algn="l"/>
+            <a:endParaRPr lang="en-US" sz="2000" dirty="0">
               <a:latin typeface="Avenir Medium" panose="02000503020000020003" pitchFamily="2" charset="0"/>
               <a:ea typeface="Bodoni Ornaments" pitchFamily="2" charset="0"/>
             </a:endParaRPr>
           </a:p>
           <a:p>
-            <a:r>
-              <a:rPr lang="en-US" sz="4400" dirty="0">
-                <a:solidFill>
-                  <a:schemeClr val="bg1"/>
-                </a:solidFill>
-                <a:latin typeface="Avenir Medium" panose="02000503020000020003" pitchFamily="2" charset="0"/>
+            <a:pPr algn="l"/>
+            <a:r>
+              <a:rPr lang="en-US" sz="4000" i="1" dirty="0">
+                <a:latin typeface="Avenir Oblique" panose="02000503020000020003" pitchFamily="2" charset="0"/>
                 <a:ea typeface="Bodoni Ornaments" pitchFamily="2" charset="0"/>
               </a:rPr>
               <a:t>All sufficient merit</a:t>
             </a:r>
           </a:p>
           <a:p>
-            <a:endParaRPr lang="en-US" sz="4400" dirty="0">
-              <a:solidFill>
-                <a:schemeClr val="bg1"/>
-              </a:solidFill>
+            <a:pPr algn="l"/>
+            <a:endParaRPr lang="en-US" sz="2000" dirty="0">
               <a:latin typeface="Avenir Medium" panose="02000503020000020003" pitchFamily="2" charset="0"/>
               <a:ea typeface="Bodoni Ornaments" pitchFamily="2" charset="0"/>
             </a:endParaRPr>
           </a:p>
-          <a:p>
-            <a:r>
-              <a:rPr lang="en-US" sz="4400" dirty="0">
-                <a:solidFill>
-                  <a:schemeClr val="bg1"/>
-                </a:solidFill>
-                <a:latin typeface="Avenir Medium" panose="02000503020000020003" pitchFamily="2" charset="0"/>
-                <a:ea typeface="Bodoni Ornaments" pitchFamily="2" charset="0"/>
-              </a:rPr>
-              <a:t>Shining like the sun</a:t>
-            </a:r>
-          </a:p>
-          <a:p>
-            <a:endParaRPr lang="en-US" sz="4400" dirty="0">
+        </p:txBody>
+      </p:sp>
+      <p:sp>
+        <p:nvSpPr>
+          <p:cNvPr id="13" name="Rectangle 12">
+            <a:extLst>
+              <a:ext uri="{FF2B5EF4-FFF2-40B4-BE49-F238E27FC236}">
+                <a16:creationId xmlns:a16="http://schemas.microsoft.com/office/drawing/2014/main" id="{AF2F604E-43BE-4DC3-B983-E071523364F8}"/>
+              </a:ext>
+              <a:ext uri="{C183D7F6-B498-43B3-948B-1728B52AA6E4}">
+                <adec:decorative xmlns:adec="http://schemas.microsoft.com/office/drawing/2017/decorative" val="1"/>
+              </a:ext>
+            </a:extLst>
+          </p:cNvPr>
+          <p:cNvSpPr>
+            <a:spLocks noGrp="1" noRot="1" noChangeAspect="1" noMove="1" noResize="1" noEditPoints="1" noAdjustHandles="1" noChangeArrowheads="1" noChangeShapeType="1" noTextEdit="1"/>
+          </p:cNvSpPr>
+          <p:nvPr>
+            <p:extLst>
+              <p:ext uri="{386F3935-93C4-4BCD-93E2-E3B085C9AB24}">
+                <p16:designElem xmlns:p16="http://schemas.microsoft.com/office/powerpoint/2015/main" val="1"/>
+              </p:ext>
+            </p:extLst>
+          </p:nvPr>
+        </p:nvSpPr>
+        <p:spPr>
+          <a:xfrm rot="5400000">
+            <a:off x="759921" y="346791"/>
+            <a:ext cx="146304" cy="704088"/>
+          </a:xfrm>
+          <a:prstGeom prst="rect">
+            <a:avLst/>
+          </a:prstGeom>
+          <a:solidFill>
+            <a:schemeClr val="accent2"/>
+          </a:solidFill>
+          <a:ln>
+            <a:noFill/>
+          </a:ln>
+        </p:spPr>
+        <p:style>
+          <a:lnRef idx="2">
+            <a:schemeClr val="accent1">
+              <a:shade val="50000"/>
+            </a:schemeClr>
+          </a:lnRef>
+          <a:fillRef idx="1">
+            <a:schemeClr val="accent1"/>
+          </a:fillRef>
+          <a:effectRef idx="0">
+            <a:schemeClr val="accent1"/>
+          </a:effectRef>
+          <a:fontRef idx="minor">
+            <a:schemeClr val="lt1"/>
+          </a:fontRef>
+        </p:style>
+        <p:txBody>
+          <a:bodyPr rtlCol="0" anchor="ctr"/>
+          <a:lstStyle/>
+          <a:p>
+            <a:pPr algn="ctr"/>
+            <a:endParaRPr lang="en-US">
               <a:solidFill>
-                <a:schemeClr val="bg1"/>
+                <a:prstClr val="white"/>
               </a:solidFill>
-              <a:latin typeface="Avenir Medium" panose="02000503020000020003" pitchFamily="2" charset="0"/>
-              <a:ea typeface="Bodoni Ornaments" pitchFamily="2" charset="0"/>
+              <a:latin typeface="Calibri" panose="020F0502020204030204"/>
             </a:endParaRPr>
           </a:p>
-          <a:p>
-            <a:r>
-              <a:rPr lang="en-US" sz="4400" dirty="0">
-                <a:solidFill>
-                  <a:schemeClr val="bg1"/>
-                </a:solidFill>
-                <a:latin typeface="Avenir Medium" panose="02000503020000020003" pitchFamily="2" charset="0"/>
-                <a:ea typeface="Bodoni Ornaments" pitchFamily="2" charset="0"/>
-              </a:rPr>
-              <a:t>A fortune I inherit</a:t>
-            </a:r>
-          </a:p>
-          <a:p>
-            <a:endParaRPr lang="en-US" sz="4400" dirty="0">
+        </p:txBody>
+      </p:sp>
+      <p:sp>
+        <p:nvSpPr>
+          <p:cNvPr id="15" name="Rectangle 14">
+            <a:extLst>
+              <a:ext uri="{FF2B5EF4-FFF2-40B4-BE49-F238E27FC236}">
+                <a16:creationId xmlns:a16="http://schemas.microsoft.com/office/drawing/2014/main" id="{08C9B587-E65E-4B52-B37C-ABEBB6E87928}"/>
+              </a:ext>
+              <a:ext uri="{C183D7F6-B498-43B3-948B-1728B52AA6E4}">
+                <adec:decorative xmlns:adec="http://schemas.microsoft.com/office/drawing/2017/decorative" val="1"/>
+              </a:ext>
+            </a:extLst>
+          </p:cNvPr>
+          <p:cNvSpPr>
+            <a:spLocks noGrp="1" noRot="1" noChangeAspect="1" noMove="1" noResize="1" noEditPoints="1" noAdjustHandles="1" noChangeArrowheads="1" noChangeShapeType="1" noTextEdit="1"/>
+          </p:cNvSpPr>
+          <p:nvPr>
+            <p:extLst>
+              <p:ext uri="{386F3935-93C4-4BCD-93E2-E3B085C9AB24}">
+                <p16:designElem xmlns:p16="http://schemas.microsoft.com/office/powerpoint/2015/main" val="1"/>
+              </p:ext>
+            </p:extLst>
+          </p:nvPr>
+        </p:nvSpPr>
+        <p:spPr>
+          <a:xfrm>
+            <a:off x="481029" y="4546920"/>
+            <a:ext cx="3977640" cy="18288"/>
+          </a:xfrm>
+          <a:prstGeom prst="rect">
+            <a:avLst/>
+          </a:prstGeom>
+          <a:solidFill>
+            <a:srgbClr val="D5D5D5"/>
+          </a:solidFill>
+          <a:ln w="3175">
+            <a:noFill/>
+          </a:ln>
+          <a:effectLst/>
+        </p:spPr>
+        <p:style>
+          <a:lnRef idx="2">
+            <a:schemeClr val="accent1">
+              <a:shade val="50000"/>
+            </a:schemeClr>
+          </a:lnRef>
+          <a:fillRef idx="1">
+            <a:schemeClr val="accent1"/>
+          </a:fillRef>
+          <a:effectRef idx="0">
+            <a:schemeClr val="accent1"/>
+          </a:effectRef>
+          <a:fontRef idx="minor">
+            <a:schemeClr val="lt1"/>
+          </a:fontRef>
+        </p:style>
+        <p:txBody>
+          <a:bodyPr rtlCol="0" anchor="ctr"/>
+          <a:lstStyle/>
+          <a:p>
+            <a:pPr marL="0" marR="0" lvl="0" indent="0" algn="ctr" defTabSz="914400" rtl="0" eaLnBrk="1" fontAlgn="auto" latinLnBrk="0" hangingPunct="1">
+              <a:lnSpc>
+                <a:spcPct val="100000"/>
+              </a:lnSpc>
+              <a:spcBef>
+                <a:spcPts val="0"/>
+              </a:spcBef>
+              <a:spcAft>
+                <a:spcPts val="0"/>
+              </a:spcAft>
+              <a:buClrTx/>
+              <a:buSzTx/>
+              <a:buFontTx/>
+              <a:buNone/>
+              <a:tabLst/>
+              <a:defRPr/>
+            </a:pPr>
+            <a:endParaRPr kumimoji="0" lang="en-US" sz="1800" b="0" i="0" u="none" strike="noStrike" kern="1200" cap="none" spc="0" normalizeH="0" baseline="0" noProof="0">
+              <a:ln>
+                <a:noFill/>
+              </a:ln>
               <a:solidFill>
-                <a:schemeClr val="bg1"/>
+                <a:prstClr val="white"/>
               </a:solidFill>
-              <a:latin typeface="Avenir Medium" panose="02000503020000020003" pitchFamily="2" charset="0"/>
-              <a:ea typeface="Bodoni Ornaments" pitchFamily="2" charset="0"/>
+              <a:effectLst/>
+              <a:uLnTx/>
+              <a:uFillTx/>
+              <a:latin typeface="Calibri" panose="020F0502020204030204"/>
+              <a:ea typeface="+mn-ea"/>
+              <a:cs typeface="+mn-cs"/>
             </a:endParaRPr>
-          </a:p>
-          <a:p>
-            <a:r>
-              <a:rPr lang="en-US" sz="4400" dirty="0">
-                <a:solidFill>
-                  <a:schemeClr val="bg1"/>
-                </a:solidFill>
-                <a:latin typeface="Avenir Medium" panose="02000503020000020003" pitchFamily="2" charset="0"/>
-                <a:ea typeface="Bodoni Ornaments" pitchFamily="2" charset="0"/>
-              </a:rPr>
-              <a:t>By no work I have done</a:t>
-            </a:r>
           </a:p>
         </p:txBody>
       </p:sp>
@@ -3475,6 +3759,142 @@
 </file>
 
 <file path=ppt/slides/slide10.xml><?xml version="1.0" encoding="utf-8"?>
+<p:sld xmlns:a="http://schemas.openxmlformats.org/drawingml/2006/main" xmlns:r="http://schemas.openxmlformats.org/officeDocument/2006/relationships" xmlns:p="http://schemas.openxmlformats.org/presentationml/2006/main">
+  <p:cSld>
+    <p:bg>
+      <p:bgPr>
+        <a:solidFill>
+          <a:srgbClr val="7030A0"/>
+        </a:solidFill>
+        <a:effectLst/>
+      </p:bgPr>
+    </p:bg>
+    <p:spTree>
+      <p:nvGrpSpPr>
+        <p:cNvPr id="1" name="">
+          <a:extLst>
+            <a:ext uri="{FF2B5EF4-FFF2-40B4-BE49-F238E27FC236}">
+              <a16:creationId xmlns:a16="http://schemas.microsoft.com/office/drawing/2014/main" id="{DC6C86CD-4E1D-3561-16CB-290155117CC0}"/>
+            </a:ext>
+          </a:extLst>
+        </p:cNvPr>
+        <p:cNvGrpSpPr/>
+        <p:nvPr/>
+      </p:nvGrpSpPr>
+      <p:grpSpPr>
+        <a:xfrm>
+          <a:off x="0" y="0"/>
+          <a:ext cx="0" cy="0"/>
+          <a:chOff x="0" y="0"/>
+          <a:chExt cx="0" cy="0"/>
+        </a:xfrm>
+      </p:grpSpPr>
+      <p:sp>
+        <p:nvSpPr>
+          <p:cNvPr id="3" name="Subtitle 2">
+            <a:extLst>
+              <a:ext uri="{FF2B5EF4-FFF2-40B4-BE49-F238E27FC236}">
+                <a16:creationId xmlns:a16="http://schemas.microsoft.com/office/drawing/2014/main" id="{787F42E7-D1DC-DB2D-C43A-E9C05A0A881F}"/>
+              </a:ext>
+            </a:extLst>
+          </p:cNvPr>
+          <p:cNvSpPr>
+            <a:spLocks noGrp="1"/>
+          </p:cNvSpPr>
+          <p:nvPr>
+            <p:ph type="subTitle" idx="1"/>
+          </p:nvPr>
+        </p:nvSpPr>
+        <p:spPr>
+          <a:xfrm>
+            <a:off x="682831" y="497702"/>
+            <a:ext cx="10826338" cy="5862596"/>
+          </a:xfrm>
+        </p:spPr>
+        <p:txBody>
+          <a:bodyPr>
+            <a:noAutofit/>
+          </a:bodyPr>
+          <a:lstStyle/>
+          <a:p>
+            <a:endParaRPr lang="en-US" sz="4400" dirty="0">
+              <a:solidFill>
+                <a:schemeClr val="bg1"/>
+              </a:solidFill>
+              <a:latin typeface="Avenir Medium" panose="02000503020000020003" pitchFamily="2" charset="0"/>
+              <a:ea typeface="Bodoni Ornaments" pitchFamily="2" charset="0"/>
+            </a:endParaRPr>
+          </a:p>
+          <a:p>
+            <a:r>
+              <a:rPr lang="en-US" sz="4400" dirty="0">
+                <a:solidFill>
+                  <a:schemeClr val="bg1"/>
+                </a:solidFill>
+                <a:latin typeface="Avenir Medium" panose="02000503020000020003" pitchFamily="2" charset="0"/>
+                <a:ea typeface="Bodoni Ornaments" pitchFamily="2" charset="0"/>
+              </a:rPr>
+              <a:t>It is done</a:t>
+            </a:r>
+          </a:p>
+          <a:p>
+            <a:endParaRPr lang="en-US" sz="4400" dirty="0">
+              <a:solidFill>
+                <a:schemeClr val="bg1"/>
+              </a:solidFill>
+              <a:latin typeface="Avenir Medium" panose="02000503020000020003" pitchFamily="2" charset="0"/>
+              <a:ea typeface="Bodoni Ornaments" pitchFamily="2" charset="0"/>
+            </a:endParaRPr>
+          </a:p>
+          <a:p>
+            <a:r>
+              <a:rPr lang="en-US" sz="4400" dirty="0">
+                <a:solidFill>
+                  <a:schemeClr val="bg1"/>
+                </a:solidFill>
+                <a:latin typeface="Avenir Medium" panose="02000503020000020003" pitchFamily="2" charset="0"/>
+                <a:ea typeface="Bodoni Ornaments" pitchFamily="2" charset="0"/>
+              </a:rPr>
+              <a:t>It is finished</a:t>
+            </a:r>
+          </a:p>
+          <a:p>
+            <a:endParaRPr lang="en-US" sz="4400" dirty="0">
+              <a:solidFill>
+                <a:schemeClr val="bg1"/>
+              </a:solidFill>
+              <a:latin typeface="Avenir Medium" panose="02000503020000020003" pitchFamily="2" charset="0"/>
+              <a:ea typeface="Bodoni Ornaments" pitchFamily="2" charset="0"/>
+            </a:endParaRPr>
+          </a:p>
+          <a:p>
+            <a:r>
+              <a:rPr lang="en-US" sz="4400" dirty="0">
+                <a:solidFill>
+                  <a:schemeClr val="bg1"/>
+                </a:solidFill>
+                <a:latin typeface="Avenir Medium" panose="02000503020000020003" pitchFamily="2" charset="0"/>
+                <a:ea typeface="Bodoni Ornaments" pitchFamily="2" charset="0"/>
+              </a:rPr>
+              <a:t>No more debt I owe</a:t>
+            </a:r>
+          </a:p>
+        </p:txBody>
+      </p:sp>
+    </p:spTree>
+    <p:extLst>
+      <p:ext uri="{BB962C8B-B14F-4D97-AF65-F5344CB8AC3E}">
+        <p14:creationId xmlns:p14="http://schemas.microsoft.com/office/powerpoint/2010/main" val="881652052"/>
+      </p:ext>
+    </p:extLst>
+  </p:cSld>
+  <p:clrMapOvr>
+    <a:masterClrMapping/>
+  </p:clrMapOvr>
+</p:sld>
+</file>
+
+<file path=ppt/slides/slide11.xml><?xml version="1.0" encoding="utf-8"?>
 <p:sld xmlns:a="http://schemas.openxmlformats.org/drawingml/2006/main" xmlns:r="http://schemas.openxmlformats.org/officeDocument/2006/relationships" xmlns:p="http://schemas.openxmlformats.org/presentationml/2006/main">
   <p:cSld>
     <p:bg>
@@ -3589,7 +4009,7 @@
 </p:sld>
 </file>
 
-<file path=ppt/slides/slide11.xml><?xml version="1.0" encoding="utf-8"?>
+<file path=ppt/slides/slide12.xml><?xml version="1.0" encoding="utf-8"?>
 <p:sld xmlns:a="http://schemas.openxmlformats.org/drawingml/2006/main" xmlns:r="http://schemas.openxmlformats.org/officeDocument/2006/relationships" xmlns:p="http://schemas.openxmlformats.org/presentationml/2006/main">
   <p:cSld>
     <p:bg>
@@ -3746,7 +4166,7 @@
 </p:sld>
 </file>
 
-<file path=ppt/slides/slide12.xml><?xml version="1.0" encoding="utf-8"?>
+<file path=ppt/slides/slide13.xml><?xml version="1.0" encoding="utf-8"?>
 <p:sld xmlns:a="http://schemas.openxmlformats.org/drawingml/2006/main" xmlns:r="http://schemas.openxmlformats.org/officeDocument/2006/relationships" xmlns:p="http://schemas.openxmlformats.org/presentationml/2006/main">
   <p:cSld>
     <p:bg>
@@ -3906,7 +4326,7 @@
 </p:sld>
 </file>
 
-<file path=ppt/slides/slide13.xml><?xml version="1.0" encoding="utf-8"?>
+<file path=ppt/slides/slide14.xml><?xml version="1.0" encoding="utf-8"?>
 <p:sld xmlns:a="http://schemas.openxmlformats.org/drawingml/2006/main" xmlns:r="http://schemas.openxmlformats.org/officeDocument/2006/relationships" xmlns:p="http://schemas.openxmlformats.org/presentationml/2006/main">
   <p:cSld>
     <p:bg>
@@ -4042,7 +4462,7 @@
 </p:sld>
 </file>
 
-<file path=ppt/slides/slide14.xml><?xml version="1.0" encoding="utf-8"?>
+<file path=ppt/slides/slide15.xml><?xml version="1.0" encoding="utf-8"?>
 <p:sld xmlns:a="http://schemas.openxmlformats.org/drawingml/2006/main" xmlns:r="http://schemas.openxmlformats.org/officeDocument/2006/relationships" xmlns:p="http://schemas.openxmlformats.org/presentationml/2006/main">
   <p:cSld>
     <p:bg>
@@ -4201,6 +4621,163 @@
         <p:cNvPr id="1" name="">
           <a:extLst>
             <a:ext uri="{FF2B5EF4-FFF2-40B4-BE49-F238E27FC236}">
+              <a16:creationId xmlns:a16="http://schemas.microsoft.com/office/drawing/2014/main" id="{083E1F97-17F4-001F-7673-B8EFA09D831D}"/>
+            </a:ext>
+          </a:extLst>
+        </p:cNvPr>
+        <p:cNvGrpSpPr/>
+        <p:nvPr/>
+      </p:nvGrpSpPr>
+      <p:grpSpPr>
+        <a:xfrm>
+          <a:off x="0" y="0"/>
+          <a:ext cx="0" cy="0"/>
+          <a:chOff x="0" y="0"/>
+          <a:chExt cx="0" cy="0"/>
+        </a:xfrm>
+      </p:grpSpPr>
+      <p:sp>
+        <p:nvSpPr>
+          <p:cNvPr id="3" name="Subtitle 2">
+            <a:extLst>
+              <a:ext uri="{FF2B5EF4-FFF2-40B4-BE49-F238E27FC236}">
+                <a16:creationId xmlns:a16="http://schemas.microsoft.com/office/drawing/2014/main" id="{0F0AA937-867D-D484-37E8-C9B43A905917}"/>
+              </a:ext>
+            </a:extLst>
+          </p:cNvPr>
+          <p:cNvSpPr>
+            <a:spLocks noGrp="1"/>
+          </p:cNvSpPr>
+          <p:nvPr>
+            <p:ph type="subTitle" idx="1"/>
+          </p:nvPr>
+        </p:nvSpPr>
+        <p:spPr>
+          <a:xfrm>
+            <a:off x="682831" y="497702"/>
+            <a:ext cx="10826338" cy="5862596"/>
+          </a:xfrm>
+        </p:spPr>
+        <p:txBody>
+          <a:bodyPr>
+            <a:noAutofit/>
+          </a:bodyPr>
+          <a:lstStyle/>
+          <a:p>
+            <a:endParaRPr lang="en-US" sz="4400" dirty="0">
+              <a:solidFill>
+                <a:schemeClr val="bg1"/>
+              </a:solidFill>
+              <a:latin typeface="Avenir Medium" panose="02000503020000020003" pitchFamily="2" charset="0"/>
+              <a:ea typeface="Bodoni Ornaments" pitchFamily="2" charset="0"/>
+            </a:endParaRPr>
+          </a:p>
+          <a:p>
+            <a:r>
+              <a:rPr lang="en-US" sz="4400" dirty="0">
+                <a:solidFill>
+                  <a:schemeClr val="bg1"/>
+                </a:solidFill>
+                <a:latin typeface="Avenir Medium" panose="02000503020000020003" pitchFamily="2" charset="0"/>
+                <a:ea typeface="Bodoni Ornaments" pitchFamily="2" charset="0"/>
+              </a:rPr>
+              <a:t>All sufficient merit</a:t>
+            </a:r>
+          </a:p>
+          <a:p>
+            <a:endParaRPr lang="en-US" sz="4400" dirty="0">
+              <a:solidFill>
+                <a:schemeClr val="bg1"/>
+              </a:solidFill>
+              <a:latin typeface="Avenir Medium" panose="02000503020000020003" pitchFamily="2" charset="0"/>
+              <a:ea typeface="Bodoni Ornaments" pitchFamily="2" charset="0"/>
+            </a:endParaRPr>
+          </a:p>
+          <a:p>
+            <a:r>
+              <a:rPr lang="en-US" sz="4400" dirty="0">
+                <a:solidFill>
+                  <a:schemeClr val="bg1"/>
+                </a:solidFill>
+                <a:latin typeface="Avenir Medium" panose="02000503020000020003" pitchFamily="2" charset="0"/>
+                <a:ea typeface="Bodoni Ornaments" pitchFamily="2" charset="0"/>
+              </a:rPr>
+              <a:t>Shining like the sun</a:t>
+            </a:r>
+          </a:p>
+          <a:p>
+            <a:endParaRPr lang="en-US" sz="4400" dirty="0">
+              <a:solidFill>
+                <a:schemeClr val="bg1"/>
+              </a:solidFill>
+              <a:latin typeface="Avenir Medium" panose="02000503020000020003" pitchFamily="2" charset="0"/>
+              <a:ea typeface="Bodoni Ornaments" pitchFamily="2" charset="0"/>
+            </a:endParaRPr>
+          </a:p>
+          <a:p>
+            <a:r>
+              <a:rPr lang="en-US" sz="4400" dirty="0">
+                <a:solidFill>
+                  <a:schemeClr val="bg1"/>
+                </a:solidFill>
+                <a:latin typeface="Avenir Medium" panose="02000503020000020003" pitchFamily="2" charset="0"/>
+                <a:ea typeface="Bodoni Ornaments" pitchFamily="2" charset="0"/>
+              </a:rPr>
+              <a:t>A fortune I inherit</a:t>
+            </a:r>
+          </a:p>
+          <a:p>
+            <a:endParaRPr lang="en-US" sz="4400" dirty="0">
+              <a:solidFill>
+                <a:schemeClr val="bg1"/>
+              </a:solidFill>
+              <a:latin typeface="Avenir Medium" panose="02000503020000020003" pitchFamily="2" charset="0"/>
+              <a:ea typeface="Bodoni Ornaments" pitchFamily="2" charset="0"/>
+            </a:endParaRPr>
+          </a:p>
+          <a:p>
+            <a:r>
+              <a:rPr lang="en-US" sz="4400" dirty="0">
+                <a:solidFill>
+                  <a:schemeClr val="bg1"/>
+                </a:solidFill>
+                <a:latin typeface="Avenir Medium" panose="02000503020000020003" pitchFamily="2" charset="0"/>
+                <a:ea typeface="Bodoni Ornaments" pitchFamily="2" charset="0"/>
+              </a:rPr>
+              <a:t>By no work I have done</a:t>
+            </a:r>
+          </a:p>
+        </p:txBody>
+      </p:sp>
+    </p:spTree>
+    <p:extLst>
+      <p:ext uri="{BB962C8B-B14F-4D97-AF65-F5344CB8AC3E}">
+        <p14:creationId xmlns:p14="http://schemas.microsoft.com/office/powerpoint/2010/main" val="2991002073"/>
+      </p:ext>
+    </p:extLst>
+  </p:cSld>
+  <p:clrMapOvr>
+    <a:masterClrMapping/>
+  </p:clrMapOvr>
+</p:sld>
+</file>
+
+<file path=ppt/slides/slide3.xml><?xml version="1.0" encoding="utf-8"?>
+<p:sld xmlns:a="http://schemas.openxmlformats.org/drawingml/2006/main" xmlns:r="http://schemas.openxmlformats.org/officeDocument/2006/relationships" xmlns:p="http://schemas.openxmlformats.org/presentationml/2006/main">
+  <p:cSld>
+    <p:bg>
+      <p:bgPr>
+        <a:solidFill>
+          <a:schemeClr val="accent1"/>
+        </a:solidFill>
+        <a:effectLst/>
+      </p:bgPr>
+    </p:bg>
+    <p:spTree>
+      <p:nvGrpSpPr>
+        <p:cNvPr id="1" name="">
+          <a:extLst>
+            <a:ext uri="{FF2B5EF4-FFF2-40B4-BE49-F238E27FC236}">
               <a16:creationId xmlns:a16="http://schemas.microsoft.com/office/drawing/2014/main" id="{6E321B20-1F07-D41B-D17B-105DC9065E30}"/>
             </a:ext>
           </a:extLst>
@@ -4342,7 +4919,7 @@
 </p:sld>
 </file>
 
-<file path=ppt/slides/slide3.xml><?xml version="1.0" encoding="utf-8"?>
+<file path=ppt/slides/slide4.xml><?xml version="1.0" encoding="utf-8"?>
 <p:sld xmlns:a="http://schemas.openxmlformats.org/drawingml/2006/main" xmlns:r="http://schemas.openxmlformats.org/officeDocument/2006/relationships" xmlns:p="http://schemas.openxmlformats.org/presentationml/2006/main">
   <p:cSld>
     <p:bg>
@@ -4499,7 +5076,7 @@
 </p:sld>
 </file>
 
-<file path=ppt/slides/slide4.xml><?xml version="1.0" encoding="utf-8"?>
+<file path=ppt/slides/slide5.xml><?xml version="1.0" encoding="utf-8"?>
 <p:sld xmlns:a="http://schemas.openxmlformats.org/drawingml/2006/main" xmlns:r="http://schemas.openxmlformats.org/officeDocument/2006/relationships" xmlns:p="http://schemas.openxmlformats.org/presentationml/2006/main">
   <p:cSld>
     <p:bg>
@@ -4656,7 +5233,7 @@
 </p:sld>
 </file>
 
-<file path=ppt/slides/slide5.xml><?xml version="1.0" encoding="utf-8"?>
+<file path=ppt/slides/slide6.xml><?xml version="1.0" encoding="utf-8"?>
 <p:sld xmlns:a="http://schemas.openxmlformats.org/drawingml/2006/main" xmlns:r="http://schemas.openxmlformats.org/officeDocument/2006/relationships" xmlns:p="http://schemas.openxmlformats.org/presentationml/2006/main">
   <p:cSld>
     <p:bg>
@@ -4792,7 +5369,7 @@
 </p:sld>
 </file>
 
-<file path=ppt/slides/slide6.xml><?xml version="1.0" encoding="utf-8"?>
+<file path=ppt/slides/slide7.xml><?xml version="1.0" encoding="utf-8"?>
 <p:sld xmlns:a="http://schemas.openxmlformats.org/drawingml/2006/main" xmlns:r="http://schemas.openxmlformats.org/officeDocument/2006/relationships" xmlns:p="http://schemas.openxmlformats.org/presentationml/2006/main">
   <p:cSld>
     <p:bg>
@@ -4907,7 +5484,7 @@
 </p:sld>
 </file>
 
-<file path=ppt/slides/slide7.xml><?xml version="1.0" encoding="utf-8"?>
+<file path=ppt/slides/slide8.xml><?xml version="1.0" encoding="utf-8"?>
 <p:sld xmlns:a="http://schemas.openxmlformats.org/drawingml/2006/main" xmlns:r="http://schemas.openxmlformats.org/officeDocument/2006/relationships" xmlns:p="http://schemas.openxmlformats.org/presentationml/2006/main">
   <p:cSld>
     <p:bg>
@@ -5037,7 +5614,7 @@
 </p:sld>
 </file>
 
-<file path=ppt/slides/slide8.xml><?xml version="1.0" encoding="utf-8"?>
+<file path=ppt/slides/slide9.xml><?xml version="1.0" encoding="utf-8"?>
 <p:sld xmlns:a="http://schemas.openxmlformats.org/drawingml/2006/main" xmlns:r="http://schemas.openxmlformats.org/officeDocument/2006/relationships" xmlns:p="http://schemas.openxmlformats.org/presentationml/2006/main">
   <p:cSld>
     <p:bg>
@@ -5185,142 +5762,6 @@
     <p:extLst>
       <p:ext uri="{BB962C8B-B14F-4D97-AF65-F5344CB8AC3E}">
         <p14:creationId xmlns:p14="http://schemas.microsoft.com/office/powerpoint/2010/main" val="2305385221"/>
-      </p:ext>
-    </p:extLst>
-  </p:cSld>
-  <p:clrMapOvr>
-    <a:masterClrMapping/>
-  </p:clrMapOvr>
-</p:sld>
-</file>
-
-<file path=ppt/slides/slide9.xml><?xml version="1.0" encoding="utf-8"?>
-<p:sld xmlns:a="http://schemas.openxmlformats.org/drawingml/2006/main" xmlns:r="http://schemas.openxmlformats.org/officeDocument/2006/relationships" xmlns:p="http://schemas.openxmlformats.org/presentationml/2006/main">
-  <p:cSld>
-    <p:bg>
-      <p:bgPr>
-        <a:solidFill>
-          <a:srgbClr val="7030A0"/>
-        </a:solidFill>
-        <a:effectLst/>
-      </p:bgPr>
-    </p:bg>
-    <p:spTree>
-      <p:nvGrpSpPr>
-        <p:cNvPr id="1" name="">
-          <a:extLst>
-            <a:ext uri="{FF2B5EF4-FFF2-40B4-BE49-F238E27FC236}">
-              <a16:creationId xmlns:a16="http://schemas.microsoft.com/office/drawing/2014/main" id="{DC6C86CD-4E1D-3561-16CB-290155117CC0}"/>
-            </a:ext>
-          </a:extLst>
-        </p:cNvPr>
-        <p:cNvGrpSpPr/>
-        <p:nvPr/>
-      </p:nvGrpSpPr>
-      <p:grpSpPr>
-        <a:xfrm>
-          <a:off x="0" y="0"/>
-          <a:ext cx="0" cy="0"/>
-          <a:chOff x="0" y="0"/>
-          <a:chExt cx="0" cy="0"/>
-        </a:xfrm>
-      </p:grpSpPr>
-      <p:sp>
-        <p:nvSpPr>
-          <p:cNvPr id="3" name="Subtitle 2">
-            <a:extLst>
-              <a:ext uri="{FF2B5EF4-FFF2-40B4-BE49-F238E27FC236}">
-                <a16:creationId xmlns:a16="http://schemas.microsoft.com/office/drawing/2014/main" id="{787F42E7-D1DC-DB2D-C43A-E9C05A0A881F}"/>
-              </a:ext>
-            </a:extLst>
-          </p:cNvPr>
-          <p:cNvSpPr>
-            <a:spLocks noGrp="1"/>
-          </p:cNvSpPr>
-          <p:nvPr>
-            <p:ph type="subTitle" idx="1"/>
-          </p:nvPr>
-        </p:nvSpPr>
-        <p:spPr>
-          <a:xfrm>
-            <a:off x="682831" y="497702"/>
-            <a:ext cx="10826338" cy="5862596"/>
-          </a:xfrm>
-        </p:spPr>
-        <p:txBody>
-          <a:bodyPr>
-            <a:noAutofit/>
-          </a:bodyPr>
-          <a:lstStyle/>
-          <a:p>
-            <a:endParaRPr lang="en-US" sz="4400" dirty="0">
-              <a:solidFill>
-                <a:schemeClr val="bg1"/>
-              </a:solidFill>
-              <a:latin typeface="Avenir Medium" panose="02000503020000020003" pitchFamily="2" charset="0"/>
-              <a:ea typeface="Bodoni Ornaments" pitchFamily="2" charset="0"/>
-            </a:endParaRPr>
-          </a:p>
-          <a:p>
-            <a:r>
-              <a:rPr lang="en-US" sz="4400" dirty="0">
-                <a:solidFill>
-                  <a:schemeClr val="bg1"/>
-                </a:solidFill>
-                <a:latin typeface="Avenir Medium" panose="02000503020000020003" pitchFamily="2" charset="0"/>
-                <a:ea typeface="Bodoni Ornaments" pitchFamily="2" charset="0"/>
-              </a:rPr>
-              <a:t>It is done</a:t>
-            </a:r>
-          </a:p>
-          <a:p>
-            <a:endParaRPr lang="en-US" sz="4400" dirty="0">
-              <a:solidFill>
-                <a:schemeClr val="bg1"/>
-              </a:solidFill>
-              <a:latin typeface="Avenir Medium" panose="02000503020000020003" pitchFamily="2" charset="0"/>
-              <a:ea typeface="Bodoni Ornaments" pitchFamily="2" charset="0"/>
-            </a:endParaRPr>
-          </a:p>
-          <a:p>
-            <a:r>
-              <a:rPr lang="en-US" sz="4400" dirty="0">
-                <a:solidFill>
-                  <a:schemeClr val="bg1"/>
-                </a:solidFill>
-                <a:latin typeface="Avenir Medium" panose="02000503020000020003" pitchFamily="2" charset="0"/>
-                <a:ea typeface="Bodoni Ornaments" pitchFamily="2" charset="0"/>
-              </a:rPr>
-              <a:t>It is finished</a:t>
-            </a:r>
-          </a:p>
-          <a:p>
-            <a:endParaRPr lang="en-US" sz="4400" dirty="0">
-              <a:solidFill>
-                <a:schemeClr val="bg1"/>
-              </a:solidFill>
-              <a:latin typeface="Avenir Medium" panose="02000503020000020003" pitchFamily="2" charset="0"/>
-              <a:ea typeface="Bodoni Ornaments" pitchFamily="2" charset="0"/>
-            </a:endParaRPr>
-          </a:p>
-          <a:p>
-            <a:r>
-              <a:rPr lang="en-US" sz="4400" dirty="0">
-                <a:solidFill>
-                  <a:schemeClr val="bg1"/>
-                </a:solidFill>
-                <a:latin typeface="Avenir Medium" panose="02000503020000020003" pitchFamily="2" charset="0"/>
-                <a:ea typeface="Bodoni Ornaments" pitchFamily="2" charset="0"/>
-              </a:rPr>
-              <a:t>No more debt I owe</a:t>
-            </a:r>
-          </a:p>
-        </p:txBody>
-      </p:sp>
-    </p:spTree>
-    <p:extLst>
-      <p:ext uri="{BB962C8B-B14F-4D97-AF65-F5344CB8AC3E}">
-        <p14:creationId xmlns:p14="http://schemas.microsoft.com/office/powerpoint/2010/main" val="881652052"/>
       </p:ext>
     </p:extLst>
   </p:cSld>

--- a/All Sufficient Merit.pptx
+++ b/All Sufficient Merit.pptx
@@ -2,32 +2,29 @@
 <file path=ppt/presentation.xml><?xml version="1.0" encoding="utf-8"?>
 <p:presentation xmlns:a="http://schemas.openxmlformats.org/drawingml/2006/main" xmlns:r="http://schemas.openxmlformats.org/officeDocument/2006/relationships" xmlns:p="http://schemas.openxmlformats.org/presentationml/2006/main" saveSubsetFonts="1" autoCompressPictures="0">
   <p:sldMasterIdLst>
-    <p:sldMasterId id="2147483648" r:id="rId1"/>
+    <p:sldMasterId id="2147483660" r:id="rId1"/>
   </p:sldMasterIdLst>
   <p:sldIdLst>
-    <p:sldId id="261" r:id="rId2"/>
-    <p:sldId id="275" r:id="rId3"/>
-    <p:sldId id="262" r:id="rId4"/>
-    <p:sldId id="263" r:id="rId5"/>
-    <p:sldId id="264" r:id="rId6"/>
-    <p:sldId id="265" r:id="rId7"/>
-    <p:sldId id="266" r:id="rId8"/>
-    <p:sldId id="267" r:id="rId9"/>
-    <p:sldId id="268" r:id="rId10"/>
-    <p:sldId id="269" r:id="rId11"/>
-    <p:sldId id="270" r:id="rId12"/>
-    <p:sldId id="271" r:id="rId13"/>
-    <p:sldId id="272" r:id="rId14"/>
-    <p:sldId id="273" r:id="rId15"/>
-    <p:sldId id="274" r:id="rId16"/>
+    <p:sldId id="274" r:id="rId2"/>
+    <p:sldId id="280" r:id="rId3"/>
+    <p:sldId id="281" r:id="rId4"/>
+    <p:sldId id="282" r:id="rId5"/>
+    <p:sldId id="283" r:id="rId6"/>
+    <p:sldId id="284" r:id="rId7"/>
+    <p:sldId id="285" r:id="rId8"/>
+    <p:sldId id="286" r:id="rId9"/>
+    <p:sldId id="287" r:id="rId10"/>
+    <p:sldId id="288" r:id="rId11"/>
+    <p:sldId id="289" r:id="rId12"/>
+    <p:sldId id="290" r:id="rId13"/>
   </p:sldIdLst>
-  <p:sldSz cx="12192000" cy="6858000"/>
+  <p:sldSz cx="9144000" cy="6858000" type="screen4x3"/>
   <p:notesSz cx="6858000" cy="9144000"/>
   <p:defaultTextStyle>
     <a:defPPr>
       <a:defRPr lang="en-US"/>
     </a:defPPr>
-    <a:lvl1pPr marL="0" algn="l" defTabSz="914400" rtl="0" eaLnBrk="1" latinLnBrk="0" hangingPunct="1">
+    <a:lvl1pPr marL="0" algn="l" defTabSz="457200" rtl="0" eaLnBrk="1" latinLnBrk="0" hangingPunct="1">
       <a:defRPr sz="1800" kern="1200">
         <a:solidFill>
           <a:schemeClr val="tx1"/>
@@ -37,7 +34,7 @@
         <a:cs typeface="+mn-cs"/>
       </a:defRPr>
     </a:lvl1pPr>
-    <a:lvl2pPr marL="457200" algn="l" defTabSz="914400" rtl="0" eaLnBrk="1" latinLnBrk="0" hangingPunct="1">
+    <a:lvl2pPr marL="457200" algn="l" defTabSz="457200" rtl="0" eaLnBrk="1" latinLnBrk="0" hangingPunct="1">
       <a:defRPr sz="1800" kern="1200">
         <a:solidFill>
           <a:schemeClr val="tx1"/>
@@ -47,7 +44,7 @@
         <a:cs typeface="+mn-cs"/>
       </a:defRPr>
     </a:lvl2pPr>
-    <a:lvl3pPr marL="914400" algn="l" defTabSz="914400" rtl="0" eaLnBrk="1" latinLnBrk="0" hangingPunct="1">
+    <a:lvl3pPr marL="914400" algn="l" defTabSz="457200" rtl="0" eaLnBrk="1" latinLnBrk="0" hangingPunct="1">
       <a:defRPr sz="1800" kern="1200">
         <a:solidFill>
           <a:schemeClr val="tx1"/>
@@ -57,7 +54,7 @@
         <a:cs typeface="+mn-cs"/>
       </a:defRPr>
     </a:lvl3pPr>
-    <a:lvl4pPr marL="1371600" algn="l" defTabSz="914400" rtl="0" eaLnBrk="1" latinLnBrk="0" hangingPunct="1">
+    <a:lvl4pPr marL="1371600" algn="l" defTabSz="457200" rtl="0" eaLnBrk="1" latinLnBrk="0" hangingPunct="1">
       <a:defRPr sz="1800" kern="1200">
         <a:solidFill>
           <a:schemeClr val="tx1"/>
@@ -67,7 +64,7 @@
         <a:cs typeface="+mn-cs"/>
       </a:defRPr>
     </a:lvl4pPr>
-    <a:lvl5pPr marL="1828800" algn="l" defTabSz="914400" rtl="0" eaLnBrk="1" latinLnBrk="0" hangingPunct="1">
+    <a:lvl5pPr marL="1828800" algn="l" defTabSz="457200" rtl="0" eaLnBrk="1" latinLnBrk="0" hangingPunct="1">
       <a:defRPr sz="1800" kern="1200">
         <a:solidFill>
           <a:schemeClr val="tx1"/>
@@ -77,7 +74,7 @@
         <a:cs typeface="+mn-cs"/>
       </a:defRPr>
     </a:lvl5pPr>
-    <a:lvl6pPr marL="2286000" algn="l" defTabSz="914400" rtl="0" eaLnBrk="1" latinLnBrk="0" hangingPunct="1">
+    <a:lvl6pPr marL="2286000" algn="l" defTabSz="457200" rtl="0" eaLnBrk="1" latinLnBrk="0" hangingPunct="1">
       <a:defRPr sz="1800" kern="1200">
         <a:solidFill>
           <a:schemeClr val="tx1"/>
@@ -87,7 +84,7 @@
         <a:cs typeface="+mn-cs"/>
       </a:defRPr>
     </a:lvl6pPr>
-    <a:lvl7pPr marL="2743200" algn="l" defTabSz="914400" rtl="0" eaLnBrk="1" latinLnBrk="0" hangingPunct="1">
+    <a:lvl7pPr marL="2743200" algn="l" defTabSz="457200" rtl="0" eaLnBrk="1" latinLnBrk="0" hangingPunct="1">
       <a:defRPr sz="1800" kern="1200">
         <a:solidFill>
           <a:schemeClr val="tx1"/>
@@ -97,7 +94,7 @@
         <a:cs typeface="+mn-cs"/>
       </a:defRPr>
     </a:lvl7pPr>
-    <a:lvl8pPr marL="3200400" algn="l" defTabSz="914400" rtl="0" eaLnBrk="1" latinLnBrk="0" hangingPunct="1">
+    <a:lvl8pPr marL="3200400" algn="l" defTabSz="457200" rtl="0" eaLnBrk="1" latinLnBrk="0" hangingPunct="1">
       <a:defRPr sz="1800" kern="1200">
         <a:solidFill>
           <a:schemeClr val="tx1"/>
@@ -107,7 +104,7 @@
         <a:cs typeface="+mn-cs"/>
       </a:defRPr>
     </a:lvl8pPr>
-    <a:lvl9pPr marL="3657600" algn="l" defTabSz="914400" rtl="0" eaLnBrk="1" latinLnBrk="0" hangingPunct="1">
+    <a:lvl9pPr marL="3657600" algn="l" defTabSz="457200" rtl="0" eaLnBrk="1" latinLnBrk="0" hangingPunct="1">
       <a:defRPr sz="1800" kern="1200">
         <a:solidFill>
           <a:schemeClr val="tx1"/>
@@ -145,13 +142,7 @@
       </p:grpSpPr>
       <p:sp>
         <p:nvSpPr>
-          <p:cNvPr id="2" name="Title 1">
-            <a:extLst>
-              <a:ext uri="{FF2B5EF4-FFF2-40B4-BE49-F238E27FC236}">
-                <a16:creationId xmlns:a16="http://schemas.microsoft.com/office/drawing/2014/main" id="{50FC4881-024B-CA4F-1A53-33C2DC0E7490}"/>
-              </a:ext>
-            </a:extLst>
-          </p:cNvPr>
+          <p:cNvPr id="2" name="Title 1"/>
           <p:cNvSpPr>
             <a:spLocks noGrp="1"/>
           </p:cNvSpPr>
@@ -161,8 +152,8 @@
         </p:nvSpPr>
         <p:spPr>
           <a:xfrm>
-            <a:off x="1524000" y="1122363"/>
-            <a:ext cx="9144000" cy="2387600"/>
+            <a:off x="685800" y="1122363"/>
+            <a:ext cx="7772400" cy="2387600"/>
           </a:xfrm>
         </p:spPr>
         <p:txBody>
@@ -177,18 +168,13 @@
               <a:rPr lang="en-US"/>
               <a:t>Click to edit Master title style</a:t>
             </a:r>
-          </a:p>
-        </p:txBody>
-      </p:sp>
-      <p:sp>
-        <p:nvSpPr>
-          <p:cNvPr id="3" name="Subtitle 2">
-            <a:extLst>
-              <a:ext uri="{FF2B5EF4-FFF2-40B4-BE49-F238E27FC236}">
-                <a16:creationId xmlns:a16="http://schemas.microsoft.com/office/drawing/2014/main" id="{8B0D2959-CEED-C8E4-130C-7C436E2473A7}"/>
-              </a:ext>
-            </a:extLst>
-          </p:cNvPr>
+            <a:endParaRPr lang="en-US" dirty="0"/>
+          </a:p>
+        </p:txBody>
+      </p:sp>
+      <p:sp>
+        <p:nvSpPr>
+          <p:cNvPr id="3" name="Subtitle 2"/>
           <p:cNvSpPr>
             <a:spLocks noGrp="1"/>
           </p:cNvSpPr>
@@ -198,8 +184,8 @@
         </p:nvSpPr>
         <p:spPr>
           <a:xfrm>
-            <a:off x="1524000" y="3602038"/>
-            <a:ext cx="9144000" cy="1655762"/>
+            <a:off x="1143000" y="3602038"/>
+            <a:ext cx="6858000" cy="1655762"/>
           </a:xfrm>
         </p:spPr>
         <p:txBody>
@@ -247,18 +233,13 @@
               <a:rPr lang="en-US"/>
               <a:t>Click to edit Master subtitle style</a:t>
             </a:r>
-          </a:p>
-        </p:txBody>
-      </p:sp>
-      <p:sp>
-        <p:nvSpPr>
-          <p:cNvPr id="4" name="Date Placeholder 3">
-            <a:extLst>
-              <a:ext uri="{FF2B5EF4-FFF2-40B4-BE49-F238E27FC236}">
-                <a16:creationId xmlns:a16="http://schemas.microsoft.com/office/drawing/2014/main" id="{4ABBB692-36FC-D0C6-12D7-33A0E66EA065}"/>
-              </a:ext>
-            </a:extLst>
-          </p:cNvPr>
+            <a:endParaRPr lang="en-US" dirty="0"/>
+          </a:p>
+        </p:txBody>
+      </p:sp>
+      <p:sp>
+        <p:nvSpPr>
+          <p:cNvPr id="4" name="Date Placeholder 3"/>
           <p:cNvSpPr>
             <a:spLocks noGrp="1"/>
           </p:cNvSpPr>
@@ -273,7 +254,7 @@
           <a:p>
             <a:fld id="{E759A0DE-F190-5444-87AC-4719D5F20D15}" type="datetimeFigureOut">
               <a:rPr lang="en-US" smtClean="0"/>
-              <a:t>11/15/25</a:t>
+              <a:t>8/15/26</a:t>
             </a:fld>
             <a:endParaRPr lang="en-US"/>
           </a:p>
@@ -281,13 +262,7 @@
       </p:sp>
       <p:sp>
         <p:nvSpPr>
-          <p:cNvPr id="5" name="Footer Placeholder 4">
-            <a:extLst>
-              <a:ext uri="{FF2B5EF4-FFF2-40B4-BE49-F238E27FC236}">
-                <a16:creationId xmlns:a16="http://schemas.microsoft.com/office/drawing/2014/main" id="{51817876-8CFB-960B-6A57-C7F9FD39D3EC}"/>
-              </a:ext>
-            </a:extLst>
-          </p:cNvPr>
+          <p:cNvPr id="5" name="Footer Placeholder 4"/>
           <p:cNvSpPr>
             <a:spLocks noGrp="1"/>
           </p:cNvSpPr>
@@ -306,13 +281,7 @@
       </p:sp>
       <p:sp>
         <p:nvSpPr>
-          <p:cNvPr id="6" name="Slide Number Placeholder 5">
-            <a:extLst>
-              <a:ext uri="{FF2B5EF4-FFF2-40B4-BE49-F238E27FC236}">
-                <a16:creationId xmlns:a16="http://schemas.microsoft.com/office/drawing/2014/main" id="{DB548E83-1153-3307-5818-CD7F2833A3F5}"/>
-              </a:ext>
-            </a:extLst>
-          </p:cNvPr>
+          <p:cNvPr id="6" name="Slide Number Placeholder 5"/>
           <p:cNvSpPr>
             <a:spLocks noGrp="1"/>
           </p:cNvSpPr>
@@ -336,7 +305,7 @@
     </p:spTree>
     <p:extLst>
       <p:ext uri="{BB962C8B-B14F-4D97-AF65-F5344CB8AC3E}">
-        <p14:creationId xmlns:p14="http://schemas.microsoft.com/office/powerpoint/2010/main" val="2594881872"/>
+        <p14:creationId xmlns:p14="http://schemas.microsoft.com/office/powerpoint/2010/main" val="87880011"/>
       </p:ext>
     </p:extLst>
   </p:cSld>
@@ -365,13 +334,7 @@
       </p:grpSpPr>
       <p:sp>
         <p:nvSpPr>
-          <p:cNvPr id="2" name="Title 1">
-            <a:extLst>
-              <a:ext uri="{FF2B5EF4-FFF2-40B4-BE49-F238E27FC236}">
-                <a16:creationId xmlns:a16="http://schemas.microsoft.com/office/drawing/2014/main" id="{9015C597-3152-5765-EBC1-B17D9951543D}"/>
-              </a:ext>
-            </a:extLst>
-          </p:cNvPr>
+          <p:cNvPr id="2" name="Title 1"/>
           <p:cNvSpPr>
             <a:spLocks noGrp="1"/>
           </p:cNvSpPr>
@@ -388,18 +351,13 @@
               <a:rPr lang="en-US"/>
               <a:t>Click to edit Master title style</a:t>
             </a:r>
-          </a:p>
-        </p:txBody>
-      </p:sp>
-      <p:sp>
-        <p:nvSpPr>
-          <p:cNvPr id="3" name="Vertical Text Placeholder 2">
-            <a:extLst>
-              <a:ext uri="{FF2B5EF4-FFF2-40B4-BE49-F238E27FC236}">
-                <a16:creationId xmlns:a16="http://schemas.microsoft.com/office/drawing/2014/main" id="{5BA5F73E-18E1-021C-9878-B37DC31E2802}"/>
-              </a:ext>
-            </a:extLst>
-          </p:cNvPr>
+            <a:endParaRPr lang="en-US" dirty="0"/>
+          </a:p>
+        </p:txBody>
+      </p:sp>
+      <p:sp>
+        <p:nvSpPr>
+          <p:cNvPr id="3" name="Vertical Text Placeholder 2"/>
           <p:cNvSpPr>
             <a:spLocks noGrp="1"/>
           </p:cNvSpPr>
@@ -445,18 +403,13 @@
               <a:rPr lang="en-US"/>
               <a:t>Fifth level</a:t>
             </a:r>
-          </a:p>
-        </p:txBody>
-      </p:sp>
-      <p:sp>
-        <p:nvSpPr>
-          <p:cNvPr id="4" name="Date Placeholder 3">
-            <a:extLst>
-              <a:ext uri="{FF2B5EF4-FFF2-40B4-BE49-F238E27FC236}">
-                <a16:creationId xmlns:a16="http://schemas.microsoft.com/office/drawing/2014/main" id="{B683AF53-E0B5-2F63-C15E-4BF621A3186B}"/>
-              </a:ext>
-            </a:extLst>
-          </p:cNvPr>
+            <a:endParaRPr lang="en-US" dirty="0"/>
+          </a:p>
+        </p:txBody>
+      </p:sp>
+      <p:sp>
+        <p:nvSpPr>
+          <p:cNvPr id="4" name="Date Placeholder 3"/>
           <p:cNvSpPr>
             <a:spLocks noGrp="1"/>
           </p:cNvSpPr>
@@ -471,7 +424,7 @@
           <a:p>
             <a:fld id="{E759A0DE-F190-5444-87AC-4719D5F20D15}" type="datetimeFigureOut">
               <a:rPr lang="en-US" smtClean="0"/>
-              <a:t>11/15/25</a:t>
+              <a:t>8/15/26</a:t>
             </a:fld>
             <a:endParaRPr lang="en-US"/>
           </a:p>
@@ -479,13 +432,7 @@
       </p:sp>
       <p:sp>
         <p:nvSpPr>
-          <p:cNvPr id="5" name="Footer Placeholder 4">
-            <a:extLst>
-              <a:ext uri="{FF2B5EF4-FFF2-40B4-BE49-F238E27FC236}">
-                <a16:creationId xmlns:a16="http://schemas.microsoft.com/office/drawing/2014/main" id="{D1CA465D-C46F-7FA4-9154-773B74869505}"/>
-              </a:ext>
-            </a:extLst>
-          </p:cNvPr>
+          <p:cNvPr id="5" name="Footer Placeholder 4"/>
           <p:cNvSpPr>
             <a:spLocks noGrp="1"/>
           </p:cNvSpPr>
@@ -504,13 +451,7 @@
       </p:sp>
       <p:sp>
         <p:nvSpPr>
-          <p:cNvPr id="6" name="Slide Number Placeholder 5">
-            <a:extLst>
-              <a:ext uri="{FF2B5EF4-FFF2-40B4-BE49-F238E27FC236}">
-                <a16:creationId xmlns:a16="http://schemas.microsoft.com/office/drawing/2014/main" id="{BBA3BEE5-DE05-B54F-20CA-E8C336AE957E}"/>
-              </a:ext>
-            </a:extLst>
-          </p:cNvPr>
+          <p:cNvPr id="6" name="Slide Number Placeholder 5"/>
           <p:cNvSpPr>
             <a:spLocks noGrp="1"/>
           </p:cNvSpPr>
@@ -534,7 +475,7 @@
     </p:spTree>
     <p:extLst>
       <p:ext uri="{BB962C8B-B14F-4D97-AF65-F5344CB8AC3E}">
-        <p14:creationId xmlns:p14="http://schemas.microsoft.com/office/powerpoint/2010/main" val="3115587574"/>
+        <p14:creationId xmlns:p14="http://schemas.microsoft.com/office/powerpoint/2010/main" val="3708245266"/>
       </p:ext>
     </p:extLst>
   </p:cSld>
@@ -563,13 +504,7 @@
       </p:grpSpPr>
       <p:sp>
         <p:nvSpPr>
-          <p:cNvPr id="2" name="Vertical Title 1">
-            <a:extLst>
-              <a:ext uri="{FF2B5EF4-FFF2-40B4-BE49-F238E27FC236}">
-                <a16:creationId xmlns:a16="http://schemas.microsoft.com/office/drawing/2014/main" id="{42C72931-C193-DCDC-01FD-20CDA0AD4513}"/>
-              </a:ext>
-            </a:extLst>
-          </p:cNvPr>
+          <p:cNvPr id="2" name="Vertical Title 1"/>
           <p:cNvSpPr>
             <a:spLocks noGrp="1"/>
           </p:cNvSpPr>
@@ -579,8 +514,8 @@
         </p:nvSpPr>
         <p:spPr>
           <a:xfrm>
-            <a:off x="8724900" y="365125"/>
-            <a:ext cx="2628900" cy="5811838"/>
+            <a:off x="6543675" y="365125"/>
+            <a:ext cx="1971675" cy="5811838"/>
           </a:xfrm>
         </p:spPr>
         <p:txBody>
@@ -591,18 +526,13 @@
               <a:rPr lang="en-US"/>
               <a:t>Click to edit Master title style</a:t>
             </a:r>
-          </a:p>
-        </p:txBody>
-      </p:sp>
-      <p:sp>
-        <p:nvSpPr>
-          <p:cNvPr id="3" name="Vertical Text Placeholder 2">
-            <a:extLst>
-              <a:ext uri="{FF2B5EF4-FFF2-40B4-BE49-F238E27FC236}">
-                <a16:creationId xmlns:a16="http://schemas.microsoft.com/office/drawing/2014/main" id="{E65B2C1B-4D9D-9A62-13D7-01C6580B781D}"/>
-              </a:ext>
-            </a:extLst>
-          </p:cNvPr>
+            <a:endParaRPr lang="en-US" dirty="0"/>
+          </a:p>
+        </p:txBody>
+      </p:sp>
+      <p:sp>
+        <p:nvSpPr>
+          <p:cNvPr id="3" name="Vertical Text Placeholder 2"/>
           <p:cNvSpPr>
             <a:spLocks noGrp="1"/>
           </p:cNvSpPr>
@@ -612,8 +542,8 @@
         </p:nvSpPr>
         <p:spPr>
           <a:xfrm>
-            <a:off x="838200" y="365125"/>
-            <a:ext cx="7734300" cy="5811838"/>
+            <a:off x="628650" y="365125"/>
+            <a:ext cx="5800725" cy="5811838"/>
           </a:xfrm>
         </p:spPr>
         <p:txBody>
@@ -653,18 +583,13 @@
               <a:rPr lang="en-US"/>
               <a:t>Fifth level</a:t>
             </a:r>
-          </a:p>
-        </p:txBody>
-      </p:sp>
-      <p:sp>
-        <p:nvSpPr>
-          <p:cNvPr id="4" name="Date Placeholder 3">
-            <a:extLst>
-              <a:ext uri="{FF2B5EF4-FFF2-40B4-BE49-F238E27FC236}">
-                <a16:creationId xmlns:a16="http://schemas.microsoft.com/office/drawing/2014/main" id="{57445465-66E1-00A0-A5D2-D034616CC34D}"/>
-              </a:ext>
-            </a:extLst>
-          </p:cNvPr>
+            <a:endParaRPr lang="en-US" dirty="0"/>
+          </a:p>
+        </p:txBody>
+      </p:sp>
+      <p:sp>
+        <p:nvSpPr>
+          <p:cNvPr id="4" name="Date Placeholder 3"/>
           <p:cNvSpPr>
             <a:spLocks noGrp="1"/>
           </p:cNvSpPr>
@@ -679,7 +604,7 @@
           <a:p>
             <a:fld id="{E759A0DE-F190-5444-87AC-4719D5F20D15}" type="datetimeFigureOut">
               <a:rPr lang="en-US" smtClean="0"/>
-              <a:t>11/15/25</a:t>
+              <a:t>8/15/26</a:t>
             </a:fld>
             <a:endParaRPr lang="en-US"/>
           </a:p>
@@ -687,13 +612,7 @@
       </p:sp>
       <p:sp>
         <p:nvSpPr>
-          <p:cNvPr id="5" name="Footer Placeholder 4">
-            <a:extLst>
-              <a:ext uri="{FF2B5EF4-FFF2-40B4-BE49-F238E27FC236}">
-                <a16:creationId xmlns:a16="http://schemas.microsoft.com/office/drawing/2014/main" id="{F253519E-C69A-9396-C73F-1ACB40774508}"/>
-              </a:ext>
-            </a:extLst>
-          </p:cNvPr>
+          <p:cNvPr id="5" name="Footer Placeholder 4"/>
           <p:cNvSpPr>
             <a:spLocks noGrp="1"/>
           </p:cNvSpPr>
@@ -712,13 +631,7 @@
       </p:sp>
       <p:sp>
         <p:nvSpPr>
-          <p:cNvPr id="6" name="Slide Number Placeholder 5">
-            <a:extLst>
-              <a:ext uri="{FF2B5EF4-FFF2-40B4-BE49-F238E27FC236}">
-                <a16:creationId xmlns:a16="http://schemas.microsoft.com/office/drawing/2014/main" id="{CC85BFC6-ABA4-44D2-E110-CE59D7D2AE43}"/>
-              </a:ext>
-            </a:extLst>
-          </p:cNvPr>
+          <p:cNvPr id="6" name="Slide Number Placeholder 5"/>
           <p:cNvSpPr>
             <a:spLocks noGrp="1"/>
           </p:cNvSpPr>
@@ -742,7 +655,7 @@
     </p:spTree>
     <p:extLst>
       <p:ext uri="{BB962C8B-B14F-4D97-AF65-F5344CB8AC3E}">
-        <p14:creationId xmlns:p14="http://schemas.microsoft.com/office/powerpoint/2010/main" val="1588597314"/>
+        <p14:creationId xmlns:p14="http://schemas.microsoft.com/office/powerpoint/2010/main" val="2509224612"/>
       </p:ext>
     </p:extLst>
   </p:cSld>
@@ -771,13 +684,7 @@
       </p:grpSpPr>
       <p:sp>
         <p:nvSpPr>
-          <p:cNvPr id="2" name="Title 1">
-            <a:extLst>
-              <a:ext uri="{FF2B5EF4-FFF2-40B4-BE49-F238E27FC236}">
-                <a16:creationId xmlns:a16="http://schemas.microsoft.com/office/drawing/2014/main" id="{A4C6B7EA-B38C-12D1-5730-E271A11FB914}"/>
-              </a:ext>
-            </a:extLst>
-          </p:cNvPr>
+          <p:cNvPr id="2" name="Title 1"/>
           <p:cNvSpPr>
             <a:spLocks noGrp="1"/>
           </p:cNvSpPr>
@@ -794,18 +701,13 @@
               <a:rPr lang="en-US"/>
               <a:t>Click to edit Master title style</a:t>
             </a:r>
-          </a:p>
-        </p:txBody>
-      </p:sp>
-      <p:sp>
-        <p:nvSpPr>
-          <p:cNvPr id="3" name="Content Placeholder 2">
-            <a:extLst>
-              <a:ext uri="{FF2B5EF4-FFF2-40B4-BE49-F238E27FC236}">
-                <a16:creationId xmlns:a16="http://schemas.microsoft.com/office/drawing/2014/main" id="{5D8D1A30-880C-91DF-D6D6-0BE623BC9F03}"/>
-              </a:ext>
-            </a:extLst>
-          </p:cNvPr>
+            <a:endParaRPr lang="en-US" dirty="0"/>
+          </a:p>
+        </p:txBody>
+      </p:sp>
+      <p:sp>
+        <p:nvSpPr>
+          <p:cNvPr id="3" name="Content Placeholder 2"/>
           <p:cNvSpPr>
             <a:spLocks noGrp="1"/>
           </p:cNvSpPr>
@@ -851,18 +753,13 @@
               <a:rPr lang="en-US"/>
               <a:t>Fifth level</a:t>
             </a:r>
-          </a:p>
-        </p:txBody>
-      </p:sp>
-      <p:sp>
-        <p:nvSpPr>
-          <p:cNvPr id="4" name="Date Placeholder 3">
-            <a:extLst>
-              <a:ext uri="{FF2B5EF4-FFF2-40B4-BE49-F238E27FC236}">
-                <a16:creationId xmlns:a16="http://schemas.microsoft.com/office/drawing/2014/main" id="{27753098-E2DC-41B2-9361-756938A8EBFE}"/>
-              </a:ext>
-            </a:extLst>
-          </p:cNvPr>
+            <a:endParaRPr lang="en-US" dirty="0"/>
+          </a:p>
+        </p:txBody>
+      </p:sp>
+      <p:sp>
+        <p:nvSpPr>
+          <p:cNvPr id="4" name="Date Placeholder 3"/>
           <p:cNvSpPr>
             <a:spLocks noGrp="1"/>
           </p:cNvSpPr>
@@ -877,7 +774,7 @@
           <a:p>
             <a:fld id="{E759A0DE-F190-5444-87AC-4719D5F20D15}" type="datetimeFigureOut">
               <a:rPr lang="en-US" smtClean="0"/>
-              <a:t>11/15/25</a:t>
+              <a:t>8/15/26</a:t>
             </a:fld>
             <a:endParaRPr lang="en-US"/>
           </a:p>
@@ -885,13 +782,7 @@
       </p:sp>
       <p:sp>
         <p:nvSpPr>
-          <p:cNvPr id="5" name="Footer Placeholder 4">
-            <a:extLst>
-              <a:ext uri="{FF2B5EF4-FFF2-40B4-BE49-F238E27FC236}">
-                <a16:creationId xmlns:a16="http://schemas.microsoft.com/office/drawing/2014/main" id="{E463E6B5-5EA8-FE6C-FA06-4515DC0C07A4}"/>
-              </a:ext>
-            </a:extLst>
-          </p:cNvPr>
+          <p:cNvPr id="5" name="Footer Placeholder 4"/>
           <p:cNvSpPr>
             <a:spLocks noGrp="1"/>
           </p:cNvSpPr>
@@ -910,13 +801,7 @@
       </p:sp>
       <p:sp>
         <p:nvSpPr>
-          <p:cNvPr id="6" name="Slide Number Placeholder 5">
-            <a:extLst>
-              <a:ext uri="{FF2B5EF4-FFF2-40B4-BE49-F238E27FC236}">
-                <a16:creationId xmlns:a16="http://schemas.microsoft.com/office/drawing/2014/main" id="{196A6D58-9856-3B55-DBEA-1B9A3269B325}"/>
-              </a:ext>
-            </a:extLst>
-          </p:cNvPr>
+          <p:cNvPr id="6" name="Slide Number Placeholder 5"/>
           <p:cNvSpPr>
             <a:spLocks noGrp="1"/>
           </p:cNvSpPr>
@@ -940,7 +825,7 @@
     </p:spTree>
     <p:extLst>
       <p:ext uri="{BB962C8B-B14F-4D97-AF65-F5344CB8AC3E}">
-        <p14:creationId xmlns:p14="http://schemas.microsoft.com/office/powerpoint/2010/main" val="1474312020"/>
+        <p14:creationId xmlns:p14="http://schemas.microsoft.com/office/powerpoint/2010/main" val="4110991596"/>
       </p:ext>
     </p:extLst>
   </p:cSld>
@@ -969,13 +854,7 @@
       </p:grpSpPr>
       <p:sp>
         <p:nvSpPr>
-          <p:cNvPr id="2" name="Title 1">
-            <a:extLst>
-              <a:ext uri="{FF2B5EF4-FFF2-40B4-BE49-F238E27FC236}">
-                <a16:creationId xmlns:a16="http://schemas.microsoft.com/office/drawing/2014/main" id="{F3003BE6-BFB2-0EF8-7BD3-99B4FF56B7C7}"/>
-              </a:ext>
-            </a:extLst>
-          </p:cNvPr>
+          <p:cNvPr id="2" name="Title 1"/>
           <p:cNvSpPr>
             <a:spLocks noGrp="1"/>
           </p:cNvSpPr>
@@ -985,8 +864,8 @@
         </p:nvSpPr>
         <p:spPr>
           <a:xfrm>
-            <a:off x="831850" y="1709738"/>
-            <a:ext cx="10515600" cy="2852737"/>
+            <a:off x="623888" y="1709739"/>
+            <a:ext cx="7886700" cy="2852737"/>
           </a:xfrm>
         </p:spPr>
         <p:txBody>
@@ -1001,18 +880,13 @@
               <a:rPr lang="en-US"/>
               <a:t>Click to edit Master title style</a:t>
             </a:r>
-          </a:p>
-        </p:txBody>
-      </p:sp>
-      <p:sp>
-        <p:nvSpPr>
-          <p:cNvPr id="3" name="Text Placeholder 2">
-            <a:extLst>
-              <a:ext uri="{FF2B5EF4-FFF2-40B4-BE49-F238E27FC236}">
-                <a16:creationId xmlns:a16="http://schemas.microsoft.com/office/drawing/2014/main" id="{95E87140-F157-4DFF-CE20-2F5B759FC1E1}"/>
-              </a:ext>
-            </a:extLst>
-          </p:cNvPr>
+            <a:endParaRPr lang="en-US" dirty="0"/>
+          </a:p>
+        </p:txBody>
+      </p:sp>
+      <p:sp>
+        <p:nvSpPr>
+          <p:cNvPr id="3" name="Text Placeholder 2"/>
           <p:cNvSpPr>
             <a:spLocks noGrp="1"/>
           </p:cNvSpPr>
@@ -1022,8 +896,8 @@
         </p:nvSpPr>
         <p:spPr>
           <a:xfrm>
-            <a:off x="831850" y="4589463"/>
-            <a:ext cx="10515600" cy="1500187"/>
+            <a:off x="623888" y="4589464"/>
+            <a:ext cx="7886700" cy="1500187"/>
           </a:xfrm>
         </p:spPr>
         <p:txBody>
@@ -1131,13 +1005,7 @@
       </p:sp>
       <p:sp>
         <p:nvSpPr>
-          <p:cNvPr id="4" name="Date Placeholder 3">
-            <a:extLst>
-              <a:ext uri="{FF2B5EF4-FFF2-40B4-BE49-F238E27FC236}">
-                <a16:creationId xmlns:a16="http://schemas.microsoft.com/office/drawing/2014/main" id="{E119DC89-D1D7-E179-4B62-551014DFE5B3}"/>
-              </a:ext>
-            </a:extLst>
-          </p:cNvPr>
+          <p:cNvPr id="4" name="Date Placeholder 3"/>
           <p:cNvSpPr>
             <a:spLocks noGrp="1"/>
           </p:cNvSpPr>
@@ -1152,7 +1020,7 @@
           <a:p>
             <a:fld id="{E759A0DE-F190-5444-87AC-4719D5F20D15}" type="datetimeFigureOut">
               <a:rPr lang="en-US" smtClean="0"/>
-              <a:t>11/15/25</a:t>
+              <a:t>8/15/26</a:t>
             </a:fld>
             <a:endParaRPr lang="en-US"/>
           </a:p>
@@ -1160,13 +1028,7 @@
       </p:sp>
       <p:sp>
         <p:nvSpPr>
-          <p:cNvPr id="5" name="Footer Placeholder 4">
-            <a:extLst>
-              <a:ext uri="{FF2B5EF4-FFF2-40B4-BE49-F238E27FC236}">
-                <a16:creationId xmlns:a16="http://schemas.microsoft.com/office/drawing/2014/main" id="{0DC033CF-70D2-4EFC-5477-15F7486A8F3C}"/>
-              </a:ext>
-            </a:extLst>
-          </p:cNvPr>
+          <p:cNvPr id="5" name="Footer Placeholder 4"/>
           <p:cNvSpPr>
             <a:spLocks noGrp="1"/>
           </p:cNvSpPr>
@@ -1185,13 +1047,7 @@
       </p:sp>
       <p:sp>
         <p:nvSpPr>
-          <p:cNvPr id="6" name="Slide Number Placeholder 5">
-            <a:extLst>
-              <a:ext uri="{FF2B5EF4-FFF2-40B4-BE49-F238E27FC236}">
-                <a16:creationId xmlns:a16="http://schemas.microsoft.com/office/drawing/2014/main" id="{797ECCF9-ED4E-20EE-67CD-F55D0D853A8C}"/>
-              </a:ext>
-            </a:extLst>
-          </p:cNvPr>
+          <p:cNvPr id="6" name="Slide Number Placeholder 5"/>
           <p:cNvSpPr>
             <a:spLocks noGrp="1"/>
           </p:cNvSpPr>
@@ -1215,7 +1071,7 @@
     </p:spTree>
     <p:extLst>
       <p:ext uri="{BB962C8B-B14F-4D97-AF65-F5344CB8AC3E}">
-        <p14:creationId xmlns:p14="http://schemas.microsoft.com/office/powerpoint/2010/main" val="3736666041"/>
+        <p14:creationId xmlns:p14="http://schemas.microsoft.com/office/powerpoint/2010/main" val="1377733004"/>
       </p:ext>
     </p:extLst>
   </p:cSld>
@@ -1244,13 +1100,7 @@
       </p:grpSpPr>
       <p:sp>
         <p:nvSpPr>
-          <p:cNvPr id="2" name="Title 1">
-            <a:extLst>
-              <a:ext uri="{FF2B5EF4-FFF2-40B4-BE49-F238E27FC236}">
-                <a16:creationId xmlns:a16="http://schemas.microsoft.com/office/drawing/2014/main" id="{74DD7124-6407-E388-DFAC-CEAEF342D72D}"/>
-              </a:ext>
-            </a:extLst>
-          </p:cNvPr>
+          <p:cNvPr id="2" name="Title 1"/>
           <p:cNvSpPr>
             <a:spLocks noGrp="1"/>
           </p:cNvSpPr>
@@ -1267,18 +1117,13 @@
               <a:rPr lang="en-US"/>
               <a:t>Click to edit Master title style</a:t>
             </a:r>
-          </a:p>
-        </p:txBody>
-      </p:sp>
-      <p:sp>
-        <p:nvSpPr>
-          <p:cNvPr id="3" name="Content Placeholder 2">
-            <a:extLst>
-              <a:ext uri="{FF2B5EF4-FFF2-40B4-BE49-F238E27FC236}">
-                <a16:creationId xmlns:a16="http://schemas.microsoft.com/office/drawing/2014/main" id="{0354C6C2-33DA-0102-6360-654F993BD701}"/>
-              </a:ext>
-            </a:extLst>
-          </p:cNvPr>
+            <a:endParaRPr lang="en-US" dirty="0"/>
+          </a:p>
+        </p:txBody>
+      </p:sp>
+      <p:sp>
+        <p:nvSpPr>
+          <p:cNvPr id="3" name="Content Placeholder 2"/>
           <p:cNvSpPr>
             <a:spLocks noGrp="1"/>
           </p:cNvSpPr>
@@ -1288,8 +1133,8 @@
         </p:nvSpPr>
         <p:spPr>
           <a:xfrm>
-            <a:off x="838200" y="1825625"/>
-            <a:ext cx="5181600" cy="4351338"/>
+            <a:off x="628650" y="1825625"/>
+            <a:ext cx="3886200" cy="4351338"/>
           </a:xfrm>
         </p:spPr>
         <p:txBody>
@@ -1329,18 +1174,13 @@
               <a:rPr lang="en-US"/>
               <a:t>Fifth level</a:t>
             </a:r>
-          </a:p>
-        </p:txBody>
-      </p:sp>
-      <p:sp>
-        <p:nvSpPr>
-          <p:cNvPr id="4" name="Content Placeholder 3">
-            <a:extLst>
-              <a:ext uri="{FF2B5EF4-FFF2-40B4-BE49-F238E27FC236}">
-                <a16:creationId xmlns:a16="http://schemas.microsoft.com/office/drawing/2014/main" id="{EE2B2A58-052B-B454-9932-012243039D08}"/>
-              </a:ext>
-            </a:extLst>
-          </p:cNvPr>
+            <a:endParaRPr lang="en-US" dirty="0"/>
+          </a:p>
+        </p:txBody>
+      </p:sp>
+      <p:sp>
+        <p:nvSpPr>
+          <p:cNvPr id="4" name="Content Placeholder 3"/>
           <p:cNvSpPr>
             <a:spLocks noGrp="1"/>
           </p:cNvSpPr>
@@ -1350,8 +1190,8 @@
         </p:nvSpPr>
         <p:spPr>
           <a:xfrm>
-            <a:off x="6172200" y="1825625"/>
-            <a:ext cx="5181600" cy="4351338"/>
+            <a:off x="4629150" y="1825625"/>
+            <a:ext cx="3886200" cy="4351338"/>
           </a:xfrm>
         </p:spPr>
         <p:txBody>
@@ -1391,18 +1231,13 @@
               <a:rPr lang="en-US"/>
               <a:t>Fifth level</a:t>
             </a:r>
-          </a:p>
-        </p:txBody>
-      </p:sp>
-      <p:sp>
-        <p:nvSpPr>
-          <p:cNvPr id="5" name="Date Placeholder 4">
-            <a:extLst>
-              <a:ext uri="{FF2B5EF4-FFF2-40B4-BE49-F238E27FC236}">
-                <a16:creationId xmlns:a16="http://schemas.microsoft.com/office/drawing/2014/main" id="{52B92D04-ECBD-D55F-A459-4C28DF6A8C2E}"/>
-              </a:ext>
-            </a:extLst>
-          </p:cNvPr>
+            <a:endParaRPr lang="en-US" dirty="0"/>
+          </a:p>
+        </p:txBody>
+      </p:sp>
+      <p:sp>
+        <p:nvSpPr>
+          <p:cNvPr id="5" name="Date Placeholder 4"/>
           <p:cNvSpPr>
             <a:spLocks noGrp="1"/>
           </p:cNvSpPr>
@@ -1417,7 +1252,7 @@
           <a:p>
             <a:fld id="{E759A0DE-F190-5444-87AC-4719D5F20D15}" type="datetimeFigureOut">
               <a:rPr lang="en-US" smtClean="0"/>
-              <a:t>11/15/25</a:t>
+              <a:t>8/15/26</a:t>
             </a:fld>
             <a:endParaRPr lang="en-US"/>
           </a:p>
@@ -1425,13 +1260,7 @@
       </p:sp>
       <p:sp>
         <p:nvSpPr>
-          <p:cNvPr id="6" name="Footer Placeholder 5">
-            <a:extLst>
-              <a:ext uri="{FF2B5EF4-FFF2-40B4-BE49-F238E27FC236}">
-                <a16:creationId xmlns:a16="http://schemas.microsoft.com/office/drawing/2014/main" id="{DF69ACAC-11AF-A864-BD18-A4B426A4AA03}"/>
-              </a:ext>
-            </a:extLst>
-          </p:cNvPr>
+          <p:cNvPr id="6" name="Footer Placeholder 5"/>
           <p:cNvSpPr>
             <a:spLocks noGrp="1"/>
           </p:cNvSpPr>
@@ -1450,13 +1279,7 @@
       </p:sp>
       <p:sp>
         <p:nvSpPr>
-          <p:cNvPr id="7" name="Slide Number Placeholder 6">
-            <a:extLst>
-              <a:ext uri="{FF2B5EF4-FFF2-40B4-BE49-F238E27FC236}">
-                <a16:creationId xmlns:a16="http://schemas.microsoft.com/office/drawing/2014/main" id="{3A3C5DAC-E196-CEC3-6A6B-376BB3F37D19}"/>
-              </a:ext>
-            </a:extLst>
-          </p:cNvPr>
+          <p:cNvPr id="7" name="Slide Number Placeholder 6"/>
           <p:cNvSpPr>
             <a:spLocks noGrp="1"/>
           </p:cNvSpPr>
@@ -1480,7 +1303,7 @@
     </p:spTree>
     <p:extLst>
       <p:ext uri="{BB962C8B-B14F-4D97-AF65-F5344CB8AC3E}">
-        <p14:creationId xmlns:p14="http://schemas.microsoft.com/office/powerpoint/2010/main" val="621302458"/>
+        <p14:creationId xmlns:p14="http://schemas.microsoft.com/office/powerpoint/2010/main" val="2120275962"/>
       </p:ext>
     </p:extLst>
   </p:cSld>
@@ -1509,13 +1332,7 @@
       </p:grpSpPr>
       <p:sp>
         <p:nvSpPr>
-          <p:cNvPr id="2" name="Title 1">
-            <a:extLst>
-              <a:ext uri="{FF2B5EF4-FFF2-40B4-BE49-F238E27FC236}">
-                <a16:creationId xmlns:a16="http://schemas.microsoft.com/office/drawing/2014/main" id="{0C632820-190D-235F-CEAA-9558C5413BC1}"/>
-              </a:ext>
-            </a:extLst>
-          </p:cNvPr>
+          <p:cNvPr id="2" name="Title 1"/>
           <p:cNvSpPr>
             <a:spLocks noGrp="1"/>
           </p:cNvSpPr>
@@ -1525,8 +1342,8 @@
         </p:nvSpPr>
         <p:spPr>
           <a:xfrm>
-            <a:off x="839788" y="365125"/>
-            <a:ext cx="10515600" cy="1325563"/>
+            <a:off x="629841" y="365126"/>
+            <a:ext cx="7886700" cy="1325563"/>
           </a:xfrm>
         </p:spPr>
         <p:txBody>
@@ -1537,18 +1354,13 @@
               <a:rPr lang="en-US"/>
               <a:t>Click to edit Master title style</a:t>
             </a:r>
-          </a:p>
-        </p:txBody>
-      </p:sp>
-      <p:sp>
-        <p:nvSpPr>
-          <p:cNvPr id="3" name="Text Placeholder 2">
-            <a:extLst>
-              <a:ext uri="{FF2B5EF4-FFF2-40B4-BE49-F238E27FC236}">
-                <a16:creationId xmlns:a16="http://schemas.microsoft.com/office/drawing/2014/main" id="{16693254-6651-D942-4099-84C9B6A31CF3}"/>
-              </a:ext>
-            </a:extLst>
-          </p:cNvPr>
+            <a:endParaRPr lang="en-US" dirty="0"/>
+          </a:p>
+        </p:txBody>
+      </p:sp>
+      <p:sp>
+        <p:nvSpPr>
+          <p:cNvPr id="3" name="Text Placeholder 2"/>
           <p:cNvSpPr>
             <a:spLocks noGrp="1"/>
           </p:cNvSpPr>
@@ -1558,8 +1370,8 @@
         </p:nvSpPr>
         <p:spPr>
           <a:xfrm>
-            <a:off x="839788" y="1681163"/>
-            <a:ext cx="5157787" cy="823912"/>
+            <a:off x="629842" y="1681163"/>
+            <a:ext cx="3868340" cy="823912"/>
           </a:xfrm>
         </p:spPr>
         <p:txBody>
@@ -1613,13 +1425,7 @@
       </p:sp>
       <p:sp>
         <p:nvSpPr>
-          <p:cNvPr id="4" name="Content Placeholder 3">
-            <a:extLst>
-              <a:ext uri="{FF2B5EF4-FFF2-40B4-BE49-F238E27FC236}">
-                <a16:creationId xmlns:a16="http://schemas.microsoft.com/office/drawing/2014/main" id="{D6D4DAC3-CF47-11DC-83E8-0B1192A4422A}"/>
-              </a:ext>
-            </a:extLst>
-          </p:cNvPr>
+          <p:cNvPr id="4" name="Content Placeholder 3"/>
           <p:cNvSpPr>
             <a:spLocks noGrp="1"/>
           </p:cNvSpPr>
@@ -1629,8 +1435,8 @@
         </p:nvSpPr>
         <p:spPr>
           <a:xfrm>
-            <a:off x="839788" y="2505075"/>
-            <a:ext cx="5157787" cy="3684588"/>
+            <a:off x="629842" y="2505075"/>
+            <a:ext cx="3868340" cy="3684588"/>
           </a:xfrm>
         </p:spPr>
         <p:txBody>
@@ -1670,18 +1476,13 @@
               <a:rPr lang="en-US"/>
               <a:t>Fifth level</a:t>
             </a:r>
-          </a:p>
-        </p:txBody>
-      </p:sp>
-      <p:sp>
-        <p:nvSpPr>
-          <p:cNvPr id="5" name="Text Placeholder 4">
-            <a:extLst>
-              <a:ext uri="{FF2B5EF4-FFF2-40B4-BE49-F238E27FC236}">
-                <a16:creationId xmlns:a16="http://schemas.microsoft.com/office/drawing/2014/main" id="{3C49067B-AD0F-C796-4C8F-C043DB6FD3B3}"/>
-              </a:ext>
-            </a:extLst>
-          </p:cNvPr>
+            <a:endParaRPr lang="en-US" dirty="0"/>
+          </a:p>
+        </p:txBody>
+      </p:sp>
+      <p:sp>
+        <p:nvSpPr>
+          <p:cNvPr id="5" name="Text Placeholder 4"/>
           <p:cNvSpPr>
             <a:spLocks noGrp="1"/>
           </p:cNvSpPr>
@@ -1691,8 +1492,8 @@
         </p:nvSpPr>
         <p:spPr>
           <a:xfrm>
-            <a:off x="6172200" y="1681163"/>
-            <a:ext cx="5183188" cy="823912"/>
+            <a:off x="4629150" y="1681163"/>
+            <a:ext cx="3887391" cy="823912"/>
           </a:xfrm>
         </p:spPr>
         <p:txBody>
@@ -1746,13 +1547,7 @@
       </p:sp>
       <p:sp>
         <p:nvSpPr>
-          <p:cNvPr id="6" name="Content Placeholder 5">
-            <a:extLst>
-              <a:ext uri="{FF2B5EF4-FFF2-40B4-BE49-F238E27FC236}">
-                <a16:creationId xmlns:a16="http://schemas.microsoft.com/office/drawing/2014/main" id="{A4D0695B-675B-E8DD-D931-29E639B3E559}"/>
-              </a:ext>
-            </a:extLst>
-          </p:cNvPr>
+          <p:cNvPr id="6" name="Content Placeholder 5"/>
           <p:cNvSpPr>
             <a:spLocks noGrp="1"/>
           </p:cNvSpPr>
@@ -1762,8 +1557,8 @@
         </p:nvSpPr>
         <p:spPr>
           <a:xfrm>
-            <a:off x="6172200" y="2505075"/>
-            <a:ext cx="5183188" cy="3684588"/>
+            <a:off x="4629150" y="2505075"/>
+            <a:ext cx="3887391" cy="3684588"/>
           </a:xfrm>
         </p:spPr>
         <p:txBody>
@@ -1803,18 +1598,13 @@
               <a:rPr lang="en-US"/>
               <a:t>Fifth level</a:t>
             </a:r>
-          </a:p>
-        </p:txBody>
-      </p:sp>
-      <p:sp>
-        <p:nvSpPr>
-          <p:cNvPr id="7" name="Date Placeholder 6">
-            <a:extLst>
-              <a:ext uri="{FF2B5EF4-FFF2-40B4-BE49-F238E27FC236}">
-                <a16:creationId xmlns:a16="http://schemas.microsoft.com/office/drawing/2014/main" id="{E7F5423C-A80C-353A-6ADA-AD2195CCE83B}"/>
-              </a:ext>
-            </a:extLst>
-          </p:cNvPr>
+            <a:endParaRPr lang="en-US" dirty="0"/>
+          </a:p>
+        </p:txBody>
+      </p:sp>
+      <p:sp>
+        <p:nvSpPr>
+          <p:cNvPr id="7" name="Date Placeholder 6"/>
           <p:cNvSpPr>
             <a:spLocks noGrp="1"/>
           </p:cNvSpPr>
@@ -1829,7 +1619,7 @@
           <a:p>
             <a:fld id="{E759A0DE-F190-5444-87AC-4719D5F20D15}" type="datetimeFigureOut">
               <a:rPr lang="en-US" smtClean="0"/>
-              <a:t>11/15/25</a:t>
+              <a:t>8/15/26</a:t>
             </a:fld>
             <a:endParaRPr lang="en-US"/>
           </a:p>
@@ -1837,13 +1627,7 @@
       </p:sp>
       <p:sp>
         <p:nvSpPr>
-          <p:cNvPr id="8" name="Footer Placeholder 7">
-            <a:extLst>
-              <a:ext uri="{FF2B5EF4-FFF2-40B4-BE49-F238E27FC236}">
-                <a16:creationId xmlns:a16="http://schemas.microsoft.com/office/drawing/2014/main" id="{3154C085-1B7B-06F2-2F97-8BE5AED3D908}"/>
-              </a:ext>
-            </a:extLst>
-          </p:cNvPr>
+          <p:cNvPr id="8" name="Footer Placeholder 7"/>
           <p:cNvSpPr>
             <a:spLocks noGrp="1"/>
           </p:cNvSpPr>
@@ -1862,13 +1646,7 @@
       </p:sp>
       <p:sp>
         <p:nvSpPr>
-          <p:cNvPr id="9" name="Slide Number Placeholder 8">
-            <a:extLst>
-              <a:ext uri="{FF2B5EF4-FFF2-40B4-BE49-F238E27FC236}">
-                <a16:creationId xmlns:a16="http://schemas.microsoft.com/office/drawing/2014/main" id="{A6C6B0A2-57CB-16B8-1E9B-CA6DA6337B35}"/>
-              </a:ext>
-            </a:extLst>
-          </p:cNvPr>
+          <p:cNvPr id="9" name="Slide Number Placeholder 8"/>
           <p:cNvSpPr>
             <a:spLocks noGrp="1"/>
           </p:cNvSpPr>
@@ -1892,7 +1670,7 @@
     </p:spTree>
     <p:extLst>
       <p:ext uri="{BB962C8B-B14F-4D97-AF65-F5344CB8AC3E}">
-        <p14:creationId xmlns:p14="http://schemas.microsoft.com/office/powerpoint/2010/main" val="3902579014"/>
+        <p14:creationId xmlns:p14="http://schemas.microsoft.com/office/powerpoint/2010/main" val="3458719147"/>
       </p:ext>
     </p:extLst>
   </p:cSld>
@@ -1921,13 +1699,7 @@
       </p:grpSpPr>
       <p:sp>
         <p:nvSpPr>
-          <p:cNvPr id="2" name="Title 1">
-            <a:extLst>
-              <a:ext uri="{FF2B5EF4-FFF2-40B4-BE49-F238E27FC236}">
-                <a16:creationId xmlns:a16="http://schemas.microsoft.com/office/drawing/2014/main" id="{42014C2D-A9C6-E4FF-86E0-53926609620A}"/>
-              </a:ext>
-            </a:extLst>
-          </p:cNvPr>
+          <p:cNvPr id="2" name="Title 1"/>
           <p:cNvSpPr>
             <a:spLocks noGrp="1"/>
           </p:cNvSpPr>
@@ -1944,18 +1716,13 @@
               <a:rPr lang="en-US"/>
               <a:t>Click to edit Master title style</a:t>
             </a:r>
-          </a:p>
-        </p:txBody>
-      </p:sp>
-      <p:sp>
-        <p:nvSpPr>
-          <p:cNvPr id="3" name="Date Placeholder 2">
-            <a:extLst>
-              <a:ext uri="{FF2B5EF4-FFF2-40B4-BE49-F238E27FC236}">
-                <a16:creationId xmlns:a16="http://schemas.microsoft.com/office/drawing/2014/main" id="{CAEBDED3-8FA2-E14E-6132-DBF06C0043E9}"/>
-              </a:ext>
-            </a:extLst>
-          </p:cNvPr>
+            <a:endParaRPr lang="en-US" dirty="0"/>
+          </a:p>
+        </p:txBody>
+      </p:sp>
+      <p:sp>
+        <p:nvSpPr>
+          <p:cNvPr id="3" name="Date Placeholder 2"/>
           <p:cNvSpPr>
             <a:spLocks noGrp="1"/>
           </p:cNvSpPr>
@@ -1970,7 +1737,7 @@
           <a:p>
             <a:fld id="{E759A0DE-F190-5444-87AC-4719D5F20D15}" type="datetimeFigureOut">
               <a:rPr lang="en-US" smtClean="0"/>
-              <a:t>11/15/25</a:t>
+              <a:t>8/15/26</a:t>
             </a:fld>
             <a:endParaRPr lang="en-US"/>
           </a:p>
@@ -1978,13 +1745,7 @@
       </p:sp>
       <p:sp>
         <p:nvSpPr>
-          <p:cNvPr id="4" name="Footer Placeholder 3">
-            <a:extLst>
-              <a:ext uri="{FF2B5EF4-FFF2-40B4-BE49-F238E27FC236}">
-                <a16:creationId xmlns:a16="http://schemas.microsoft.com/office/drawing/2014/main" id="{24FF1715-78D0-6155-47B7-64F32ECF5F55}"/>
-              </a:ext>
-            </a:extLst>
-          </p:cNvPr>
+          <p:cNvPr id="4" name="Footer Placeholder 3"/>
           <p:cNvSpPr>
             <a:spLocks noGrp="1"/>
           </p:cNvSpPr>
@@ -2003,13 +1764,7 @@
       </p:sp>
       <p:sp>
         <p:nvSpPr>
-          <p:cNvPr id="5" name="Slide Number Placeholder 4">
-            <a:extLst>
-              <a:ext uri="{FF2B5EF4-FFF2-40B4-BE49-F238E27FC236}">
-                <a16:creationId xmlns:a16="http://schemas.microsoft.com/office/drawing/2014/main" id="{95EE70D1-30EB-D2A6-F6C0-29E5A0681277}"/>
-              </a:ext>
-            </a:extLst>
-          </p:cNvPr>
+          <p:cNvPr id="5" name="Slide Number Placeholder 4"/>
           <p:cNvSpPr>
             <a:spLocks noGrp="1"/>
           </p:cNvSpPr>
@@ -2033,7 +1788,7 @@
     </p:spTree>
     <p:extLst>
       <p:ext uri="{BB962C8B-B14F-4D97-AF65-F5344CB8AC3E}">
-        <p14:creationId xmlns:p14="http://schemas.microsoft.com/office/powerpoint/2010/main" val="2762667879"/>
+        <p14:creationId xmlns:p14="http://schemas.microsoft.com/office/powerpoint/2010/main" val="337610149"/>
       </p:ext>
     </p:extLst>
   </p:cSld>
@@ -2062,13 +1817,7 @@
       </p:grpSpPr>
       <p:sp>
         <p:nvSpPr>
-          <p:cNvPr id="2" name="Date Placeholder 1">
-            <a:extLst>
-              <a:ext uri="{FF2B5EF4-FFF2-40B4-BE49-F238E27FC236}">
-                <a16:creationId xmlns:a16="http://schemas.microsoft.com/office/drawing/2014/main" id="{9CD2DAB5-6AD5-15BC-026B-B80E34678399}"/>
-              </a:ext>
-            </a:extLst>
-          </p:cNvPr>
+          <p:cNvPr id="2" name="Date Placeholder 1"/>
           <p:cNvSpPr>
             <a:spLocks noGrp="1"/>
           </p:cNvSpPr>
@@ -2083,7 +1832,7 @@
           <a:p>
             <a:fld id="{E759A0DE-F190-5444-87AC-4719D5F20D15}" type="datetimeFigureOut">
               <a:rPr lang="en-US" smtClean="0"/>
-              <a:t>11/15/25</a:t>
+              <a:t>8/15/26</a:t>
             </a:fld>
             <a:endParaRPr lang="en-US"/>
           </a:p>
@@ -2091,13 +1840,7 @@
       </p:sp>
       <p:sp>
         <p:nvSpPr>
-          <p:cNvPr id="3" name="Footer Placeholder 2">
-            <a:extLst>
-              <a:ext uri="{FF2B5EF4-FFF2-40B4-BE49-F238E27FC236}">
-                <a16:creationId xmlns:a16="http://schemas.microsoft.com/office/drawing/2014/main" id="{919D2783-D2E4-47AE-70D6-B4A209E13CBC}"/>
-              </a:ext>
-            </a:extLst>
-          </p:cNvPr>
+          <p:cNvPr id="3" name="Footer Placeholder 2"/>
           <p:cNvSpPr>
             <a:spLocks noGrp="1"/>
           </p:cNvSpPr>
@@ -2116,13 +1859,7 @@
       </p:sp>
       <p:sp>
         <p:nvSpPr>
-          <p:cNvPr id="4" name="Slide Number Placeholder 3">
-            <a:extLst>
-              <a:ext uri="{FF2B5EF4-FFF2-40B4-BE49-F238E27FC236}">
-                <a16:creationId xmlns:a16="http://schemas.microsoft.com/office/drawing/2014/main" id="{009A41F5-9D51-17BE-FB49-C0DC79F1FB33}"/>
-              </a:ext>
-            </a:extLst>
-          </p:cNvPr>
+          <p:cNvPr id="4" name="Slide Number Placeholder 3"/>
           <p:cNvSpPr>
             <a:spLocks noGrp="1"/>
           </p:cNvSpPr>
@@ -2146,7 +1883,7 @@
     </p:spTree>
     <p:extLst>
       <p:ext uri="{BB962C8B-B14F-4D97-AF65-F5344CB8AC3E}">
-        <p14:creationId xmlns:p14="http://schemas.microsoft.com/office/powerpoint/2010/main" val="684399818"/>
+        <p14:creationId xmlns:p14="http://schemas.microsoft.com/office/powerpoint/2010/main" val="3955326277"/>
       </p:ext>
     </p:extLst>
   </p:cSld>
@@ -2175,13 +1912,7 @@
       </p:grpSpPr>
       <p:sp>
         <p:nvSpPr>
-          <p:cNvPr id="2" name="Title 1">
-            <a:extLst>
-              <a:ext uri="{FF2B5EF4-FFF2-40B4-BE49-F238E27FC236}">
-                <a16:creationId xmlns:a16="http://schemas.microsoft.com/office/drawing/2014/main" id="{636535ED-82D6-0936-3EEB-AD9435F5EDC9}"/>
-              </a:ext>
-            </a:extLst>
-          </p:cNvPr>
+          <p:cNvPr id="2" name="Title 1"/>
           <p:cNvSpPr>
             <a:spLocks noGrp="1"/>
           </p:cNvSpPr>
@@ -2191,8 +1922,8 @@
         </p:nvSpPr>
         <p:spPr>
           <a:xfrm>
-            <a:off x="839788" y="457200"/>
-            <a:ext cx="3932237" cy="1600200"/>
+            <a:off x="629841" y="457200"/>
+            <a:ext cx="2949178" cy="1600200"/>
           </a:xfrm>
         </p:spPr>
         <p:txBody>
@@ -2207,18 +1938,13 @@
               <a:rPr lang="en-US"/>
               <a:t>Click to edit Master title style</a:t>
             </a:r>
-          </a:p>
-        </p:txBody>
-      </p:sp>
-      <p:sp>
-        <p:nvSpPr>
-          <p:cNvPr id="3" name="Content Placeholder 2">
-            <a:extLst>
-              <a:ext uri="{FF2B5EF4-FFF2-40B4-BE49-F238E27FC236}">
-                <a16:creationId xmlns:a16="http://schemas.microsoft.com/office/drawing/2014/main" id="{1803B2A4-A7AB-CDB0-D7F1-279536A2702A}"/>
-              </a:ext>
-            </a:extLst>
-          </p:cNvPr>
+            <a:endParaRPr lang="en-US" dirty="0"/>
+          </a:p>
+        </p:txBody>
+      </p:sp>
+      <p:sp>
+        <p:nvSpPr>
+          <p:cNvPr id="3" name="Content Placeholder 2"/>
           <p:cNvSpPr>
             <a:spLocks noGrp="1"/>
           </p:cNvSpPr>
@@ -2228,8 +1954,8 @@
         </p:nvSpPr>
         <p:spPr>
           <a:xfrm>
-            <a:off x="5183188" y="987425"/>
-            <a:ext cx="6172200" cy="4873625"/>
+            <a:off x="3887391" y="987426"/>
+            <a:ext cx="4629150" cy="4873625"/>
           </a:xfrm>
         </p:spPr>
         <p:txBody>
@@ -2297,18 +2023,13 @@
               <a:rPr lang="en-US"/>
               <a:t>Fifth level</a:t>
             </a:r>
-          </a:p>
-        </p:txBody>
-      </p:sp>
-      <p:sp>
-        <p:nvSpPr>
-          <p:cNvPr id="4" name="Text Placeholder 3">
-            <a:extLst>
-              <a:ext uri="{FF2B5EF4-FFF2-40B4-BE49-F238E27FC236}">
-                <a16:creationId xmlns:a16="http://schemas.microsoft.com/office/drawing/2014/main" id="{3329566A-3ACC-2A16-1AAE-6B0281DB7E3C}"/>
-              </a:ext>
-            </a:extLst>
-          </p:cNvPr>
+            <a:endParaRPr lang="en-US" dirty="0"/>
+          </a:p>
+        </p:txBody>
+      </p:sp>
+      <p:sp>
+        <p:nvSpPr>
+          <p:cNvPr id="4" name="Text Placeholder 3"/>
           <p:cNvSpPr>
             <a:spLocks noGrp="1"/>
           </p:cNvSpPr>
@@ -2318,8 +2039,8 @@
         </p:nvSpPr>
         <p:spPr>
           <a:xfrm>
-            <a:off x="839788" y="2057400"/>
-            <a:ext cx="3932237" cy="3811588"/>
+            <a:off x="629841" y="2057400"/>
+            <a:ext cx="2949178" cy="3811588"/>
           </a:xfrm>
         </p:spPr>
         <p:txBody>
@@ -2373,13 +2094,7 @@
       </p:sp>
       <p:sp>
         <p:nvSpPr>
-          <p:cNvPr id="5" name="Date Placeholder 4">
-            <a:extLst>
-              <a:ext uri="{FF2B5EF4-FFF2-40B4-BE49-F238E27FC236}">
-                <a16:creationId xmlns:a16="http://schemas.microsoft.com/office/drawing/2014/main" id="{453518F2-2B74-8F2D-171A-15986F3C5152}"/>
-              </a:ext>
-            </a:extLst>
-          </p:cNvPr>
+          <p:cNvPr id="5" name="Date Placeholder 4"/>
           <p:cNvSpPr>
             <a:spLocks noGrp="1"/>
           </p:cNvSpPr>
@@ -2394,7 +2109,7 @@
           <a:p>
             <a:fld id="{E759A0DE-F190-5444-87AC-4719D5F20D15}" type="datetimeFigureOut">
               <a:rPr lang="en-US" smtClean="0"/>
-              <a:t>11/15/25</a:t>
+              <a:t>8/15/26</a:t>
             </a:fld>
             <a:endParaRPr lang="en-US"/>
           </a:p>
@@ -2402,13 +2117,7 @@
       </p:sp>
       <p:sp>
         <p:nvSpPr>
-          <p:cNvPr id="6" name="Footer Placeholder 5">
-            <a:extLst>
-              <a:ext uri="{FF2B5EF4-FFF2-40B4-BE49-F238E27FC236}">
-                <a16:creationId xmlns:a16="http://schemas.microsoft.com/office/drawing/2014/main" id="{6DF8701B-4899-C3D0-CB2F-6C31378A510F}"/>
-              </a:ext>
-            </a:extLst>
-          </p:cNvPr>
+          <p:cNvPr id="6" name="Footer Placeholder 5"/>
           <p:cNvSpPr>
             <a:spLocks noGrp="1"/>
           </p:cNvSpPr>
@@ -2427,13 +2136,7 @@
       </p:sp>
       <p:sp>
         <p:nvSpPr>
-          <p:cNvPr id="7" name="Slide Number Placeholder 6">
-            <a:extLst>
-              <a:ext uri="{FF2B5EF4-FFF2-40B4-BE49-F238E27FC236}">
-                <a16:creationId xmlns:a16="http://schemas.microsoft.com/office/drawing/2014/main" id="{F3240FD0-A8F8-EFCD-2A69-21AB0FB076F6}"/>
-              </a:ext>
-            </a:extLst>
-          </p:cNvPr>
+          <p:cNvPr id="7" name="Slide Number Placeholder 6"/>
           <p:cNvSpPr>
             <a:spLocks noGrp="1"/>
           </p:cNvSpPr>
@@ -2457,7 +2160,7 @@
     </p:spTree>
     <p:extLst>
       <p:ext uri="{BB962C8B-B14F-4D97-AF65-F5344CB8AC3E}">
-        <p14:creationId xmlns:p14="http://schemas.microsoft.com/office/powerpoint/2010/main" val="2191778824"/>
+        <p14:creationId xmlns:p14="http://schemas.microsoft.com/office/powerpoint/2010/main" val="3914498153"/>
       </p:ext>
     </p:extLst>
   </p:cSld>
@@ -2486,13 +2189,7 @@
       </p:grpSpPr>
       <p:sp>
         <p:nvSpPr>
-          <p:cNvPr id="2" name="Title 1">
-            <a:extLst>
-              <a:ext uri="{FF2B5EF4-FFF2-40B4-BE49-F238E27FC236}">
-                <a16:creationId xmlns:a16="http://schemas.microsoft.com/office/drawing/2014/main" id="{FD43467F-CDAF-BF3C-2E6D-F2EBB52C7E17}"/>
-              </a:ext>
-            </a:extLst>
-          </p:cNvPr>
+          <p:cNvPr id="2" name="Title 1"/>
           <p:cNvSpPr>
             <a:spLocks noGrp="1"/>
           </p:cNvSpPr>
@@ -2502,8 +2199,8 @@
         </p:nvSpPr>
         <p:spPr>
           <a:xfrm>
-            <a:off x="839788" y="457200"/>
-            <a:ext cx="3932237" cy="1600200"/>
+            <a:off x="629841" y="457200"/>
+            <a:ext cx="2949178" cy="1600200"/>
           </a:xfrm>
         </p:spPr>
         <p:txBody>
@@ -2518,20 +2215,15 @@
               <a:rPr lang="en-US"/>
               <a:t>Click to edit Master title style</a:t>
             </a:r>
-          </a:p>
-        </p:txBody>
-      </p:sp>
-      <p:sp>
-        <p:nvSpPr>
-          <p:cNvPr id="3" name="Picture Placeholder 2">
-            <a:extLst>
-              <a:ext uri="{FF2B5EF4-FFF2-40B4-BE49-F238E27FC236}">
-                <a16:creationId xmlns:a16="http://schemas.microsoft.com/office/drawing/2014/main" id="{63D374E6-7653-1FED-90D8-27F8F5A5A555}"/>
-              </a:ext>
-            </a:extLst>
-          </p:cNvPr>
-          <p:cNvSpPr>
-            <a:spLocks noGrp="1"/>
+            <a:endParaRPr lang="en-US" dirty="0"/>
+          </a:p>
+        </p:txBody>
+      </p:sp>
+      <p:sp>
+        <p:nvSpPr>
+          <p:cNvPr id="3" name="Picture Placeholder 2"/>
+          <p:cNvSpPr>
+            <a:spLocks noGrp="1" noChangeAspect="1"/>
           </p:cNvSpPr>
           <p:nvPr>
             <p:ph type="pic" idx="1"/>
@@ -2539,8 +2231,73 @@
         </p:nvSpPr>
         <p:spPr>
           <a:xfrm>
-            <a:off x="5183188" y="987425"/>
-            <a:ext cx="6172200" cy="4873625"/>
+            <a:off x="3887391" y="987426"/>
+            <a:ext cx="4629150" cy="4873625"/>
+          </a:xfrm>
+        </p:spPr>
+        <p:txBody>
+          <a:bodyPr anchor="t"/>
+          <a:lstStyle>
+            <a:lvl1pPr marL="0" indent="0">
+              <a:buNone/>
+              <a:defRPr sz="3200"/>
+            </a:lvl1pPr>
+            <a:lvl2pPr marL="457200" indent="0">
+              <a:buNone/>
+              <a:defRPr sz="2800"/>
+            </a:lvl2pPr>
+            <a:lvl3pPr marL="914400" indent="0">
+              <a:buNone/>
+              <a:defRPr sz="2400"/>
+            </a:lvl3pPr>
+            <a:lvl4pPr marL="1371600" indent="0">
+              <a:buNone/>
+              <a:defRPr sz="2000"/>
+            </a:lvl4pPr>
+            <a:lvl5pPr marL="1828800" indent="0">
+              <a:buNone/>
+              <a:defRPr sz="2000"/>
+            </a:lvl5pPr>
+            <a:lvl6pPr marL="2286000" indent="0">
+              <a:buNone/>
+              <a:defRPr sz="2000"/>
+            </a:lvl6pPr>
+            <a:lvl7pPr marL="2743200" indent="0">
+              <a:buNone/>
+              <a:defRPr sz="2000"/>
+            </a:lvl7pPr>
+            <a:lvl8pPr marL="3200400" indent="0">
+              <a:buNone/>
+              <a:defRPr sz="2000"/>
+            </a:lvl8pPr>
+            <a:lvl9pPr marL="3657600" indent="0">
+              <a:buNone/>
+              <a:defRPr sz="2000"/>
+            </a:lvl9pPr>
+          </a:lstStyle>
+          <a:p>
+            <a:r>
+              <a:rPr lang="en-US"/>
+              <a:t>Click icon to add picture</a:t>
+            </a:r>
+            <a:endParaRPr lang="en-US" dirty="0"/>
+          </a:p>
+        </p:txBody>
+      </p:sp>
+      <p:sp>
+        <p:nvSpPr>
+          <p:cNvPr id="4" name="Text Placeholder 3"/>
+          <p:cNvSpPr>
+            <a:spLocks noGrp="1"/>
+          </p:cNvSpPr>
+          <p:nvPr>
+            <p:ph type="body" sz="half" idx="2"/>
+          </p:nvPr>
+        </p:nvSpPr>
+        <p:spPr>
+          <a:xfrm>
+            <a:off x="629841" y="2057400"/>
+            <a:ext cx="2949178" cy="3811588"/>
           </a:xfrm>
         </p:spPr>
         <p:txBody>
@@ -2548,73 +2305,6 @@
           <a:lstStyle>
             <a:lvl1pPr marL="0" indent="0">
               <a:buNone/>
-              <a:defRPr sz="3200"/>
-            </a:lvl1pPr>
-            <a:lvl2pPr marL="457200" indent="0">
-              <a:buNone/>
-              <a:defRPr sz="2800"/>
-            </a:lvl2pPr>
-            <a:lvl3pPr marL="914400" indent="0">
-              <a:buNone/>
-              <a:defRPr sz="2400"/>
-            </a:lvl3pPr>
-            <a:lvl4pPr marL="1371600" indent="0">
-              <a:buNone/>
-              <a:defRPr sz="2000"/>
-            </a:lvl4pPr>
-            <a:lvl5pPr marL="1828800" indent="0">
-              <a:buNone/>
-              <a:defRPr sz="2000"/>
-            </a:lvl5pPr>
-            <a:lvl6pPr marL="2286000" indent="0">
-              <a:buNone/>
-              <a:defRPr sz="2000"/>
-            </a:lvl6pPr>
-            <a:lvl7pPr marL="2743200" indent="0">
-              <a:buNone/>
-              <a:defRPr sz="2000"/>
-            </a:lvl7pPr>
-            <a:lvl8pPr marL="3200400" indent="0">
-              <a:buNone/>
-              <a:defRPr sz="2000"/>
-            </a:lvl8pPr>
-            <a:lvl9pPr marL="3657600" indent="0">
-              <a:buNone/>
-              <a:defRPr sz="2000"/>
-            </a:lvl9pPr>
-          </a:lstStyle>
-          <a:p>
-            <a:endParaRPr lang="en-US"/>
-          </a:p>
-        </p:txBody>
-      </p:sp>
-      <p:sp>
-        <p:nvSpPr>
-          <p:cNvPr id="4" name="Text Placeholder 3">
-            <a:extLst>
-              <a:ext uri="{FF2B5EF4-FFF2-40B4-BE49-F238E27FC236}">
-                <a16:creationId xmlns:a16="http://schemas.microsoft.com/office/drawing/2014/main" id="{9318631D-B68A-86EE-A551-F2FE300250A2}"/>
-              </a:ext>
-            </a:extLst>
-          </p:cNvPr>
-          <p:cNvSpPr>
-            <a:spLocks noGrp="1"/>
-          </p:cNvSpPr>
-          <p:nvPr>
-            <p:ph type="body" sz="half" idx="2"/>
-          </p:nvPr>
-        </p:nvSpPr>
-        <p:spPr>
-          <a:xfrm>
-            <a:off x="839788" y="2057400"/>
-            <a:ext cx="3932237" cy="3811588"/>
-          </a:xfrm>
-        </p:spPr>
-        <p:txBody>
-          <a:bodyPr/>
-          <a:lstStyle>
-            <a:lvl1pPr marL="0" indent="0">
-              <a:buNone/>
               <a:defRPr sz="1600"/>
             </a:lvl1pPr>
             <a:lvl2pPr marL="457200" indent="0">
@@ -2661,13 +2351,7 @@
       </p:sp>
       <p:sp>
         <p:nvSpPr>
-          <p:cNvPr id="5" name="Date Placeholder 4">
-            <a:extLst>
-              <a:ext uri="{FF2B5EF4-FFF2-40B4-BE49-F238E27FC236}">
-                <a16:creationId xmlns:a16="http://schemas.microsoft.com/office/drawing/2014/main" id="{0CAD5574-CD0C-0EDC-7EA2-BBDDAA07AD36}"/>
-              </a:ext>
-            </a:extLst>
-          </p:cNvPr>
+          <p:cNvPr id="5" name="Date Placeholder 4"/>
           <p:cNvSpPr>
             <a:spLocks noGrp="1"/>
           </p:cNvSpPr>
@@ -2682,7 +2366,7 @@
           <a:p>
             <a:fld id="{E759A0DE-F190-5444-87AC-4719D5F20D15}" type="datetimeFigureOut">
               <a:rPr lang="en-US" smtClean="0"/>
-              <a:t>11/15/25</a:t>
+              <a:t>8/15/26</a:t>
             </a:fld>
             <a:endParaRPr lang="en-US"/>
           </a:p>
@@ -2690,13 +2374,7 @@
       </p:sp>
       <p:sp>
         <p:nvSpPr>
-          <p:cNvPr id="6" name="Footer Placeholder 5">
-            <a:extLst>
-              <a:ext uri="{FF2B5EF4-FFF2-40B4-BE49-F238E27FC236}">
-                <a16:creationId xmlns:a16="http://schemas.microsoft.com/office/drawing/2014/main" id="{C4ADA4F2-15B1-95FF-AFC8-0BCFB4E4E788}"/>
-              </a:ext>
-            </a:extLst>
-          </p:cNvPr>
+          <p:cNvPr id="6" name="Footer Placeholder 5"/>
           <p:cNvSpPr>
             <a:spLocks noGrp="1"/>
           </p:cNvSpPr>
@@ -2715,13 +2393,7 @@
       </p:sp>
       <p:sp>
         <p:nvSpPr>
-          <p:cNvPr id="7" name="Slide Number Placeholder 6">
-            <a:extLst>
-              <a:ext uri="{FF2B5EF4-FFF2-40B4-BE49-F238E27FC236}">
-                <a16:creationId xmlns:a16="http://schemas.microsoft.com/office/drawing/2014/main" id="{5F57356D-53C5-30FE-E0FE-A480BE6A8E8C}"/>
-              </a:ext>
-            </a:extLst>
-          </p:cNvPr>
+          <p:cNvPr id="7" name="Slide Number Placeholder 6"/>
           <p:cNvSpPr>
             <a:spLocks noGrp="1"/>
           </p:cNvSpPr>
@@ -2745,7 +2417,7 @@
     </p:spTree>
     <p:extLst>
       <p:ext uri="{BB962C8B-B14F-4D97-AF65-F5344CB8AC3E}">
-        <p14:creationId xmlns:p14="http://schemas.microsoft.com/office/powerpoint/2010/main" val="3139710704"/>
+        <p14:creationId xmlns:p14="http://schemas.microsoft.com/office/powerpoint/2010/main" val="3657460948"/>
       </p:ext>
     </p:extLst>
   </p:cSld>
@@ -2779,13 +2451,7 @@
       </p:grpSpPr>
       <p:sp>
         <p:nvSpPr>
-          <p:cNvPr id="2" name="Title Placeholder 1">
-            <a:extLst>
-              <a:ext uri="{FF2B5EF4-FFF2-40B4-BE49-F238E27FC236}">
-                <a16:creationId xmlns:a16="http://schemas.microsoft.com/office/drawing/2014/main" id="{E707FE23-AD5C-E492-4625-B3FFD7D65D58}"/>
-              </a:ext>
-            </a:extLst>
-          </p:cNvPr>
+          <p:cNvPr id="2" name="Title Placeholder 1"/>
           <p:cNvSpPr>
             <a:spLocks noGrp="1"/>
           </p:cNvSpPr>
@@ -2795,8 +2461,8 @@
         </p:nvSpPr>
         <p:spPr>
           <a:xfrm>
-            <a:off x="838200" y="365125"/>
-            <a:ext cx="10515600" cy="1325563"/>
+            <a:off x="628650" y="365126"/>
+            <a:ext cx="7886700" cy="1325563"/>
           </a:xfrm>
           <a:prstGeom prst="rect">
             <a:avLst/>
@@ -2812,18 +2478,13 @@
               <a:rPr lang="en-US"/>
               <a:t>Click to edit Master title style</a:t>
             </a:r>
-          </a:p>
-        </p:txBody>
-      </p:sp>
-      <p:sp>
-        <p:nvSpPr>
-          <p:cNvPr id="3" name="Text Placeholder 2">
-            <a:extLst>
-              <a:ext uri="{FF2B5EF4-FFF2-40B4-BE49-F238E27FC236}">
-                <a16:creationId xmlns:a16="http://schemas.microsoft.com/office/drawing/2014/main" id="{5935509A-545F-6691-9119-47A073D0143B}"/>
-              </a:ext>
-            </a:extLst>
-          </p:cNvPr>
+            <a:endParaRPr lang="en-US" dirty="0"/>
+          </a:p>
+        </p:txBody>
+      </p:sp>
+      <p:sp>
+        <p:nvSpPr>
+          <p:cNvPr id="3" name="Text Placeholder 2"/>
           <p:cNvSpPr>
             <a:spLocks noGrp="1"/>
           </p:cNvSpPr>
@@ -2833,8 +2494,8 @@
         </p:nvSpPr>
         <p:spPr>
           <a:xfrm>
-            <a:off x="838200" y="1825625"/>
-            <a:ext cx="10515600" cy="4351338"/>
+            <a:off x="628650" y="1825625"/>
+            <a:ext cx="7886700" cy="4351338"/>
           </a:xfrm>
           <a:prstGeom prst="rect">
             <a:avLst/>
@@ -2879,18 +2540,13 @@
               <a:rPr lang="en-US"/>
               <a:t>Fifth level</a:t>
             </a:r>
-          </a:p>
-        </p:txBody>
-      </p:sp>
-      <p:sp>
-        <p:nvSpPr>
-          <p:cNvPr id="4" name="Date Placeholder 3">
-            <a:extLst>
-              <a:ext uri="{FF2B5EF4-FFF2-40B4-BE49-F238E27FC236}">
-                <a16:creationId xmlns:a16="http://schemas.microsoft.com/office/drawing/2014/main" id="{B48FCAAE-1AD5-9CBF-A0F6-52A814732FD0}"/>
-              </a:ext>
-            </a:extLst>
-          </p:cNvPr>
+            <a:endParaRPr lang="en-US" dirty="0"/>
+          </a:p>
+        </p:txBody>
+      </p:sp>
+      <p:sp>
+        <p:nvSpPr>
+          <p:cNvPr id="4" name="Date Placeholder 3"/>
           <p:cNvSpPr>
             <a:spLocks noGrp="1"/>
           </p:cNvSpPr>
@@ -2900,8 +2556,8 @@
         </p:nvSpPr>
         <p:spPr>
           <a:xfrm>
-            <a:off x="838200" y="6356350"/>
-            <a:ext cx="2743200" cy="365125"/>
+            <a:off x="628650" y="6356351"/>
+            <a:ext cx="2057400" cy="365125"/>
           </a:xfrm>
           <a:prstGeom prst="rect">
             <a:avLst/>
@@ -2923,7 +2579,7 @@
           <a:p>
             <a:fld id="{E759A0DE-F190-5444-87AC-4719D5F20D15}" type="datetimeFigureOut">
               <a:rPr lang="en-US" smtClean="0"/>
-              <a:t>11/15/25</a:t>
+              <a:t>8/15/26</a:t>
             </a:fld>
             <a:endParaRPr lang="en-US"/>
           </a:p>
@@ -2931,13 +2587,7 @@
       </p:sp>
       <p:sp>
         <p:nvSpPr>
-          <p:cNvPr id="5" name="Footer Placeholder 4">
-            <a:extLst>
-              <a:ext uri="{FF2B5EF4-FFF2-40B4-BE49-F238E27FC236}">
-                <a16:creationId xmlns:a16="http://schemas.microsoft.com/office/drawing/2014/main" id="{22229717-0F21-BE11-1F19-88106B640856}"/>
-              </a:ext>
-            </a:extLst>
-          </p:cNvPr>
+          <p:cNvPr id="5" name="Footer Placeholder 4"/>
           <p:cNvSpPr>
             <a:spLocks noGrp="1"/>
           </p:cNvSpPr>
@@ -2947,8 +2597,8 @@
         </p:nvSpPr>
         <p:spPr>
           <a:xfrm>
-            <a:off x="4038600" y="6356350"/>
-            <a:ext cx="4114800" cy="365125"/>
+            <a:off x="3028950" y="6356351"/>
+            <a:ext cx="3086100" cy="365125"/>
           </a:xfrm>
           <a:prstGeom prst="rect">
             <a:avLst/>
@@ -2974,13 +2624,7 @@
       </p:sp>
       <p:sp>
         <p:nvSpPr>
-          <p:cNvPr id="6" name="Slide Number Placeholder 5">
-            <a:extLst>
-              <a:ext uri="{FF2B5EF4-FFF2-40B4-BE49-F238E27FC236}">
-                <a16:creationId xmlns:a16="http://schemas.microsoft.com/office/drawing/2014/main" id="{3858A247-FF8D-F68A-7E74-66F74B44BB8E}"/>
-              </a:ext>
-            </a:extLst>
-          </p:cNvPr>
+          <p:cNvPr id="6" name="Slide Number Placeholder 5"/>
           <p:cNvSpPr>
             <a:spLocks noGrp="1"/>
           </p:cNvSpPr>
@@ -2990,8 +2634,8 @@
         </p:nvSpPr>
         <p:spPr>
           <a:xfrm>
-            <a:off x="8610600" y="6356350"/>
-            <a:ext cx="2743200" cy="365125"/>
+            <a:off x="6457950" y="6356351"/>
+            <a:ext cx="2057400" cy="365125"/>
           </a:xfrm>
           <a:prstGeom prst="rect">
             <a:avLst/>
@@ -3022,23 +2666,23 @@
     </p:spTree>
     <p:extLst>
       <p:ext uri="{BB962C8B-B14F-4D97-AF65-F5344CB8AC3E}">
-        <p14:creationId xmlns:p14="http://schemas.microsoft.com/office/powerpoint/2010/main" val="3785378211"/>
+        <p14:creationId xmlns:p14="http://schemas.microsoft.com/office/powerpoint/2010/main" val="48467931"/>
       </p:ext>
     </p:extLst>
   </p:cSld>
   <p:clrMap bg1="lt1" tx1="dk1" bg2="lt2" tx2="dk2" accent1="accent1" accent2="accent2" accent3="accent3" accent4="accent4" accent5="accent5" accent6="accent6" hlink="hlink" folHlink="folHlink"/>
   <p:sldLayoutIdLst>
-    <p:sldLayoutId id="2147483649" r:id="rId1"/>
-    <p:sldLayoutId id="2147483650" r:id="rId2"/>
-    <p:sldLayoutId id="2147483651" r:id="rId3"/>
-    <p:sldLayoutId id="2147483652" r:id="rId4"/>
-    <p:sldLayoutId id="2147483653" r:id="rId5"/>
-    <p:sldLayoutId id="2147483654" r:id="rId6"/>
-    <p:sldLayoutId id="2147483655" r:id="rId7"/>
-    <p:sldLayoutId id="2147483656" r:id="rId8"/>
-    <p:sldLayoutId id="2147483657" r:id="rId9"/>
-    <p:sldLayoutId id="2147483658" r:id="rId10"/>
-    <p:sldLayoutId id="2147483659" r:id="rId11"/>
+    <p:sldLayoutId id="2147483661" r:id="rId1"/>
+    <p:sldLayoutId id="2147483662" r:id="rId2"/>
+    <p:sldLayoutId id="2147483663" r:id="rId3"/>
+    <p:sldLayoutId id="2147483664" r:id="rId4"/>
+    <p:sldLayoutId id="2147483665" r:id="rId5"/>
+    <p:sldLayoutId id="2147483666" r:id="rId6"/>
+    <p:sldLayoutId id="2147483667" r:id="rId7"/>
+    <p:sldLayoutId id="2147483668" r:id="rId8"/>
+    <p:sldLayoutId id="2147483669" r:id="rId9"/>
+    <p:sldLayoutId id="2147483670" r:id="rId10"/>
+    <p:sldLayoutId id="2147483671" r:id="rId11"/>
   </p:sldLayoutIdLst>
   <p:txStyles>
     <p:titleStyle>
@@ -3329,7 +2973,7 @@
     <p:bg>
       <p:bgPr>
         <a:solidFill>
-          <a:schemeClr val="bg1"/>
+          <a:schemeClr val="tx1"/>
         </a:solidFill>
         <a:effectLst/>
       </p:bgPr>
@@ -3339,7 +2983,7 @@
         <p:cNvPr id="1" name="">
           <a:extLst>
             <a:ext uri="{FF2B5EF4-FFF2-40B4-BE49-F238E27FC236}">
-              <a16:creationId xmlns:a16="http://schemas.microsoft.com/office/drawing/2014/main" id="{43ACF013-4574-2AD0-7BFD-6E771B7E5C0B}"/>
+              <a16:creationId xmlns:a16="http://schemas.microsoft.com/office/drawing/2014/main" id="{0C7F1709-70D9-7011-5D92-F7E57F5604D0}"/>
             </a:ext>
           </a:extLst>
         </p:cNvPr>
@@ -3354,401 +2998,127 @@
           <a:chExt cx="0" cy="0"/>
         </a:xfrm>
       </p:grpSpPr>
-      <p:sp useBgFill="1">
-        <p:nvSpPr>
-          <p:cNvPr id="14" name="Rectangle 13">
+      <p:sp>
+        <p:nvSpPr>
+          <p:cNvPr id="3" name="Subtitle 2">
             <a:extLst>
               <a:ext uri="{FF2B5EF4-FFF2-40B4-BE49-F238E27FC236}">
-                <a16:creationId xmlns:a16="http://schemas.microsoft.com/office/drawing/2014/main" id="{E91DC736-0EF8-4F87-9146-EBF1D2EE4D3D}"/>
-              </a:ext>
-              <a:ext uri="{C183D7F6-B498-43B3-948B-1728B52AA6E4}">
-                <adec:decorative xmlns:adec="http://schemas.microsoft.com/office/drawing/2017/decorative" val="1"/>
+                <a16:creationId xmlns:a16="http://schemas.microsoft.com/office/drawing/2014/main" id="{C25DBF04-8174-1226-1E95-AC7FB0F1B0E0}"/>
               </a:ext>
             </a:extLst>
           </p:cNvPr>
           <p:cNvSpPr>
-            <a:spLocks noGrp="1" noRot="1" noChangeAspect="1" noMove="1" noResize="1" noEditPoints="1" noAdjustHandles="1" noChangeArrowheads="1" noChangeShapeType="1" noTextEdit="1"/>
-          </p:cNvSpPr>
-          <p:nvPr>
-            <p:extLst>
-              <p:ext uri="{386F3935-93C4-4BCD-93E2-E3B085C9AB24}">
-                <p16:designElem xmlns:p16="http://schemas.microsoft.com/office/powerpoint/2015/main" val="1"/>
-              </p:ext>
-            </p:extLst>
+            <a:spLocks noGrp="1"/>
+          </p:cNvSpPr>
+          <p:nvPr>
+            <p:ph type="subTitle" idx="1"/>
           </p:nvPr>
         </p:nvSpPr>
         <p:spPr>
           <a:xfrm>
-            <a:off x="0" y="0"/>
-            <a:ext cx="12192000" cy="6858000"/>
+            <a:off x="84221" y="213360"/>
+            <a:ext cx="8891337" cy="6416040"/>
+          </a:xfrm>
+        </p:spPr>
+        <p:txBody>
+          <a:bodyPr>
+            <a:noAutofit/>
+          </a:bodyPr>
+          <a:lstStyle/>
+          <a:p>
+            <a:pPr algn="l"/>
+            <a:r>
+              <a:rPr lang="en-US" sz="6600" dirty="0">
+                <a:solidFill>
+                  <a:schemeClr val="bg1"/>
+                </a:solidFill>
+                <a:latin typeface="Avenir Medium" panose="02000503020000020003" pitchFamily="2" charset="0"/>
+                <a:ea typeface="Bodoni Ornaments" pitchFamily="2" charset="0"/>
+              </a:rPr>
+              <a:t>All Sufficient Merit</a:t>
+            </a:r>
+          </a:p>
+        </p:txBody>
+      </p:sp>
+      <p:sp>
+        <p:nvSpPr>
+          <p:cNvPr id="2" name="TextBox 1">
+            <a:extLst>
+              <a:ext uri="{FF2B5EF4-FFF2-40B4-BE49-F238E27FC236}">
+                <a16:creationId xmlns:a16="http://schemas.microsoft.com/office/drawing/2014/main" id="{4494038C-B358-C883-5794-16FF7CD54AD5}"/>
+              </a:ext>
+            </a:extLst>
+          </p:cNvPr>
+          <p:cNvSpPr txBox="1"/>
+          <p:nvPr/>
+        </p:nvSpPr>
+        <p:spPr>
+          <a:xfrm>
+            <a:off x="168442" y="5444311"/>
+            <a:ext cx="8807115" cy="923330"/>
           </a:xfrm>
           <a:prstGeom prst="rect">
             <a:avLst/>
           </a:prstGeom>
-          <a:ln>
-            <a:noFill/>
-          </a:ln>
+          <a:noFill/>
         </p:spPr>
-        <p:style>
-          <a:lnRef idx="2">
-            <a:schemeClr val="accent1">
-              <a:shade val="50000"/>
-            </a:schemeClr>
-          </a:lnRef>
-          <a:fillRef idx="1">
-            <a:schemeClr val="accent1"/>
-          </a:fillRef>
-          <a:effectRef idx="0">
-            <a:schemeClr val="accent1"/>
-          </a:effectRef>
-          <a:fontRef idx="minor">
-            <a:schemeClr val="lt1"/>
-          </a:fontRef>
-        </p:style>
-        <p:txBody>
-          <a:bodyPr rtlCol="0" anchor="ctr"/>
+        <p:txBody>
+          <a:bodyPr wrap="square" rtlCol="0">
+            <a:spAutoFit/>
+          </a:bodyPr>
           <a:lstStyle/>
           <a:p>
             <a:pPr algn="ctr"/>
-            <a:endParaRPr lang="en-US"/>
-          </a:p>
-        </p:txBody>
-      </p:sp>
-      <p:pic>
-        <p:nvPicPr>
-          <p:cNvPr id="4" name="Picture 3" descr="Matterhorn with snow and stars in the sky&#10;&#10;AI-generated content may be incorrect.">
-            <a:extLst>
-              <a:ext uri="{FF2B5EF4-FFF2-40B4-BE49-F238E27FC236}">
-                <a16:creationId xmlns:a16="http://schemas.microsoft.com/office/drawing/2014/main" id="{20FF3D56-E105-8F19-A54E-4F173C83BFB7}"/>
-              </a:ext>
-            </a:extLst>
-          </p:cNvPr>
-          <p:cNvPicPr>
-            <a:picLocks noChangeAspect="1"/>
-          </p:cNvPicPr>
-          <p:nvPr/>
-        </p:nvPicPr>
-        <p:blipFill>
-          <a:blip r:embed="rId2"/>
-          <a:srcRect l="10159" t="9091" r="25205"/>
-          <a:stretch>
-            <a:fillRect/>
-          </a:stretch>
-        </p:blipFill>
-        <p:spPr>
-          <a:xfrm>
-            <a:off x="3523488" y="10"/>
-            <a:ext cx="8668512" cy="6857990"/>
-          </a:xfrm>
-          <a:prstGeom prst="rect">
-            <a:avLst/>
-          </a:prstGeom>
-        </p:spPr>
-      </p:pic>
-      <p:sp>
-        <p:nvSpPr>
-          <p:cNvPr id="16" name="Rectangle 15">
-            <a:extLst>
-              <a:ext uri="{FF2B5EF4-FFF2-40B4-BE49-F238E27FC236}">
-                <a16:creationId xmlns:a16="http://schemas.microsoft.com/office/drawing/2014/main" id="{097CD68E-23E3-4007-8847-CD0944C4F7BE}"/>
-              </a:ext>
-              <a:ext uri="{C183D7F6-B498-43B3-948B-1728B52AA6E4}">
-                <adec:decorative xmlns:adec="http://schemas.microsoft.com/office/drawing/2017/decorative" val="1"/>
-              </a:ext>
-            </a:extLst>
-          </p:cNvPr>
-          <p:cNvSpPr>
-            <a:spLocks noGrp="1" noRot="1" noChangeAspect="1" noMove="1" noResize="1" noEditPoints="1" noAdjustHandles="1" noChangeArrowheads="1" noChangeShapeType="1" noTextEdit="1"/>
-          </p:cNvSpPr>
-          <p:nvPr>
-            <p:extLst>
-              <p:ext uri="{386F3935-93C4-4BCD-93E2-E3B085C9AB24}">
-                <p16:designElem xmlns:p16="http://schemas.microsoft.com/office/powerpoint/2015/main" val="1"/>
-              </p:ext>
-            </p:extLst>
-          </p:nvPr>
-        </p:nvSpPr>
-        <p:spPr>
-          <a:xfrm>
-            <a:off x="0" y="0"/>
-            <a:ext cx="9756601" cy="6858000"/>
-          </a:xfrm>
-          <a:prstGeom prst="rect">
-            <a:avLst/>
-          </a:prstGeom>
-          <a:gradFill>
-            <a:gsLst>
-              <a:gs pos="58000">
+            <a:r>
+              <a:rPr lang="en-US" dirty="0">
+                <a:solidFill>
+                  <a:schemeClr val="bg1"/>
+                </a:solidFill>
+              </a:rPr>
+              <a:t>Words &amp; Music by Bryan Fowler, Shane Barnard, and Bethany Barnard (2023)</a:t>
+            </a:r>
+          </a:p>
+          <a:p>
+            <a:pPr algn="ctr"/>
+            <a:r>
+              <a:rPr lang="en-US" dirty="0">
+                <a:solidFill>
+                  <a:schemeClr val="bg1"/>
+                </a:solidFill>
+              </a:rPr>
+              <a:t>© Be Essential Songs and </a:t>
+            </a:r>
+            <a:r>
+              <a:rPr lang="en-US" dirty="0" err="1">
+                <a:solidFill>
+                  <a:schemeClr val="bg1"/>
+                </a:solidFill>
+              </a:rPr>
+              <a:t>bryanfowlersongs</a:t>
+            </a:r>
+            <a:endParaRPr lang="en-US" dirty="0">
+              <a:solidFill>
                 <a:schemeClr val="bg1"/>
-              </a:gs>
-              <a:gs pos="35000">
-                <a:schemeClr val="bg1">
-                  <a:alpha val="79000"/>
-                </a:schemeClr>
-              </a:gs>
-              <a:gs pos="19000">
-                <a:schemeClr val="bg1">
-                  <a:alpha val="38000"/>
-                </a:schemeClr>
-              </a:gs>
-              <a:gs pos="0">
-                <a:schemeClr val="bg1">
-                  <a:alpha val="0"/>
-                </a:schemeClr>
-              </a:gs>
-              <a:gs pos="100000">
-                <a:schemeClr val="bg1"/>
-              </a:gs>
-            </a:gsLst>
-            <a:lin ang="10800000" scaled="0"/>
-          </a:gradFill>
-          <a:ln>
-            <a:noFill/>
-          </a:ln>
-        </p:spPr>
-        <p:style>
-          <a:lnRef idx="2">
-            <a:schemeClr val="accent1">
-              <a:shade val="50000"/>
-            </a:schemeClr>
-          </a:lnRef>
-          <a:fillRef idx="1">
-            <a:schemeClr val="accent1"/>
-          </a:fillRef>
-          <a:effectRef idx="0">
-            <a:schemeClr val="accent1"/>
-          </a:effectRef>
-          <a:fontRef idx="minor">
-            <a:schemeClr val="lt1"/>
-          </a:fontRef>
-        </p:style>
-        <p:txBody>
-          <a:bodyPr rtlCol="0" anchor="ctr"/>
-          <a:lstStyle/>
+              </a:solidFill>
+            </a:endParaRPr>
+          </a:p>
           <a:p>
             <a:pPr algn="ctr"/>
-            <a:endParaRPr lang="en-US" dirty="0"/>
-          </a:p>
-        </p:txBody>
-      </p:sp>
-      <p:sp>
-        <p:nvSpPr>
-          <p:cNvPr id="3" name="Subtitle 2">
-            <a:extLst>
-              <a:ext uri="{FF2B5EF4-FFF2-40B4-BE49-F238E27FC236}">
-                <a16:creationId xmlns:a16="http://schemas.microsoft.com/office/drawing/2014/main" id="{F0FD9A51-1655-DF8C-52C5-2398AD7832C4}"/>
-              </a:ext>
-            </a:extLst>
-          </p:cNvPr>
-          <p:cNvSpPr>
-            <a:spLocks noGrp="1"/>
-          </p:cNvSpPr>
-          <p:nvPr>
-            <p:ph type="subTitle" idx="1"/>
-          </p:nvPr>
-        </p:nvSpPr>
-        <p:spPr>
-          <a:xfrm>
-            <a:off x="477980" y="4872922"/>
-            <a:ext cx="4023359" cy="1208141"/>
-          </a:xfrm>
-        </p:spPr>
-        <p:txBody>
-          <a:bodyPr>
-            <a:normAutofit fontScale="92500"/>
-          </a:bodyPr>
-          <a:lstStyle/>
-          <a:p>
-            <a:pPr algn="l"/>
-            <a:endParaRPr lang="en-US" sz="2000" dirty="0">
-              <a:latin typeface="Avenir Medium" panose="02000503020000020003" pitchFamily="2" charset="0"/>
-              <a:ea typeface="Bodoni Ornaments" pitchFamily="2" charset="0"/>
-            </a:endParaRPr>
-          </a:p>
-          <a:p>
-            <a:pPr algn="l"/>
-            <a:r>
-              <a:rPr lang="en-US" sz="4000" i="1" dirty="0">
-                <a:latin typeface="Avenir Oblique" panose="02000503020000020003" pitchFamily="2" charset="0"/>
-                <a:ea typeface="Bodoni Ornaments" pitchFamily="2" charset="0"/>
+            <a:r>
+              <a:rPr lang="en-US" dirty="0">
+                <a:solidFill>
+                  <a:schemeClr val="bg1"/>
+                </a:solidFill>
               </a:rPr>
-              <a:t>All sufficient merit</a:t>
-            </a:r>
-          </a:p>
-          <a:p>
-            <a:pPr algn="l"/>
-            <a:endParaRPr lang="en-US" sz="2000" dirty="0">
-              <a:latin typeface="Avenir Medium" panose="02000503020000020003" pitchFamily="2" charset="0"/>
-              <a:ea typeface="Bodoni Ornaments" pitchFamily="2" charset="0"/>
-            </a:endParaRPr>
-          </a:p>
-        </p:txBody>
-      </p:sp>
-      <p:sp>
-        <p:nvSpPr>
-          <p:cNvPr id="13" name="Rectangle 12">
-            <a:extLst>
-              <a:ext uri="{FF2B5EF4-FFF2-40B4-BE49-F238E27FC236}">
-                <a16:creationId xmlns:a16="http://schemas.microsoft.com/office/drawing/2014/main" id="{AF2F604E-43BE-4DC3-B983-E071523364F8}"/>
-              </a:ext>
-              <a:ext uri="{C183D7F6-B498-43B3-948B-1728B52AA6E4}">
-                <adec:decorative xmlns:adec="http://schemas.microsoft.com/office/drawing/2017/decorative" val="1"/>
-              </a:ext>
-            </a:extLst>
-          </p:cNvPr>
-          <p:cNvSpPr>
-            <a:spLocks noGrp="1" noRot="1" noChangeAspect="1" noMove="1" noResize="1" noEditPoints="1" noAdjustHandles="1" noChangeArrowheads="1" noChangeShapeType="1" noTextEdit="1"/>
-          </p:cNvSpPr>
-          <p:nvPr>
-            <p:extLst>
-              <p:ext uri="{386F3935-93C4-4BCD-93E2-E3B085C9AB24}">
-                <p16:designElem xmlns:p16="http://schemas.microsoft.com/office/powerpoint/2015/main" val="1"/>
-              </p:ext>
-            </p:extLst>
-          </p:nvPr>
-        </p:nvSpPr>
-        <p:spPr>
-          <a:xfrm rot="5400000">
-            <a:off x="759921" y="346791"/>
-            <a:ext cx="146304" cy="704088"/>
-          </a:xfrm>
-          <a:prstGeom prst="rect">
-            <a:avLst/>
-          </a:prstGeom>
-          <a:solidFill>
-            <a:schemeClr val="accent2"/>
-          </a:solidFill>
-          <a:ln>
-            <a:noFill/>
-          </a:ln>
-        </p:spPr>
-        <p:style>
-          <a:lnRef idx="2">
-            <a:schemeClr val="accent1">
-              <a:shade val="50000"/>
-            </a:schemeClr>
-          </a:lnRef>
-          <a:fillRef idx="1">
-            <a:schemeClr val="accent1"/>
-          </a:fillRef>
-          <a:effectRef idx="0">
-            <a:schemeClr val="accent1"/>
-          </a:effectRef>
-          <a:fontRef idx="minor">
-            <a:schemeClr val="lt1"/>
-          </a:fontRef>
-        </p:style>
-        <p:txBody>
-          <a:bodyPr rtlCol="0" anchor="ctr"/>
-          <a:lstStyle/>
-          <a:p>
-            <a:pPr algn="ctr"/>
-            <a:endParaRPr lang="en-US">
-              <a:solidFill>
-                <a:prstClr val="white"/>
-              </a:solidFill>
-              <a:latin typeface="Calibri" panose="020F0502020204030204"/>
-            </a:endParaRPr>
-          </a:p>
-        </p:txBody>
-      </p:sp>
-      <p:sp>
-        <p:nvSpPr>
-          <p:cNvPr id="15" name="Rectangle 14">
-            <a:extLst>
-              <a:ext uri="{FF2B5EF4-FFF2-40B4-BE49-F238E27FC236}">
-                <a16:creationId xmlns:a16="http://schemas.microsoft.com/office/drawing/2014/main" id="{08C9B587-E65E-4B52-B37C-ABEBB6E87928}"/>
-              </a:ext>
-              <a:ext uri="{C183D7F6-B498-43B3-948B-1728B52AA6E4}">
-                <adec:decorative xmlns:adec="http://schemas.microsoft.com/office/drawing/2017/decorative" val="1"/>
-              </a:ext>
-            </a:extLst>
-          </p:cNvPr>
-          <p:cNvSpPr>
-            <a:spLocks noGrp="1" noRot="1" noChangeAspect="1" noMove="1" noResize="1" noEditPoints="1" noAdjustHandles="1" noChangeArrowheads="1" noChangeShapeType="1" noTextEdit="1"/>
-          </p:cNvSpPr>
-          <p:nvPr>
-            <p:extLst>
-              <p:ext uri="{386F3935-93C4-4BCD-93E2-E3B085C9AB24}">
-                <p16:designElem xmlns:p16="http://schemas.microsoft.com/office/powerpoint/2015/main" val="1"/>
-              </p:ext>
-            </p:extLst>
-          </p:nvPr>
-        </p:nvSpPr>
-        <p:spPr>
-          <a:xfrm>
-            <a:off x="481029" y="4546920"/>
-            <a:ext cx="3977640" cy="18288"/>
-          </a:xfrm>
-          <a:prstGeom prst="rect">
-            <a:avLst/>
-          </a:prstGeom>
-          <a:solidFill>
-            <a:srgbClr val="D5D5D5"/>
-          </a:solidFill>
-          <a:ln w="3175">
-            <a:noFill/>
-          </a:ln>
-          <a:effectLst/>
-        </p:spPr>
-        <p:style>
-          <a:lnRef idx="2">
-            <a:schemeClr val="accent1">
-              <a:shade val="50000"/>
-            </a:schemeClr>
-          </a:lnRef>
-          <a:fillRef idx="1">
-            <a:schemeClr val="accent1"/>
-          </a:fillRef>
-          <a:effectRef idx="0">
-            <a:schemeClr val="accent1"/>
-          </a:effectRef>
-          <a:fontRef idx="minor">
-            <a:schemeClr val="lt1"/>
-          </a:fontRef>
-        </p:style>
-        <p:txBody>
-          <a:bodyPr rtlCol="0" anchor="ctr"/>
-          <a:lstStyle/>
-          <a:p>
-            <a:pPr marL="0" marR="0" lvl="0" indent="0" algn="ctr" defTabSz="914400" rtl="0" eaLnBrk="1" fontAlgn="auto" latinLnBrk="0" hangingPunct="1">
-              <a:lnSpc>
-                <a:spcPct val="100000"/>
-              </a:lnSpc>
-              <a:spcBef>
-                <a:spcPts val="0"/>
-              </a:spcBef>
-              <a:spcAft>
-                <a:spcPts val="0"/>
-              </a:spcAft>
-              <a:buClrTx/>
-              <a:buSzTx/>
-              <a:buFontTx/>
-              <a:buNone/>
-              <a:tabLst/>
-              <a:defRPr/>
-            </a:pPr>
-            <a:endParaRPr kumimoji="0" lang="en-US" sz="1800" b="0" i="0" u="none" strike="noStrike" kern="1200" cap="none" spc="0" normalizeH="0" baseline="0" noProof="0">
-              <a:ln>
-                <a:noFill/>
-              </a:ln>
-              <a:solidFill>
-                <a:prstClr val="white"/>
-              </a:solidFill>
-              <a:effectLst/>
-              <a:uLnTx/>
-              <a:uFillTx/>
-              <a:latin typeface="Calibri" panose="020F0502020204030204"/>
-              <a:ea typeface="+mn-ea"/>
-              <a:cs typeface="+mn-cs"/>
-            </a:endParaRPr>
+              <a:t>CCLI License #137776</a:t>
+            </a:r>
           </a:p>
         </p:txBody>
       </p:sp>
     </p:spTree>
     <p:extLst>
       <p:ext uri="{BB962C8B-B14F-4D97-AF65-F5344CB8AC3E}">
-        <p14:creationId xmlns:p14="http://schemas.microsoft.com/office/powerpoint/2010/main" val="1606047208"/>
+        <p14:creationId xmlns:p14="http://schemas.microsoft.com/office/powerpoint/2010/main" val="3164163406"/>
       </p:ext>
     </p:extLst>
   </p:cSld>
@@ -3764,7 +3134,7 @@
     <p:bg>
       <p:bgPr>
         <a:solidFill>
-          <a:srgbClr val="7030A0"/>
+          <a:schemeClr val="tx1"/>
         </a:solidFill>
         <a:effectLst/>
       </p:bgPr>
@@ -3774,7 +3144,7 @@
         <p:cNvPr id="1" name="">
           <a:extLst>
             <a:ext uri="{FF2B5EF4-FFF2-40B4-BE49-F238E27FC236}">
-              <a16:creationId xmlns:a16="http://schemas.microsoft.com/office/drawing/2014/main" id="{DC6C86CD-4E1D-3561-16CB-290155117CC0}"/>
+              <a16:creationId xmlns:a16="http://schemas.microsoft.com/office/drawing/2014/main" id="{985AEA6F-2D47-A0F2-D77C-B536E45560A4}"/>
             </a:ext>
           </a:extLst>
         </p:cNvPr>
@@ -3794,7 +3164,7 @@
           <p:cNvPr id="3" name="Subtitle 2">
             <a:extLst>
               <a:ext uri="{FF2B5EF4-FFF2-40B4-BE49-F238E27FC236}">
-                <a16:creationId xmlns:a16="http://schemas.microsoft.com/office/drawing/2014/main" id="{787F42E7-D1DC-DB2D-C43A-E9C05A0A881F}"/>
+                <a16:creationId xmlns:a16="http://schemas.microsoft.com/office/drawing/2014/main" id="{6E4CC10D-B7CF-A3FC-BFDA-7B9E7D2B268E}"/>
               </a:ext>
             </a:extLst>
           </p:cNvPr>
@@ -3807,8 +3177,8 @@
         </p:nvSpPr>
         <p:spPr>
           <a:xfrm>
-            <a:off x="682831" y="497702"/>
-            <a:ext cx="10826338" cy="5862596"/>
+            <a:off x="84221" y="213360"/>
+            <a:ext cx="8891337" cy="6416040"/>
           </a:xfrm>
         </p:spPr>
         <p:txBody>
@@ -3817,7 +3187,7 @@
           </a:bodyPr>
           <a:lstStyle/>
           <a:p>
-            <a:endParaRPr lang="en-US" sz="4400" dirty="0">
+            <a:endParaRPr lang="en-US" sz="5400" dirty="0">
               <a:solidFill>
                 <a:schemeClr val="bg1"/>
               </a:solidFill>
@@ -3827,18 +3197,42 @@
           </a:p>
           <a:p>
             <a:r>
-              <a:rPr lang="en-US" sz="4400" dirty="0">
+              <a:rPr lang="en-US" sz="5400" dirty="0">
                 <a:solidFill>
                   <a:schemeClr val="bg1"/>
                 </a:solidFill>
                 <a:latin typeface="Avenir Medium" panose="02000503020000020003" pitchFamily="2" charset="0"/>
                 <a:ea typeface="Bodoni Ornaments" pitchFamily="2" charset="0"/>
               </a:rPr>
-              <a:t>It is done</a:t>
-            </a:r>
-          </a:p>
-          <a:p>
-            <a:endParaRPr lang="en-US" sz="4400" dirty="0">
+              <a:t>All sufficient merit     </a:t>
+            </a:r>
+          </a:p>
+          <a:p>
+            <a:r>
+              <a:rPr lang="en-US" sz="5400" dirty="0">
+                <a:solidFill>
+                  <a:schemeClr val="bg1"/>
+                </a:solidFill>
+                <a:latin typeface="Avenir Medium" panose="02000503020000020003" pitchFamily="2" charset="0"/>
+                <a:ea typeface="Bodoni Ornaments" pitchFamily="2" charset="0"/>
+              </a:rPr>
+              <a:t>Firm in life and death</a:t>
+            </a:r>
+          </a:p>
+          <a:p>
+            <a:r>
+              <a:rPr lang="en-US" sz="5400" dirty="0">
+                <a:solidFill>
+                  <a:schemeClr val="bg1"/>
+                </a:solidFill>
+                <a:latin typeface="Avenir Medium" panose="02000503020000020003" pitchFamily="2" charset="0"/>
+                <a:ea typeface="Bodoni Ornaments" pitchFamily="2" charset="0"/>
+              </a:rPr>
+              <a:t>The joy of my salvation Shall be my final breath</a:t>
+            </a:r>
+          </a:p>
+          <a:p>
+            <a:endParaRPr lang="en-US" sz="5400" dirty="0">
               <a:solidFill>
                 <a:schemeClr val="bg1"/>
               </a:solidFill>
@@ -3846,45 +3240,12 @@
               <a:ea typeface="Bodoni Ornaments" pitchFamily="2" charset="0"/>
             </a:endParaRPr>
           </a:p>
-          <a:p>
-            <a:r>
-              <a:rPr lang="en-US" sz="4400" dirty="0">
-                <a:solidFill>
-                  <a:schemeClr val="bg1"/>
-                </a:solidFill>
-                <a:latin typeface="Avenir Medium" panose="02000503020000020003" pitchFamily="2" charset="0"/>
-                <a:ea typeface="Bodoni Ornaments" pitchFamily="2" charset="0"/>
-              </a:rPr>
-              <a:t>It is finished</a:t>
-            </a:r>
-          </a:p>
-          <a:p>
-            <a:endParaRPr lang="en-US" sz="4400" dirty="0">
-              <a:solidFill>
-                <a:schemeClr val="bg1"/>
-              </a:solidFill>
-              <a:latin typeface="Avenir Medium" panose="02000503020000020003" pitchFamily="2" charset="0"/>
-              <a:ea typeface="Bodoni Ornaments" pitchFamily="2" charset="0"/>
-            </a:endParaRPr>
-          </a:p>
-          <a:p>
-            <a:r>
-              <a:rPr lang="en-US" sz="4400" dirty="0">
-                <a:solidFill>
-                  <a:schemeClr val="bg1"/>
-                </a:solidFill>
-                <a:latin typeface="Avenir Medium" panose="02000503020000020003" pitchFamily="2" charset="0"/>
-                <a:ea typeface="Bodoni Ornaments" pitchFamily="2" charset="0"/>
-              </a:rPr>
-              <a:t>No more debt I owe</a:t>
-            </a:r>
-          </a:p>
         </p:txBody>
       </p:sp>
     </p:spTree>
     <p:extLst>
       <p:ext uri="{BB962C8B-B14F-4D97-AF65-F5344CB8AC3E}">
-        <p14:creationId xmlns:p14="http://schemas.microsoft.com/office/powerpoint/2010/main" val="881652052"/>
+        <p14:creationId xmlns:p14="http://schemas.microsoft.com/office/powerpoint/2010/main" val="2527584543"/>
       </p:ext>
     </p:extLst>
   </p:cSld>
@@ -3900,7 +3261,7 @@
     <p:bg>
       <p:bgPr>
         <a:solidFill>
-          <a:srgbClr val="7030A0"/>
+          <a:schemeClr val="tx1"/>
         </a:solidFill>
         <a:effectLst/>
       </p:bgPr>
@@ -3910,7 +3271,7 @@
         <p:cNvPr id="1" name="">
           <a:extLst>
             <a:ext uri="{FF2B5EF4-FFF2-40B4-BE49-F238E27FC236}">
-              <a16:creationId xmlns:a16="http://schemas.microsoft.com/office/drawing/2014/main" id="{930D35CF-1EB1-F96C-F585-C6412E95B890}"/>
+              <a16:creationId xmlns:a16="http://schemas.microsoft.com/office/drawing/2014/main" id="{A6B3CB32-AF1C-76B5-ABE3-D75A60897C80}"/>
             </a:ext>
           </a:extLst>
         </p:cNvPr>
@@ -3930,7 +3291,7 @@
           <p:cNvPr id="3" name="Subtitle 2">
             <a:extLst>
               <a:ext uri="{FF2B5EF4-FFF2-40B4-BE49-F238E27FC236}">
-                <a16:creationId xmlns:a16="http://schemas.microsoft.com/office/drawing/2014/main" id="{0AD8B3DD-E39F-8B93-A66C-07B87B2BF8AD}"/>
+                <a16:creationId xmlns:a16="http://schemas.microsoft.com/office/drawing/2014/main" id="{166CF14D-5197-C974-6226-8EA066F25483}"/>
               </a:ext>
             </a:extLst>
           </p:cNvPr>
@@ -3943,8 +3304,8 @@
         </p:nvSpPr>
         <p:spPr>
           <a:xfrm>
-            <a:off x="682831" y="497702"/>
-            <a:ext cx="10826338" cy="5862596"/>
+            <a:off x="84221" y="213360"/>
+            <a:ext cx="8891337" cy="6416040"/>
           </a:xfrm>
         </p:spPr>
         <p:txBody>
@@ -3953,7 +3314,7 @@
           </a:bodyPr>
           <a:lstStyle/>
           <a:p>
-            <a:endParaRPr lang="en-US" sz="4400" dirty="0">
+            <a:endParaRPr lang="en-US" sz="5400" dirty="0">
               <a:solidFill>
                 <a:schemeClr val="bg1"/>
               </a:solidFill>
@@ -3963,18 +3324,42 @@
           </a:p>
           <a:p>
             <a:r>
-              <a:rPr lang="en-US" sz="4400" dirty="0">
+              <a:rPr lang="en-US" sz="5400" dirty="0">
                 <a:solidFill>
                   <a:schemeClr val="bg1"/>
                 </a:solidFill>
                 <a:latin typeface="Avenir Medium" panose="02000503020000020003" pitchFamily="2" charset="0"/>
                 <a:ea typeface="Bodoni Ornaments" pitchFamily="2" charset="0"/>
               </a:rPr>
-              <a:t>Paid in full</a:t>
-            </a:r>
-          </a:p>
-          <a:p>
-            <a:endParaRPr lang="en-US" sz="4400" dirty="0">
+              <a:t>When I stand accepted Before the throne of God</a:t>
+            </a:r>
+          </a:p>
+          <a:p>
+            <a:r>
+              <a:rPr lang="en-US" sz="5400" dirty="0">
+                <a:solidFill>
+                  <a:schemeClr val="bg1"/>
+                </a:solidFill>
+                <a:latin typeface="Avenir Medium" panose="02000503020000020003" pitchFamily="2" charset="0"/>
+                <a:ea typeface="Bodoni Ornaments" pitchFamily="2" charset="0"/>
+              </a:rPr>
+              <a:t>I’ll gaze upon my Jesus And thank Him for the cross</a:t>
+            </a:r>
+          </a:p>
+          <a:p>
+            <a:r>
+              <a:rPr lang="en-US" sz="5400" dirty="0">
+                <a:solidFill>
+                  <a:schemeClr val="bg1"/>
+                </a:solidFill>
+                <a:latin typeface="Avenir Medium" panose="02000503020000020003" pitchFamily="2" charset="0"/>
+                <a:ea typeface="Bodoni Ornaments" pitchFamily="2" charset="0"/>
+              </a:rPr>
+              <a:t>Yes I’ll thank Him for the cross</a:t>
+            </a:r>
+          </a:p>
+          <a:p>
+            <a:endParaRPr lang="en-US" sz="5400" dirty="0">
               <a:solidFill>
                 <a:schemeClr val="bg1"/>
               </a:solidFill>
@@ -3982,24 +3367,12 @@
               <a:ea typeface="Bodoni Ornaments" pitchFamily="2" charset="0"/>
             </a:endParaRPr>
           </a:p>
-          <a:p>
-            <a:r>
-              <a:rPr lang="en-US" sz="4400" dirty="0">
-                <a:solidFill>
-                  <a:schemeClr val="bg1"/>
-                </a:solidFill>
-                <a:latin typeface="Avenir Medium" panose="02000503020000020003" pitchFamily="2" charset="0"/>
-                <a:ea typeface="Bodoni Ornaments" pitchFamily="2" charset="0"/>
-              </a:rPr>
-              <a:t>All sufficient merit now my own</a:t>
-            </a:r>
-          </a:p>
         </p:txBody>
       </p:sp>
     </p:spTree>
     <p:extLst>
       <p:ext uri="{BB962C8B-B14F-4D97-AF65-F5344CB8AC3E}">
-        <p14:creationId xmlns:p14="http://schemas.microsoft.com/office/powerpoint/2010/main" val="1514148742"/>
+        <p14:creationId xmlns:p14="http://schemas.microsoft.com/office/powerpoint/2010/main" val="2709163967"/>
       </p:ext>
     </p:extLst>
   </p:cSld>
@@ -4015,7 +3388,7 @@
     <p:bg>
       <p:bgPr>
         <a:solidFill>
-          <a:schemeClr val="accent1"/>
+          <a:schemeClr val="tx1"/>
         </a:solidFill>
         <a:effectLst/>
       </p:bgPr>
@@ -4025,7 +3398,7 @@
         <p:cNvPr id="1" name="">
           <a:extLst>
             <a:ext uri="{FF2B5EF4-FFF2-40B4-BE49-F238E27FC236}">
-              <a16:creationId xmlns:a16="http://schemas.microsoft.com/office/drawing/2014/main" id="{7F8EAD9D-411B-BBB0-2853-4AE179FD56CE}"/>
+              <a16:creationId xmlns:a16="http://schemas.microsoft.com/office/drawing/2014/main" id="{5BCFCDBA-66CF-D627-1D6E-C84B3A1FF77B}"/>
             </a:ext>
           </a:extLst>
         </p:cNvPr>
@@ -4045,7 +3418,7 @@
           <p:cNvPr id="3" name="Subtitle 2">
             <a:extLst>
               <a:ext uri="{FF2B5EF4-FFF2-40B4-BE49-F238E27FC236}">
-                <a16:creationId xmlns:a16="http://schemas.microsoft.com/office/drawing/2014/main" id="{0AA9DF7F-CB55-F585-2E89-9D375B08731F}"/>
+                <a16:creationId xmlns:a16="http://schemas.microsoft.com/office/drawing/2014/main" id="{82D93F96-CA59-0936-3FA0-C888C1AB2171}"/>
               </a:ext>
             </a:extLst>
           </p:cNvPr>
@@ -4058,8 +3431,8 @@
         </p:nvSpPr>
         <p:spPr>
           <a:xfrm>
-            <a:off x="682831" y="497702"/>
-            <a:ext cx="10826338" cy="5862596"/>
+            <a:off x="84221" y="213360"/>
+            <a:ext cx="8891337" cy="6416040"/>
           </a:xfrm>
         </p:spPr>
         <p:txBody>
@@ -4068,7 +3441,7 @@
           </a:bodyPr>
           <a:lstStyle/>
           <a:p>
-            <a:endParaRPr lang="en-US" sz="4400" dirty="0">
+            <a:endParaRPr lang="en-US" sz="5400" dirty="0">
               <a:solidFill>
                 <a:schemeClr val="bg1"/>
               </a:solidFill>
@@ -4078,18 +3451,66 @@
           </a:p>
           <a:p>
             <a:r>
-              <a:rPr lang="en-US" sz="4400" dirty="0">
+              <a:rPr lang="en-US" sz="5400" dirty="0">
                 <a:solidFill>
                   <a:schemeClr val="bg1"/>
                 </a:solidFill>
                 <a:latin typeface="Avenir Medium" panose="02000503020000020003" pitchFamily="2" charset="0"/>
                 <a:ea typeface="Bodoni Ornaments" pitchFamily="2" charset="0"/>
               </a:rPr>
-              <a:t>All sufficient merit</a:t>
-            </a:r>
-          </a:p>
-          <a:p>
-            <a:endParaRPr lang="en-US" sz="4400" dirty="0">
+              <a:t>It is done </a:t>
+            </a:r>
+          </a:p>
+          <a:p>
+            <a:r>
+              <a:rPr lang="en-US" sz="5400" dirty="0">
+                <a:solidFill>
+                  <a:schemeClr val="bg1"/>
+                </a:solidFill>
+                <a:latin typeface="Avenir Medium" panose="02000503020000020003" pitchFamily="2" charset="0"/>
+                <a:ea typeface="Bodoni Ornaments" pitchFamily="2" charset="0"/>
+              </a:rPr>
+              <a:t>It is finished</a:t>
+            </a:r>
+          </a:p>
+          <a:p>
+            <a:r>
+              <a:rPr lang="en-US" sz="5400" dirty="0">
+                <a:solidFill>
+                  <a:schemeClr val="bg1"/>
+                </a:solidFill>
+                <a:latin typeface="Avenir Medium" panose="02000503020000020003" pitchFamily="2" charset="0"/>
+                <a:ea typeface="Bodoni Ornaments" pitchFamily="2" charset="0"/>
+              </a:rPr>
+              <a:t>No more debt I owe</a:t>
+            </a:r>
+          </a:p>
+          <a:p>
+            <a:r>
+              <a:rPr lang="en-US" sz="5400" dirty="0">
+                <a:solidFill>
+                  <a:schemeClr val="bg1"/>
+                </a:solidFill>
+                <a:latin typeface="Avenir Medium" panose="02000503020000020003" pitchFamily="2" charset="0"/>
+                <a:ea typeface="Bodoni Ornaments" pitchFamily="2" charset="0"/>
+              </a:rPr>
+              <a:t>Paid in full</a:t>
+            </a:r>
+          </a:p>
+          <a:p>
+            <a:r>
+              <a:rPr lang="en-US" sz="5400" dirty="0">
+                <a:solidFill>
+                  <a:schemeClr val="bg1"/>
+                </a:solidFill>
+                <a:latin typeface="Avenir Medium" panose="02000503020000020003" pitchFamily="2" charset="0"/>
+                <a:ea typeface="Bodoni Ornaments" pitchFamily="2" charset="0"/>
+              </a:rPr>
+              <a:t>All sufficient merit now my own</a:t>
+            </a:r>
+          </a:p>
+          <a:p>
+            <a:endParaRPr lang="en-US" sz="5400" dirty="0">
               <a:solidFill>
                 <a:schemeClr val="bg1"/>
               </a:solidFill>
@@ -4097,505 +3518,12 @@
               <a:ea typeface="Bodoni Ornaments" pitchFamily="2" charset="0"/>
             </a:endParaRPr>
           </a:p>
-          <a:p>
-            <a:r>
-              <a:rPr lang="en-US" sz="4400" dirty="0">
-                <a:solidFill>
-                  <a:schemeClr val="bg1"/>
-                </a:solidFill>
-                <a:latin typeface="Avenir Medium" panose="02000503020000020003" pitchFamily="2" charset="0"/>
-                <a:ea typeface="Bodoni Ornaments" pitchFamily="2" charset="0"/>
-              </a:rPr>
-              <a:t>Firm in life and death</a:t>
-            </a:r>
-          </a:p>
-          <a:p>
-            <a:endParaRPr lang="en-US" sz="4400" dirty="0">
-              <a:solidFill>
-                <a:schemeClr val="bg1"/>
-              </a:solidFill>
-              <a:latin typeface="Avenir Medium" panose="02000503020000020003" pitchFamily="2" charset="0"/>
-              <a:ea typeface="Bodoni Ornaments" pitchFamily="2" charset="0"/>
-            </a:endParaRPr>
-          </a:p>
-          <a:p>
-            <a:r>
-              <a:rPr lang="en-US" sz="4400" dirty="0">
-                <a:solidFill>
-                  <a:schemeClr val="bg1"/>
-                </a:solidFill>
-                <a:latin typeface="Avenir Medium" panose="02000503020000020003" pitchFamily="2" charset="0"/>
-                <a:ea typeface="Bodoni Ornaments" pitchFamily="2" charset="0"/>
-              </a:rPr>
-              <a:t>The joy of my salvation</a:t>
-            </a:r>
-          </a:p>
-          <a:p>
-            <a:endParaRPr lang="en-US" sz="4400" dirty="0">
-              <a:solidFill>
-                <a:schemeClr val="bg1"/>
-              </a:solidFill>
-              <a:latin typeface="Avenir Medium" panose="02000503020000020003" pitchFamily="2" charset="0"/>
-              <a:ea typeface="Bodoni Ornaments" pitchFamily="2" charset="0"/>
-            </a:endParaRPr>
-          </a:p>
-          <a:p>
-            <a:r>
-              <a:rPr lang="en-US" sz="4400" dirty="0">
-                <a:solidFill>
-                  <a:schemeClr val="bg1"/>
-                </a:solidFill>
-                <a:latin typeface="Avenir Medium" panose="02000503020000020003" pitchFamily="2" charset="0"/>
-                <a:ea typeface="Bodoni Ornaments" pitchFamily="2" charset="0"/>
-              </a:rPr>
-              <a:t>Shall be my final breath</a:t>
-            </a:r>
-          </a:p>
         </p:txBody>
       </p:sp>
     </p:spTree>
     <p:extLst>
       <p:ext uri="{BB962C8B-B14F-4D97-AF65-F5344CB8AC3E}">
-        <p14:creationId xmlns:p14="http://schemas.microsoft.com/office/powerpoint/2010/main" val="2372309980"/>
-      </p:ext>
-    </p:extLst>
-  </p:cSld>
-  <p:clrMapOvr>
-    <a:masterClrMapping/>
-  </p:clrMapOvr>
-</p:sld>
-</file>
-
-<file path=ppt/slides/slide13.xml><?xml version="1.0" encoding="utf-8"?>
-<p:sld xmlns:a="http://schemas.openxmlformats.org/drawingml/2006/main" xmlns:r="http://schemas.openxmlformats.org/officeDocument/2006/relationships" xmlns:p="http://schemas.openxmlformats.org/presentationml/2006/main">
-  <p:cSld>
-    <p:bg>
-      <p:bgPr>
-        <a:solidFill>
-          <a:schemeClr val="accent1"/>
-        </a:solidFill>
-        <a:effectLst/>
-      </p:bgPr>
-    </p:bg>
-    <p:spTree>
-      <p:nvGrpSpPr>
-        <p:cNvPr id="1" name="">
-          <a:extLst>
-            <a:ext uri="{FF2B5EF4-FFF2-40B4-BE49-F238E27FC236}">
-              <a16:creationId xmlns:a16="http://schemas.microsoft.com/office/drawing/2014/main" id="{42A0F7E5-CC77-9690-4674-FA9570954E3F}"/>
-            </a:ext>
-          </a:extLst>
-        </p:cNvPr>
-        <p:cNvGrpSpPr/>
-        <p:nvPr/>
-      </p:nvGrpSpPr>
-      <p:grpSpPr>
-        <a:xfrm>
-          <a:off x="0" y="0"/>
-          <a:ext cx="0" cy="0"/>
-          <a:chOff x="0" y="0"/>
-          <a:chExt cx="0" cy="0"/>
-        </a:xfrm>
-      </p:grpSpPr>
-      <p:sp>
-        <p:nvSpPr>
-          <p:cNvPr id="3" name="Subtitle 2">
-            <a:extLst>
-              <a:ext uri="{FF2B5EF4-FFF2-40B4-BE49-F238E27FC236}">
-                <a16:creationId xmlns:a16="http://schemas.microsoft.com/office/drawing/2014/main" id="{4276E9F8-15BB-D1F9-FFD7-553FE54BB111}"/>
-              </a:ext>
-            </a:extLst>
-          </p:cNvPr>
-          <p:cNvSpPr>
-            <a:spLocks noGrp="1"/>
-          </p:cNvSpPr>
-          <p:nvPr>
-            <p:ph type="subTitle" idx="1"/>
-          </p:nvPr>
-        </p:nvSpPr>
-        <p:spPr>
-          <a:xfrm>
-            <a:off x="682831" y="497702"/>
-            <a:ext cx="10826338" cy="5862596"/>
-          </a:xfrm>
-        </p:spPr>
-        <p:txBody>
-          <a:bodyPr>
-            <a:noAutofit/>
-          </a:bodyPr>
-          <a:lstStyle/>
-          <a:p>
-            <a:r>
-              <a:rPr lang="en-US" sz="4400" dirty="0">
-                <a:solidFill>
-                  <a:schemeClr val="bg1"/>
-                </a:solidFill>
-                <a:latin typeface="Avenir Medium" panose="02000503020000020003" pitchFamily="2" charset="0"/>
-                <a:ea typeface="Bodoni Ornaments" pitchFamily="2" charset="0"/>
-              </a:rPr>
-              <a:t>When I stand accepted</a:t>
-            </a:r>
-          </a:p>
-          <a:p>
-            <a:endParaRPr lang="en-US" sz="4400" dirty="0">
-              <a:solidFill>
-                <a:schemeClr val="bg1"/>
-              </a:solidFill>
-              <a:latin typeface="Avenir Medium" panose="02000503020000020003" pitchFamily="2" charset="0"/>
-              <a:ea typeface="Bodoni Ornaments" pitchFamily="2" charset="0"/>
-            </a:endParaRPr>
-          </a:p>
-          <a:p>
-            <a:r>
-              <a:rPr lang="en-US" sz="4400" dirty="0">
-                <a:solidFill>
-                  <a:schemeClr val="bg1"/>
-                </a:solidFill>
-                <a:latin typeface="Avenir Medium" panose="02000503020000020003" pitchFamily="2" charset="0"/>
-                <a:ea typeface="Bodoni Ornaments" pitchFamily="2" charset="0"/>
-              </a:rPr>
-              <a:t>Before the throne of God</a:t>
-            </a:r>
-          </a:p>
-          <a:p>
-            <a:endParaRPr lang="en-US" sz="4400" dirty="0">
-              <a:solidFill>
-                <a:schemeClr val="bg1"/>
-              </a:solidFill>
-              <a:latin typeface="Avenir Medium" panose="02000503020000020003" pitchFamily="2" charset="0"/>
-              <a:ea typeface="Bodoni Ornaments" pitchFamily="2" charset="0"/>
-            </a:endParaRPr>
-          </a:p>
-          <a:p>
-            <a:r>
-              <a:rPr lang="en-US" sz="4400" dirty="0">
-                <a:solidFill>
-                  <a:schemeClr val="bg1"/>
-                </a:solidFill>
-                <a:latin typeface="Avenir Medium" panose="02000503020000020003" pitchFamily="2" charset="0"/>
-                <a:ea typeface="Bodoni Ornaments" pitchFamily="2" charset="0"/>
-              </a:rPr>
-              <a:t>I’ll gaze upon my Jesus</a:t>
-            </a:r>
-          </a:p>
-          <a:p>
-            <a:endParaRPr lang="en-US" sz="4400" dirty="0">
-              <a:solidFill>
-                <a:schemeClr val="bg1"/>
-              </a:solidFill>
-              <a:latin typeface="Avenir Medium" panose="02000503020000020003" pitchFamily="2" charset="0"/>
-              <a:ea typeface="Bodoni Ornaments" pitchFamily="2" charset="0"/>
-            </a:endParaRPr>
-          </a:p>
-          <a:p>
-            <a:r>
-              <a:rPr lang="en-US" sz="4400" dirty="0">
-                <a:solidFill>
-                  <a:schemeClr val="bg1"/>
-                </a:solidFill>
-                <a:latin typeface="Avenir Medium" panose="02000503020000020003" pitchFamily="2" charset="0"/>
-                <a:ea typeface="Bodoni Ornaments" pitchFamily="2" charset="0"/>
-              </a:rPr>
-              <a:t>And thank Him for the cross</a:t>
-            </a:r>
-          </a:p>
-          <a:p>
-            <a:r>
-              <a:rPr lang="en-US" sz="4400" dirty="0">
-                <a:solidFill>
-                  <a:schemeClr val="bg1"/>
-                </a:solidFill>
-                <a:latin typeface="Avenir Medium" panose="02000503020000020003" pitchFamily="2" charset="0"/>
-                <a:ea typeface="Bodoni Ornaments" pitchFamily="2" charset="0"/>
-              </a:rPr>
-              <a:t>Yes I’ll thank Him for the cross</a:t>
-            </a:r>
-          </a:p>
-        </p:txBody>
-      </p:sp>
-    </p:spTree>
-    <p:extLst>
-      <p:ext uri="{BB962C8B-B14F-4D97-AF65-F5344CB8AC3E}">
-        <p14:creationId xmlns:p14="http://schemas.microsoft.com/office/powerpoint/2010/main" val="1613949941"/>
-      </p:ext>
-    </p:extLst>
-  </p:cSld>
-  <p:clrMapOvr>
-    <a:masterClrMapping/>
-  </p:clrMapOvr>
-</p:sld>
-</file>
-
-<file path=ppt/slides/slide14.xml><?xml version="1.0" encoding="utf-8"?>
-<p:sld xmlns:a="http://schemas.openxmlformats.org/drawingml/2006/main" xmlns:r="http://schemas.openxmlformats.org/officeDocument/2006/relationships" xmlns:p="http://schemas.openxmlformats.org/presentationml/2006/main">
-  <p:cSld>
-    <p:bg>
-      <p:bgPr>
-        <a:solidFill>
-          <a:srgbClr val="7030A0"/>
-        </a:solidFill>
-        <a:effectLst/>
-      </p:bgPr>
-    </p:bg>
-    <p:spTree>
-      <p:nvGrpSpPr>
-        <p:cNvPr id="1" name="">
-          <a:extLst>
-            <a:ext uri="{FF2B5EF4-FFF2-40B4-BE49-F238E27FC236}">
-              <a16:creationId xmlns:a16="http://schemas.microsoft.com/office/drawing/2014/main" id="{164D88FC-4E3B-33B7-4523-713E4E923EAD}"/>
-            </a:ext>
-          </a:extLst>
-        </p:cNvPr>
-        <p:cNvGrpSpPr/>
-        <p:nvPr/>
-      </p:nvGrpSpPr>
-      <p:grpSpPr>
-        <a:xfrm>
-          <a:off x="0" y="0"/>
-          <a:ext cx="0" cy="0"/>
-          <a:chOff x="0" y="0"/>
-          <a:chExt cx="0" cy="0"/>
-        </a:xfrm>
-      </p:grpSpPr>
-      <p:sp>
-        <p:nvSpPr>
-          <p:cNvPr id="3" name="Subtitle 2">
-            <a:extLst>
-              <a:ext uri="{FF2B5EF4-FFF2-40B4-BE49-F238E27FC236}">
-                <a16:creationId xmlns:a16="http://schemas.microsoft.com/office/drawing/2014/main" id="{B0EFA89D-9061-98AB-0628-D5031176EF2B}"/>
-              </a:ext>
-            </a:extLst>
-          </p:cNvPr>
-          <p:cNvSpPr>
-            <a:spLocks noGrp="1"/>
-          </p:cNvSpPr>
-          <p:nvPr>
-            <p:ph type="subTitle" idx="1"/>
-          </p:nvPr>
-        </p:nvSpPr>
-        <p:spPr>
-          <a:xfrm>
-            <a:off x="682831" y="497702"/>
-            <a:ext cx="10826338" cy="5862596"/>
-          </a:xfrm>
-        </p:spPr>
-        <p:txBody>
-          <a:bodyPr>
-            <a:noAutofit/>
-          </a:bodyPr>
-          <a:lstStyle/>
-          <a:p>
-            <a:endParaRPr lang="en-US" sz="4400" dirty="0">
-              <a:solidFill>
-                <a:schemeClr val="bg1"/>
-              </a:solidFill>
-              <a:latin typeface="Avenir Medium" panose="02000503020000020003" pitchFamily="2" charset="0"/>
-              <a:ea typeface="Bodoni Ornaments" pitchFamily="2" charset="0"/>
-            </a:endParaRPr>
-          </a:p>
-          <a:p>
-            <a:r>
-              <a:rPr lang="en-US" sz="4400" dirty="0">
-                <a:solidFill>
-                  <a:schemeClr val="bg1"/>
-                </a:solidFill>
-                <a:latin typeface="Avenir Medium" panose="02000503020000020003" pitchFamily="2" charset="0"/>
-                <a:ea typeface="Bodoni Ornaments" pitchFamily="2" charset="0"/>
-              </a:rPr>
-              <a:t>It is done</a:t>
-            </a:r>
-          </a:p>
-          <a:p>
-            <a:endParaRPr lang="en-US" sz="4400" dirty="0">
-              <a:solidFill>
-                <a:schemeClr val="bg1"/>
-              </a:solidFill>
-              <a:latin typeface="Avenir Medium" panose="02000503020000020003" pitchFamily="2" charset="0"/>
-              <a:ea typeface="Bodoni Ornaments" pitchFamily="2" charset="0"/>
-            </a:endParaRPr>
-          </a:p>
-          <a:p>
-            <a:r>
-              <a:rPr lang="en-US" sz="4400" dirty="0">
-                <a:solidFill>
-                  <a:schemeClr val="bg1"/>
-                </a:solidFill>
-                <a:latin typeface="Avenir Medium" panose="02000503020000020003" pitchFamily="2" charset="0"/>
-                <a:ea typeface="Bodoni Ornaments" pitchFamily="2" charset="0"/>
-              </a:rPr>
-              <a:t>It is finished</a:t>
-            </a:r>
-          </a:p>
-          <a:p>
-            <a:endParaRPr lang="en-US" sz="4400" dirty="0">
-              <a:solidFill>
-                <a:schemeClr val="bg1"/>
-              </a:solidFill>
-              <a:latin typeface="Avenir Medium" panose="02000503020000020003" pitchFamily="2" charset="0"/>
-              <a:ea typeface="Bodoni Ornaments" pitchFamily="2" charset="0"/>
-            </a:endParaRPr>
-          </a:p>
-          <a:p>
-            <a:r>
-              <a:rPr lang="en-US" sz="4400" dirty="0">
-                <a:solidFill>
-                  <a:schemeClr val="bg1"/>
-                </a:solidFill>
-                <a:latin typeface="Avenir Medium" panose="02000503020000020003" pitchFamily="2" charset="0"/>
-                <a:ea typeface="Bodoni Ornaments" pitchFamily="2" charset="0"/>
-              </a:rPr>
-              <a:t>No more debt I owe</a:t>
-            </a:r>
-          </a:p>
-        </p:txBody>
-      </p:sp>
-    </p:spTree>
-    <p:extLst>
-      <p:ext uri="{BB962C8B-B14F-4D97-AF65-F5344CB8AC3E}">
-        <p14:creationId xmlns:p14="http://schemas.microsoft.com/office/powerpoint/2010/main" val="1970271740"/>
-      </p:ext>
-    </p:extLst>
-  </p:cSld>
-  <p:clrMapOvr>
-    <a:masterClrMapping/>
-  </p:clrMapOvr>
-</p:sld>
-</file>
-
-<file path=ppt/slides/slide15.xml><?xml version="1.0" encoding="utf-8"?>
-<p:sld xmlns:a="http://schemas.openxmlformats.org/drawingml/2006/main" xmlns:r="http://schemas.openxmlformats.org/officeDocument/2006/relationships" xmlns:p="http://schemas.openxmlformats.org/presentationml/2006/main">
-  <p:cSld>
-    <p:bg>
-      <p:bgPr>
-        <a:solidFill>
-          <a:srgbClr val="7030A0"/>
-        </a:solidFill>
-        <a:effectLst/>
-      </p:bgPr>
-    </p:bg>
-    <p:spTree>
-      <p:nvGrpSpPr>
-        <p:cNvPr id="1" name="">
-          <a:extLst>
-            <a:ext uri="{FF2B5EF4-FFF2-40B4-BE49-F238E27FC236}">
-              <a16:creationId xmlns:a16="http://schemas.microsoft.com/office/drawing/2014/main" id="{E79EF69D-9EA9-BF41-1D9F-657A64BF34F8}"/>
-            </a:ext>
-          </a:extLst>
-        </p:cNvPr>
-        <p:cNvGrpSpPr/>
-        <p:nvPr/>
-      </p:nvGrpSpPr>
-      <p:grpSpPr>
-        <a:xfrm>
-          <a:off x="0" y="0"/>
-          <a:ext cx="0" cy="0"/>
-          <a:chOff x="0" y="0"/>
-          <a:chExt cx="0" cy="0"/>
-        </a:xfrm>
-      </p:grpSpPr>
-      <p:sp>
-        <p:nvSpPr>
-          <p:cNvPr id="3" name="Subtitle 2">
-            <a:extLst>
-              <a:ext uri="{FF2B5EF4-FFF2-40B4-BE49-F238E27FC236}">
-                <a16:creationId xmlns:a16="http://schemas.microsoft.com/office/drawing/2014/main" id="{7CEC6CFC-0B61-AE61-952D-EE48216DD4C8}"/>
-              </a:ext>
-            </a:extLst>
-          </p:cNvPr>
-          <p:cNvSpPr>
-            <a:spLocks noGrp="1"/>
-          </p:cNvSpPr>
-          <p:nvPr>
-            <p:ph type="subTitle" idx="1"/>
-          </p:nvPr>
-        </p:nvSpPr>
-        <p:spPr>
-          <a:xfrm>
-            <a:off x="682831" y="497702"/>
-            <a:ext cx="10826338" cy="5862596"/>
-          </a:xfrm>
-        </p:spPr>
-        <p:txBody>
-          <a:bodyPr>
-            <a:noAutofit/>
-          </a:bodyPr>
-          <a:lstStyle/>
-          <a:p>
-            <a:endParaRPr lang="en-US" sz="4400" dirty="0">
-              <a:solidFill>
-                <a:schemeClr val="bg1"/>
-              </a:solidFill>
-              <a:latin typeface="Avenir Medium" panose="02000503020000020003" pitchFamily="2" charset="0"/>
-              <a:ea typeface="Bodoni Ornaments" pitchFamily="2" charset="0"/>
-            </a:endParaRPr>
-          </a:p>
-          <a:p>
-            <a:r>
-              <a:rPr lang="en-US" sz="4400" dirty="0">
-                <a:solidFill>
-                  <a:schemeClr val="bg1"/>
-                </a:solidFill>
-                <a:latin typeface="Avenir Medium" panose="02000503020000020003" pitchFamily="2" charset="0"/>
-                <a:ea typeface="Bodoni Ornaments" pitchFamily="2" charset="0"/>
-              </a:rPr>
-              <a:t>Paid in full</a:t>
-            </a:r>
-          </a:p>
-          <a:p>
-            <a:endParaRPr lang="en-US" sz="4400" dirty="0">
-              <a:solidFill>
-                <a:schemeClr val="bg1"/>
-              </a:solidFill>
-              <a:latin typeface="Avenir Medium" panose="02000503020000020003" pitchFamily="2" charset="0"/>
-              <a:ea typeface="Bodoni Ornaments" pitchFamily="2" charset="0"/>
-            </a:endParaRPr>
-          </a:p>
-          <a:p>
-            <a:r>
-              <a:rPr lang="en-US" sz="4400" dirty="0">
-                <a:solidFill>
-                  <a:schemeClr val="bg1"/>
-                </a:solidFill>
-                <a:latin typeface="Avenir Medium" panose="02000503020000020003" pitchFamily="2" charset="0"/>
-                <a:ea typeface="Bodoni Ornaments" pitchFamily="2" charset="0"/>
-              </a:rPr>
-              <a:t>All sufficient merit now my own</a:t>
-            </a:r>
-          </a:p>
-          <a:p>
-            <a:endParaRPr lang="en-US" sz="4400" dirty="0">
-              <a:solidFill>
-                <a:schemeClr val="bg1"/>
-              </a:solidFill>
-              <a:latin typeface="Avenir Medium" panose="02000503020000020003" pitchFamily="2" charset="0"/>
-              <a:ea typeface="Bodoni Ornaments" pitchFamily="2" charset="0"/>
-            </a:endParaRPr>
-          </a:p>
-          <a:p>
-            <a:r>
-              <a:rPr lang="en-US" sz="4400">
-                <a:solidFill>
-                  <a:schemeClr val="bg1"/>
-                </a:solidFill>
-                <a:latin typeface="Avenir Medium" panose="02000503020000020003" pitchFamily="2" charset="0"/>
-                <a:ea typeface="Bodoni Ornaments" pitchFamily="2" charset="0"/>
-              </a:rPr>
-              <a:t>(Oh your merit now my own)</a:t>
-            </a:r>
-            <a:endParaRPr lang="en-US" sz="4400" dirty="0">
-              <a:solidFill>
-                <a:schemeClr val="bg1"/>
-              </a:solidFill>
-              <a:latin typeface="Avenir Medium" panose="02000503020000020003" pitchFamily="2" charset="0"/>
-              <a:ea typeface="Bodoni Ornaments" pitchFamily="2" charset="0"/>
-            </a:endParaRPr>
-          </a:p>
-        </p:txBody>
-      </p:sp>
-    </p:spTree>
-    <p:extLst>
-      <p:ext uri="{BB962C8B-B14F-4D97-AF65-F5344CB8AC3E}">
-        <p14:creationId xmlns:p14="http://schemas.microsoft.com/office/powerpoint/2010/main" val="348193459"/>
+        <p14:creationId xmlns:p14="http://schemas.microsoft.com/office/powerpoint/2010/main" val="320446886"/>
       </p:ext>
     </p:extLst>
   </p:cSld>
@@ -4611,7 +3539,7 @@
     <p:bg>
       <p:bgPr>
         <a:solidFill>
-          <a:schemeClr val="accent1"/>
+          <a:schemeClr val="tx1"/>
         </a:solidFill>
         <a:effectLst/>
       </p:bgPr>
@@ -4621,7 +3549,7 @@
         <p:cNvPr id="1" name="">
           <a:extLst>
             <a:ext uri="{FF2B5EF4-FFF2-40B4-BE49-F238E27FC236}">
-              <a16:creationId xmlns:a16="http://schemas.microsoft.com/office/drawing/2014/main" id="{083E1F97-17F4-001F-7673-B8EFA09D831D}"/>
+              <a16:creationId xmlns:a16="http://schemas.microsoft.com/office/drawing/2014/main" id="{6B6DDA4A-E03B-8556-59B3-18DA3B2D1967}"/>
             </a:ext>
           </a:extLst>
         </p:cNvPr>
@@ -4641,7 +3569,7 @@
           <p:cNvPr id="3" name="Subtitle 2">
             <a:extLst>
               <a:ext uri="{FF2B5EF4-FFF2-40B4-BE49-F238E27FC236}">
-                <a16:creationId xmlns:a16="http://schemas.microsoft.com/office/drawing/2014/main" id="{0F0AA937-867D-D484-37E8-C9B43A905917}"/>
+                <a16:creationId xmlns:a16="http://schemas.microsoft.com/office/drawing/2014/main" id="{2618750F-9082-0A6E-6D44-28074BD5F0A4}"/>
               </a:ext>
             </a:extLst>
           </p:cNvPr>
@@ -4654,8 +3582,8 @@
         </p:nvSpPr>
         <p:spPr>
           <a:xfrm>
-            <a:off x="682831" y="497702"/>
-            <a:ext cx="10826338" cy="5862596"/>
+            <a:off x="84221" y="213360"/>
+            <a:ext cx="8891337" cy="6416040"/>
           </a:xfrm>
         </p:spPr>
         <p:txBody>
@@ -4664,7 +3592,7 @@
           </a:bodyPr>
           <a:lstStyle/>
           <a:p>
-            <a:endParaRPr lang="en-US" sz="4400" dirty="0">
+            <a:endParaRPr lang="en-US" sz="5400" dirty="0">
               <a:solidFill>
                 <a:schemeClr val="bg1"/>
               </a:solidFill>
@@ -4674,18 +3602,54 @@
           </a:p>
           <a:p>
             <a:r>
-              <a:rPr lang="en-US" sz="4400" dirty="0">
+              <a:rPr lang="en-US" sz="5400" dirty="0">
                 <a:solidFill>
                   <a:schemeClr val="bg1"/>
                 </a:solidFill>
                 <a:latin typeface="Avenir Medium" panose="02000503020000020003" pitchFamily="2" charset="0"/>
                 <a:ea typeface="Bodoni Ornaments" pitchFamily="2" charset="0"/>
               </a:rPr>
-              <a:t>All sufficient merit</a:t>
-            </a:r>
-          </a:p>
-          <a:p>
-            <a:endParaRPr lang="en-US" sz="4400" dirty="0">
+              <a:t>All sufficient merit </a:t>
+            </a:r>
+          </a:p>
+          <a:p>
+            <a:r>
+              <a:rPr lang="en-US" sz="5400" dirty="0">
+                <a:solidFill>
+                  <a:schemeClr val="bg1"/>
+                </a:solidFill>
+                <a:latin typeface="Avenir Medium" panose="02000503020000020003" pitchFamily="2" charset="0"/>
+                <a:ea typeface="Bodoni Ornaments" pitchFamily="2" charset="0"/>
+              </a:rPr>
+              <a:t>Shining like the sun</a:t>
+            </a:r>
+          </a:p>
+          <a:p>
+            <a:r>
+              <a:rPr lang="en-US" sz="5400" dirty="0">
+                <a:solidFill>
+                  <a:schemeClr val="bg1"/>
+                </a:solidFill>
+                <a:latin typeface="Avenir Medium" panose="02000503020000020003" pitchFamily="2" charset="0"/>
+                <a:ea typeface="Bodoni Ornaments" pitchFamily="2" charset="0"/>
+              </a:rPr>
+              <a:t>A fortune I inherit </a:t>
+            </a:r>
+          </a:p>
+          <a:p>
+            <a:r>
+              <a:rPr lang="en-US" sz="5400" dirty="0">
+                <a:solidFill>
+                  <a:schemeClr val="bg1"/>
+                </a:solidFill>
+                <a:latin typeface="Avenir Medium" panose="02000503020000020003" pitchFamily="2" charset="0"/>
+                <a:ea typeface="Bodoni Ornaments" pitchFamily="2" charset="0"/>
+              </a:rPr>
+              <a:t>By no work I have done</a:t>
+            </a:r>
+          </a:p>
+          <a:p>
+            <a:endParaRPr lang="en-US" sz="5400" dirty="0">
               <a:solidFill>
                 <a:schemeClr val="bg1"/>
               </a:solidFill>
@@ -4693,66 +3657,12 @@
               <a:ea typeface="Bodoni Ornaments" pitchFamily="2" charset="0"/>
             </a:endParaRPr>
           </a:p>
-          <a:p>
-            <a:r>
-              <a:rPr lang="en-US" sz="4400" dirty="0">
-                <a:solidFill>
-                  <a:schemeClr val="bg1"/>
-                </a:solidFill>
-                <a:latin typeface="Avenir Medium" panose="02000503020000020003" pitchFamily="2" charset="0"/>
-                <a:ea typeface="Bodoni Ornaments" pitchFamily="2" charset="0"/>
-              </a:rPr>
-              <a:t>Shining like the sun</a:t>
-            </a:r>
-          </a:p>
-          <a:p>
-            <a:endParaRPr lang="en-US" sz="4400" dirty="0">
-              <a:solidFill>
-                <a:schemeClr val="bg1"/>
-              </a:solidFill>
-              <a:latin typeface="Avenir Medium" panose="02000503020000020003" pitchFamily="2" charset="0"/>
-              <a:ea typeface="Bodoni Ornaments" pitchFamily="2" charset="0"/>
-            </a:endParaRPr>
-          </a:p>
-          <a:p>
-            <a:r>
-              <a:rPr lang="en-US" sz="4400" dirty="0">
-                <a:solidFill>
-                  <a:schemeClr val="bg1"/>
-                </a:solidFill>
-                <a:latin typeface="Avenir Medium" panose="02000503020000020003" pitchFamily="2" charset="0"/>
-                <a:ea typeface="Bodoni Ornaments" pitchFamily="2" charset="0"/>
-              </a:rPr>
-              <a:t>A fortune I inherit</a:t>
-            </a:r>
-          </a:p>
-          <a:p>
-            <a:endParaRPr lang="en-US" sz="4400" dirty="0">
-              <a:solidFill>
-                <a:schemeClr val="bg1"/>
-              </a:solidFill>
-              <a:latin typeface="Avenir Medium" panose="02000503020000020003" pitchFamily="2" charset="0"/>
-              <a:ea typeface="Bodoni Ornaments" pitchFamily="2" charset="0"/>
-            </a:endParaRPr>
-          </a:p>
-          <a:p>
-            <a:r>
-              <a:rPr lang="en-US" sz="4400" dirty="0">
-                <a:solidFill>
-                  <a:schemeClr val="bg1"/>
-                </a:solidFill>
-                <a:latin typeface="Avenir Medium" panose="02000503020000020003" pitchFamily="2" charset="0"/>
-                <a:ea typeface="Bodoni Ornaments" pitchFamily="2" charset="0"/>
-              </a:rPr>
-              <a:t>By no work I have done</a:t>
-            </a:r>
-          </a:p>
         </p:txBody>
       </p:sp>
     </p:spTree>
     <p:extLst>
       <p:ext uri="{BB962C8B-B14F-4D97-AF65-F5344CB8AC3E}">
-        <p14:creationId xmlns:p14="http://schemas.microsoft.com/office/powerpoint/2010/main" val="2991002073"/>
+        <p14:creationId xmlns:p14="http://schemas.microsoft.com/office/powerpoint/2010/main" val="2164526557"/>
       </p:ext>
     </p:extLst>
   </p:cSld>
@@ -4768,7 +3678,7 @@
     <p:bg>
       <p:bgPr>
         <a:solidFill>
-          <a:schemeClr val="accent1"/>
+          <a:schemeClr val="tx1"/>
         </a:solidFill>
         <a:effectLst/>
       </p:bgPr>
@@ -4778,7 +3688,7 @@
         <p:cNvPr id="1" name="">
           <a:extLst>
             <a:ext uri="{FF2B5EF4-FFF2-40B4-BE49-F238E27FC236}">
-              <a16:creationId xmlns:a16="http://schemas.microsoft.com/office/drawing/2014/main" id="{6E321B20-1F07-D41B-D17B-105DC9065E30}"/>
+              <a16:creationId xmlns:a16="http://schemas.microsoft.com/office/drawing/2014/main" id="{2E015117-71EF-D3FB-5BBF-6E28B6DA69FA}"/>
             </a:ext>
           </a:extLst>
         </p:cNvPr>
@@ -4798,7 +3708,7 @@
           <p:cNvPr id="3" name="Subtitle 2">
             <a:extLst>
               <a:ext uri="{FF2B5EF4-FFF2-40B4-BE49-F238E27FC236}">
-                <a16:creationId xmlns:a16="http://schemas.microsoft.com/office/drawing/2014/main" id="{34E81914-E1B4-6E96-BBA8-CF33B0DE6570}"/>
+                <a16:creationId xmlns:a16="http://schemas.microsoft.com/office/drawing/2014/main" id="{1F8B4636-7D97-1A1C-61A6-3E9857324B26}"/>
               </a:ext>
             </a:extLst>
           </p:cNvPr>
@@ -4811,8 +3721,8 @@
         </p:nvSpPr>
         <p:spPr>
           <a:xfrm>
-            <a:off x="682831" y="497702"/>
-            <a:ext cx="10826338" cy="5862596"/>
+            <a:off x="84221" y="213360"/>
+            <a:ext cx="8891337" cy="6416040"/>
           </a:xfrm>
         </p:spPr>
         <p:txBody>
@@ -4821,7 +3731,7 @@
           </a:bodyPr>
           <a:lstStyle/>
           <a:p>
-            <a:endParaRPr lang="en-US" sz="4400" dirty="0">
+            <a:endParaRPr lang="en-US" sz="5400" dirty="0">
               <a:solidFill>
                 <a:schemeClr val="bg1"/>
               </a:solidFill>
@@ -4831,7 +3741,7 @@
           </a:p>
           <a:p>
             <a:r>
-              <a:rPr lang="en-US" sz="4400" dirty="0">
+              <a:rPr lang="en-US" sz="5400" dirty="0">
                 <a:solidFill>
                   <a:schemeClr val="bg1"/>
                 </a:solidFill>
@@ -4842,7 +3752,43 @@
             </a:r>
           </a:p>
           <a:p>
-            <a:endParaRPr lang="en-US" sz="4400" dirty="0">
+            <a:r>
+              <a:rPr lang="en-US" sz="5400" dirty="0">
+                <a:solidFill>
+                  <a:schemeClr val="bg1"/>
+                </a:solidFill>
+                <a:latin typeface="Avenir Medium" panose="02000503020000020003" pitchFamily="2" charset="0"/>
+                <a:ea typeface="Bodoni Ornaments" pitchFamily="2" charset="0"/>
+              </a:rPr>
+              <a:t>At my saviors cross</a:t>
+            </a:r>
+          </a:p>
+          <a:p>
+            <a:r>
+              <a:rPr lang="en-US" sz="5400" dirty="0">
+                <a:solidFill>
+                  <a:schemeClr val="bg1"/>
+                </a:solidFill>
+                <a:latin typeface="Avenir Medium" panose="02000503020000020003" pitchFamily="2" charset="0"/>
+                <a:ea typeface="Bodoni Ornaments" pitchFamily="2" charset="0"/>
+              </a:rPr>
+              <a:t>Where all sufficient merit </a:t>
+            </a:r>
+          </a:p>
+          <a:p>
+            <a:r>
+              <a:rPr lang="en-US" sz="5400" dirty="0">
+                <a:solidFill>
+                  <a:schemeClr val="bg1"/>
+                </a:solidFill>
+                <a:latin typeface="Avenir Medium" panose="02000503020000020003" pitchFamily="2" charset="0"/>
+                <a:ea typeface="Bodoni Ornaments" pitchFamily="2" charset="0"/>
+              </a:rPr>
+              <a:t>Did what I could not</a:t>
+            </a:r>
+          </a:p>
+          <a:p>
+            <a:endParaRPr lang="en-US" sz="5400" dirty="0">
               <a:solidFill>
                 <a:schemeClr val="bg1"/>
               </a:solidFill>
@@ -4850,66 +3796,12 @@
               <a:ea typeface="Bodoni Ornaments" pitchFamily="2" charset="0"/>
             </a:endParaRPr>
           </a:p>
-          <a:p>
-            <a:r>
-              <a:rPr lang="en-US" sz="4400" dirty="0">
-                <a:solidFill>
-                  <a:schemeClr val="bg1"/>
-                </a:solidFill>
-                <a:latin typeface="Avenir Medium" panose="02000503020000020003" pitchFamily="2" charset="0"/>
-                <a:ea typeface="Bodoni Ornaments" pitchFamily="2" charset="0"/>
-              </a:rPr>
-              <a:t>At my saviors cross</a:t>
-            </a:r>
-          </a:p>
-          <a:p>
-            <a:endParaRPr lang="en-US" sz="4400" dirty="0">
-              <a:solidFill>
-                <a:schemeClr val="bg1"/>
-              </a:solidFill>
-              <a:latin typeface="Avenir Medium" panose="02000503020000020003" pitchFamily="2" charset="0"/>
-              <a:ea typeface="Bodoni Ornaments" pitchFamily="2" charset="0"/>
-            </a:endParaRPr>
-          </a:p>
-          <a:p>
-            <a:r>
-              <a:rPr lang="en-US" sz="4400" dirty="0">
-                <a:solidFill>
-                  <a:schemeClr val="bg1"/>
-                </a:solidFill>
-                <a:latin typeface="Avenir Medium" panose="02000503020000020003" pitchFamily="2" charset="0"/>
-                <a:ea typeface="Bodoni Ornaments" pitchFamily="2" charset="0"/>
-              </a:rPr>
-              <a:t>Where all sufficient merit</a:t>
-            </a:r>
-          </a:p>
-          <a:p>
-            <a:endParaRPr lang="en-US" sz="4400" dirty="0">
-              <a:solidFill>
-                <a:schemeClr val="bg1"/>
-              </a:solidFill>
-              <a:latin typeface="Avenir Medium" panose="02000503020000020003" pitchFamily="2" charset="0"/>
-              <a:ea typeface="Bodoni Ornaments" pitchFamily="2" charset="0"/>
-            </a:endParaRPr>
-          </a:p>
-          <a:p>
-            <a:r>
-              <a:rPr lang="en-US" sz="4400" dirty="0">
-                <a:solidFill>
-                  <a:schemeClr val="bg1"/>
-                </a:solidFill>
-                <a:latin typeface="Avenir Medium" panose="02000503020000020003" pitchFamily="2" charset="0"/>
-                <a:ea typeface="Bodoni Ornaments" pitchFamily="2" charset="0"/>
-              </a:rPr>
-              <a:t>Did what I could not</a:t>
-            </a:r>
-          </a:p>
         </p:txBody>
       </p:sp>
     </p:spTree>
     <p:extLst>
       <p:ext uri="{BB962C8B-B14F-4D97-AF65-F5344CB8AC3E}">
-        <p14:creationId xmlns:p14="http://schemas.microsoft.com/office/powerpoint/2010/main" val="1943880644"/>
+        <p14:creationId xmlns:p14="http://schemas.microsoft.com/office/powerpoint/2010/main" val="4051365561"/>
       </p:ext>
     </p:extLst>
   </p:cSld>
@@ -4925,7 +3817,7 @@
     <p:bg>
       <p:bgPr>
         <a:solidFill>
-          <a:schemeClr val="accent1"/>
+          <a:schemeClr val="tx1"/>
         </a:solidFill>
         <a:effectLst/>
       </p:bgPr>
@@ -4935,7 +3827,7 @@
         <p:cNvPr id="1" name="">
           <a:extLst>
             <a:ext uri="{FF2B5EF4-FFF2-40B4-BE49-F238E27FC236}">
-              <a16:creationId xmlns:a16="http://schemas.microsoft.com/office/drawing/2014/main" id="{EB7A8B09-2F31-905B-BD0E-1A22C68CDCD3}"/>
+              <a16:creationId xmlns:a16="http://schemas.microsoft.com/office/drawing/2014/main" id="{CDF0D0AE-FAA8-D210-9F05-FEEFB5984E7C}"/>
             </a:ext>
           </a:extLst>
         </p:cNvPr>
@@ -4955,7 +3847,7 @@
           <p:cNvPr id="3" name="Subtitle 2">
             <a:extLst>
               <a:ext uri="{FF2B5EF4-FFF2-40B4-BE49-F238E27FC236}">
-                <a16:creationId xmlns:a16="http://schemas.microsoft.com/office/drawing/2014/main" id="{18957205-5518-134E-F4A7-AD9AB21DC546}"/>
+                <a16:creationId xmlns:a16="http://schemas.microsoft.com/office/drawing/2014/main" id="{9AD9501A-D284-E628-E97B-CB052F16C650}"/>
               </a:ext>
             </a:extLst>
           </p:cNvPr>
@@ -4968,8 +3860,8 @@
         </p:nvSpPr>
         <p:spPr>
           <a:xfrm>
-            <a:off x="682831" y="497702"/>
-            <a:ext cx="10826338" cy="5862596"/>
+            <a:off x="84221" y="213360"/>
+            <a:ext cx="8891337" cy="6416040"/>
           </a:xfrm>
         </p:spPr>
         <p:txBody>
@@ -4978,7 +3870,7 @@
           </a:bodyPr>
           <a:lstStyle/>
           <a:p>
-            <a:endParaRPr lang="en-US" sz="4400" dirty="0">
+            <a:endParaRPr lang="en-US" sz="5400" dirty="0">
               <a:solidFill>
                 <a:schemeClr val="bg1"/>
               </a:solidFill>
@@ -4988,18 +3880,30 @@
           </a:p>
           <a:p>
             <a:r>
-              <a:rPr lang="en-US" sz="4400" dirty="0">
+              <a:rPr lang="en-US" sz="5400" dirty="0">
                 <a:solidFill>
                   <a:schemeClr val="bg1"/>
                 </a:solidFill>
                 <a:latin typeface="Avenir Medium" panose="02000503020000020003" pitchFamily="2" charset="0"/>
                 <a:ea typeface="Bodoni Ornaments" pitchFamily="2" charset="0"/>
               </a:rPr>
-              <a:t>In love he condescended</a:t>
-            </a:r>
-          </a:p>
-          <a:p>
-            <a:endParaRPr lang="en-US" sz="4400" dirty="0">
+              <a:t>In love he condescended Eternal now in time</a:t>
+            </a:r>
+          </a:p>
+          <a:p>
+            <a:r>
+              <a:rPr lang="en-US" sz="5400" dirty="0">
+                <a:solidFill>
+                  <a:schemeClr val="bg1"/>
+                </a:solidFill>
+                <a:latin typeface="Avenir Medium" panose="02000503020000020003" pitchFamily="2" charset="0"/>
+                <a:ea typeface="Bodoni Ornaments" pitchFamily="2" charset="0"/>
+              </a:rPr>
+              <a:t>A life without a blemish The maker made to die</a:t>
+            </a:r>
+          </a:p>
+          <a:p>
+            <a:endParaRPr lang="en-US" sz="5400" dirty="0">
               <a:solidFill>
                 <a:schemeClr val="bg1"/>
               </a:solidFill>
@@ -5008,19 +3912,7 @@
             </a:endParaRPr>
           </a:p>
           <a:p>
-            <a:r>
-              <a:rPr lang="en-US" sz="4400" dirty="0">
-                <a:solidFill>
-                  <a:schemeClr val="bg1"/>
-                </a:solidFill>
-                <a:latin typeface="Avenir Medium" panose="02000503020000020003" pitchFamily="2" charset="0"/>
-                <a:ea typeface="Bodoni Ornaments" pitchFamily="2" charset="0"/>
-              </a:rPr>
-              <a:t>Eternal now in time</a:t>
-            </a:r>
-          </a:p>
-          <a:p>
-            <a:endParaRPr lang="en-US" sz="4400" dirty="0">
+            <a:endParaRPr lang="en-US" sz="5400" dirty="0">
               <a:solidFill>
                 <a:schemeClr val="bg1"/>
               </a:solidFill>
@@ -5029,19 +3921,7 @@
             </a:endParaRPr>
           </a:p>
           <a:p>
-            <a:r>
-              <a:rPr lang="en-US" sz="4400" dirty="0">
-                <a:solidFill>
-                  <a:schemeClr val="bg1"/>
-                </a:solidFill>
-                <a:latin typeface="Avenir Medium" panose="02000503020000020003" pitchFamily="2" charset="0"/>
-                <a:ea typeface="Bodoni Ornaments" pitchFamily="2" charset="0"/>
-              </a:rPr>
-              <a:t>A life without a blemish</a:t>
-            </a:r>
-          </a:p>
-          <a:p>
-            <a:endParaRPr lang="en-US" sz="4400" dirty="0">
+            <a:endParaRPr lang="en-US" sz="5400" dirty="0">
               <a:solidFill>
                 <a:schemeClr val="bg1"/>
               </a:solidFill>
@@ -5049,24 +3929,12 @@
               <a:ea typeface="Bodoni Ornaments" pitchFamily="2" charset="0"/>
             </a:endParaRPr>
           </a:p>
-          <a:p>
-            <a:r>
-              <a:rPr lang="en-US" sz="4400" dirty="0">
-                <a:solidFill>
-                  <a:schemeClr val="bg1"/>
-                </a:solidFill>
-                <a:latin typeface="Avenir Medium" panose="02000503020000020003" pitchFamily="2" charset="0"/>
-                <a:ea typeface="Bodoni Ornaments" pitchFamily="2" charset="0"/>
-              </a:rPr>
-              <a:t>The maker made to die</a:t>
-            </a:r>
-          </a:p>
         </p:txBody>
       </p:sp>
     </p:spTree>
     <p:extLst>
       <p:ext uri="{BB962C8B-B14F-4D97-AF65-F5344CB8AC3E}">
-        <p14:creationId xmlns:p14="http://schemas.microsoft.com/office/powerpoint/2010/main" val="270575453"/>
+        <p14:creationId xmlns:p14="http://schemas.microsoft.com/office/powerpoint/2010/main" val="985079307"/>
       </p:ext>
     </p:extLst>
   </p:cSld>
@@ -5082,7 +3950,7 @@
     <p:bg>
       <p:bgPr>
         <a:solidFill>
-          <a:schemeClr val="accent1"/>
+          <a:schemeClr val="tx1"/>
         </a:solidFill>
         <a:effectLst/>
       </p:bgPr>
@@ -5092,7 +3960,7 @@
         <p:cNvPr id="1" name="">
           <a:extLst>
             <a:ext uri="{FF2B5EF4-FFF2-40B4-BE49-F238E27FC236}">
-              <a16:creationId xmlns:a16="http://schemas.microsoft.com/office/drawing/2014/main" id="{338485AA-E5D7-1D2A-5596-A117FB74FDDB}"/>
+              <a16:creationId xmlns:a16="http://schemas.microsoft.com/office/drawing/2014/main" id="{8C50564C-03EE-F4EB-B168-7718F96C64B2}"/>
             </a:ext>
           </a:extLst>
         </p:cNvPr>
@@ -5112,7 +3980,7 @@
           <p:cNvPr id="3" name="Subtitle 2">
             <a:extLst>
               <a:ext uri="{FF2B5EF4-FFF2-40B4-BE49-F238E27FC236}">
-                <a16:creationId xmlns:a16="http://schemas.microsoft.com/office/drawing/2014/main" id="{481BF79A-693B-1553-9129-003849B4A6E1}"/>
+                <a16:creationId xmlns:a16="http://schemas.microsoft.com/office/drawing/2014/main" id="{01187370-62E8-223F-14D8-73543A728C42}"/>
               </a:ext>
             </a:extLst>
           </p:cNvPr>
@@ -5125,8 +3993,8 @@
         </p:nvSpPr>
         <p:spPr>
           <a:xfrm>
-            <a:off x="682831" y="497702"/>
-            <a:ext cx="10826338" cy="5862596"/>
+            <a:off x="84221" y="213360"/>
+            <a:ext cx="8891337" cy="6416040"/>
           </a:xfrm>
         </p:spPr>
         <p:txBody>
@@ -5135,7 +4003,7 @@
           </a:bodyPr>
           <a:lstStyle/>
           <a:p>
-            <a:endParaRPr lang="en-US" sz="4400" dirty="0">
+            <a:endParaRPr lang="en-US" sz="5400" dirty="0">
               <a:solidFill>
                 <a:schemeClr val="bg1"/>
               </a:solidFill>
@@ -5144,19 +4012,7 @@
             </a:endParaRPr>
           </a:p>
           <a:p>
-            <a:r>
-              <a:rPr lang="en-US" sz="4400" dirty="0">
-                <a:solidFill>
-                  <a:schemeClr val="bg1"/>
-                </a:solidFill>
-                <a:latin typeface="Avenir Medium" panose="02000503020000020003" pitchFamily="2" charset="0"/>
-                <a:ea typeface="Bodoni Ornaments" pitchFamily="2" charset="0"/>
-              </a:rPr>
-              <a:t>The Law could never save us</a:t>
-            </a:r>
-          </a:p>
-          <a:p>
-            <a:endParaRPr lang="en-US" sz="4400" dirty="0">
+            <a:endParaRPr lang="en-US" sz="5400" dirty="0">
               <a:solidFill>
                 <a:schemeClr val="bg1"/>
               </a:solidFill>
@@ -5166,18 +4022,30 @@
           </a:p>
           <a:p>
             <a:r>
-              <a:rPr lang="en-US" sz="4400" dirty="0">
+              <a:rPr lang="en-US" sz="5400" dirty="0">
                 <a:solidFill>
                   <a:schemeClr val="bg1"/>
                 </a:solidFill>
                 <a:latin typeface="Avenir Medium" panose="02000503020000020003" pitchFamily="2" charset="0"/>
                 <a:ea typeface="Bodoni Ornaments" pitchFamily="2" charset="0"/>
               </a:rPr>
-              <a:t>Our lawlessness had won</a:t>
-            </a:r>
-          </a:p>
-          <a:p>
-            <a:endParaRPr lang="en-US" sz="4400" dirty="0">
+              <a:t>The Law could never save us Our lawlessness had won</a:t>
+            </a:r>
+          </a:p>
+          <a:p>
+            <a:r>
+              <a:rPr lang="en-US" sz="5400" dirty="0">
+                <a:solidFill>
+                  <a:schemeClr val="bg1"/>
+                </a:solidFill>
+                <a:latin typeface="Avenir Medium" panose="02000503020000020003" pitchFamily="2" charset="0"/>
+                <a:ea typeface="Bodoni Ornaments" pitchFamily="2" charset="0"/>
+              </a:rPr>
+              <a:t>Until the pure and spotless Lamb had finally come</a:t>
+            </a:r>
+          </a:p>
+          <a:p>
+            <a:endParaRPr lang="en-US" sz="5400" dirty="0">
               <a:solidFill>
                 <a:schemeClr val="bg1"/>
               </a:solidFill>
@@ -5186,19 +4054,7 @@
             </a:endParaRPr>
           </a:p>
           <a:p>
-            <a:r>
-              <a:rPr lang="en-US" sz="4400" dirty="0">
-                <a:solidFill>
-                  <a:schemeClr val="bg1"/>
-                </a:solidFill>
-                <a:latin typeface="Avenir Medium" panose="02000503020000020003" pitchFamily="2" charset="0"/>
-                <a:ea typeface="Bodoni Ornaments" pitchFamily="2" charset="0"/>
-              </a:rPr>
-              <a:t>Until the pure and spotless</a:t>
-            </a:r>
-          </a:p>
-          <a:p>
-            <a:endParaRPr lang="en-US" sz="4400" dirty="0">
+            <a:endParaRPr lang="en-US" sz="5400" dirty="0">
               <a:solidFill>
                 <a:schemeClr val="bg1"/>
               </a:solidFill>
@@ -5207,23 +4063,20 @@
             </a:endParaRPr>
           </a:p>
           <a:p>
-            <a:r>
-              <a:rPr lang="en-US" sz="4400" dirty="0">
-                <a:solidFill>
-                  <a:schemeClr val="bg1"/>
-                </a:solidFill>
-                <a:latin typeface="Avenir Medium" panose="02000503020000020003" pitchFamily="2" charset="0"/>
-                <a:ea typeface="Bodoni Ornaments" pitchFamily="2" charset="0"/>
-              </a:rPr>
-              <a:t>Lamb had finally come</a:t>
-            </a:r>
+            <a:endParaRPr lang="en-US" sz="5400" dirty="0">
+              <a:solidFill>
+                <a:schemeClr val="bg1"/>
+              </a:solidFill>
+              <a:latin typeface="Avenir Medium" panose="02000503020000020003" pitchFamily="2" charset="0"/>
+              <a:ea typeface="Bodoni Ornaments" pitchFamily="2" charset="0"/>
+            </a:endParaRPr>
           </a:p>
         </p:txBody>
       </p:sp>
     </p:spTree>
     <p:extLst>
       <p:ext uri="{BB962C8B-B14F-4D97-AF65-F5344CB8AC3E}">
-        <p14:creationId xmlns:p14="http://schemas.microsoft.com/office/powerpoint/2010/main" val="1328795848"/>
+        <p14:creationId xmlns:p14="http://schemas.microsoft.com/office/powerpoint/2010/main" val="1502027838"/>
       </p:ext>
     </p:extLst>
   </p:cSld>
@@ -5239,7 +4092,7 @@
     <p:bg>
       <p:bgPr>
         <a:solidFill>
-          <a:srgbClr val="7030A0"/>
+          <a:schemeClr val="tx1"/>
         </a:solidFill>
         <a:effectLst/>
       </p:bgPr>
@@ -5249,7 +4102,7 @@
         <p:cNvPr id="1" name="">
           <a:extLst>
             <a:ext uri="{FF2B5EF4-FFF2-40B4-BE49-F238E27FC236}">
-              <a16:creationId xmlns:a16="http://schemas.microsoft.com/office/drawing/2014/main" id="{A6AFF0EA-04E9-B7E9-0BF6-7D546FDEE586}"/>
+              <a16:creationId xmlns:a16="http://schemas.microsoft.com/office/drawing/2014/main" id="{62CE6CE8-636C-027E-5191-7A6504E2D6BB}"/>
             </a:ext>
           </a:extLst>
         </p:cNvPr>
@@ -5269,7 +4122,7 @@
           <p:cNvPr id="3" name="Subtitle 2">
             <a:extLst>
               <a:ext uri="{FF2B5EF4-FFF2-40B4-BE49-F238E27FC236}">
-                <a16:creationId xmlns:a16="http://schemas.microsoft.com/office/drawing/2014/main" id="{20377A57-C32B-6F9A-6862-0207CC2B8566}"/>
+                <a16:creationId xmlns:a16="http://schemas.microsoft.com/office/drawing/2014/main" id="{4BBEBA68-9E03-6707-6CB3-48BD98B15A22}"/>
               </a:ext>
             </a:extLst>
           </p:cNvPr>
@@ -5282,8 +4135,8 @@
         </p:nvSpPr>
         <p:spPr>
           <a:xfrm>
-            <a:off x="682831" y="497702"/>
-            <a:ext cx="10826338" cy="5862596"/>
+            <a:off x="84221" y="213360"/>
+            <a:ext cx="8891337" cy="6416040"/>
           </a:xfrm>
         </p:spPr>
         <p:txBody>
@@ -5292,7 +4145,7 @@
           </a:bodyPr>
           <a:lstStyle/>
           <a:p>
-            <a:endParaRPr lang="en-US" sz="4400" dirty="0">
+            <a:endParaRPr lang="en-US" sz="5400" dirty="0">
               <a:solidFill>
                 <a:schemeClr val="bg1"/>
               </a:solidFill>
@@ -5302,18 +4155,66 @@
           </a:p>
           <a:p>
             <a:r>
-              <a:rPr lang="en-US" sz="4400" dirty="0">
+              <a:rPr lang="en-US" sz="5400" dirty="0">
                 <a:solidFill>
                   <a:schemeClr val="bg1"/>
                 </a:solidFill>
                 <a:latin typeface="Avenir Medium" panose="02000503020000020003" pitchFamily="2" charset="0"/>
                 <a:ea typeface="Bodoni Ornaments" pitchFamily="2" charset="0"/>
               </a:rPr>
-              <a:t>It is done</a:t>
-            </a:r>
-          </a:p>
-          <a:p>
-            <a:endParaRPr lang="en-US" sz="4400" dirty="0">
+              <a:t>It is done </a:t>
+            </a:r>
+          </a:p>
+          <a:p>
+            <a:r>
+              <a:rPr lang="en-US" sz="5400" dirty="0">
+                <a:solidFill>
+                  <a:schemeClr val="bg1"/>
+                </a:solidFill>
+                <a:latin typeface="Avenir Medium" panose="02000503020000020003" pitchFamily="2" charset="0"/>
+                <a:ea typeface="Bodoni Ornaments" pitchFamily="2" charset="0"/>
+              </a:rPr>
+              <a:t>It is finished</a:t>
+            </a:r>
+          </a:p>
+          <a:p>
+            <a:r>
+              <a:rPr lang="en-US" sz="5400" dirty="0">
+                <a:solidFill>
+                  <a:schemeClr val="bg1"/>
+                </a:solidFill>
+                <a:latin typeface="Avenir Medium" panose="02000503020000020003" pitchFamily="2" charset="0"/>
+                <a:ea typeface="Bodoni Ornaments" pitchFamily="2" charset="0"/>
+              </a:rPr>
+              <a:t>No more debt I owe</a:t>
+            </a:r>
+          </a:p>
+          <a:p>
+            <a:r>
+              <a:rPr lang="en-US" sz="5400" dirty="0">
+                <a:solidFill>
+                  <a:schemeClr val="bg1"/>
+                </a:solidFill>
+                <a:latin typeface="Avenir Medium" panose="02000503020000020003" pitchFamily="2" charset="0"/>
+                <a:ea typeface="Bodoni Ornaments" pitchFamily="2" charset="0"/>
+              </a:rPr>
+              <a:t>Paid in full</a:t>
+            </a:r>
+          </a:p>
+          <a:p>
+            <a:r>
+              <a:rPr lang="en-US" sz="5400" dirty="0">
+                <a:solidFill>
+                  <a:schemeClr val="bg1"/>
+                </a:solidFill>
+                <a:latin typeface="Avenir Medium" panose="02000503020000020003" pitchFamily="2" charset="0"/>
+                <a:ea typeface="Bodoni Ornaments" pitchFamily="2" charset="0"/>
+              </a:rPr>
+              <a:t>All sufficient merit now my own</a:t>
+            </a:r>
+          </a:p>
+          <a:p>
+            <a:endParaRPr lang="en-US" sz="5400" dirty="0">
               <a:solidFill>
                 <a:schemeClr val="bg1"/>
               </a:solidFill>
@@ -5321,45 +4222,12 @@
               <a:ea typeface="Bodoni Ornaments" pitchFamily="2" charset="0"/>
             </a:endParaRPr>
           </a:p>
-          <a:p>
-            <a:r>
-              <a:rPr lang="en-US" sz="4400" dirty="0">
-                <a:solidFill>
-                  <a:schemeClr val="bg1"/>
-                </a:solidFill>
-                <a:latin typeface="Avenir Medium" panose="02000503020000020003" pitchFamily="2" charset="0"/>
-                <a:ea typeface="Bodoni Ornaments" pitchFamily="2" charset="0"/>
-              </a:rPr>
-              <a:t>It is finished</a:t>
-            </a:r>
-          </a:p>
-          <a:p>
-            <a:endParaRPr lang="en-US" sz="4400" dirty="0">
-              <a:solidFill>
-                <a:schemeClr val="bg1"/>
-              </a:solidFill>
-              <a:latin typeface="Avenir Medium" panose="02000503020000020003" pitchFamily="2" charset="0"/>
-              <a:ea typeface="Bodoni Ornaments" pitchFamily="2" charset="0"/>
-            </a:endParaRPr>
-          </a:p>
-          <a:p>
-            <a:r>
-              <a:rPr lang="en-US" sz="4400" dirty="0">
-                <a:solidFill>
-                  <a:schemeClr val="bg1"/>
-                </a:solidFill>
-                <a:latin typeface="Avenir Medium" panose="02000503020000020003" pitchFamily="2" charset="0"/>
-                <a:ea typeface="Bodoni Ornaments" pitchFamily="2" charset="0"/>
-              </a:rPr>
-              <a:t>No more debt I owe</a:t>
-            </a:r>
-          </a:p>
         </p:txBody>
       </p:sp>
     </p:spTree>
     <p:extLst>
       <p:ext uri="{BB962C8B-B14F-4D97-AF65-F5344CB8AC3E}">
-        <p14:creationId xmlns:p14="http://schemas.microsoft.com/office/powerpoint/2010/main" val="3098694661"/>
+        <p14:creationId xmlns:p14="http://schemas.microsoft.com/office/powerpoint/2010/main" val="3104604794"/>
       </p:ext>
     </p:extLst>
   </p:cSld>
@@ -5375,7 +4243,7 @@
     <p:bg>
       <p:bgPr>
         <a:solidFill>
-          <a:srgbClr val="7030A0"/>
+          <a:schemeClr val="tx1"/>
         </a:solidFill>
         <a:effectLst/>
       </p:bgPr>
@@ -5385,7 +4253,7 @@
         <p:cNvPr id="1" name="">
           <a:extLst>
             <a:ext uri="{FF2B5EF4-FFF2-40B4-BE49-F238E27FC236}">
-              <a16:creationId xmlns:a16="http://schemas.microsoft.com/office/drawing/2014/main" id="{805F4B13-D2D3-B52B-5C79-90350352FAE5}"/>
+              <a16:creationId xmlns:a16="http://schemas.microsoft.com/office/drawing/2014/main" id="{80935F75-698C-6338-0A1B-80CECE41B790}"/>
             </a:ext>
           </a:extLst>
         </p:cNvPr>
@@ -5405,7 +4273,7 @@
           <p:cNvPr id="3" name="Subtitle 2">
             <a:extLst>
               <a:ext uri="{FF2B5EF4-FFF2-40B4-BE49-F238E27FC236}">
-                <a16:creationId xmlns:a16="http://schemas.microsoft.com/office/drawing/2014/main" id="{D676AC21-EFE8-0107-87AA-58036F07F1E3}"/>
+                <a16:creationId xmlns:a16="http://schemas.microsoft.com/office/drawing/2014/main" id="{D81BE608-BEB4-A50E-DC77-7DC0CE71ABC0}"/>
               </a:ext>
             </a:extLst>
           </p:cNvPr>
@@ -5418,8 +4286,8 @@
         </p:nvSpPr>
         <p:spPr>
           <a:xfrm>
-            <a:off x="682831" y="497702"/>
-            <a:ext cx="10826338" cy="5862596"/>
+            <a:off x="84221" y="213360"/>
+            <a:ext cx="8891337" cy="6416040"/>
           </a:xfrm>
         </p:spPr>
         <p:txBody>
@@ -5428,7 +4296,7 @@
           </a:bodyPr>
           <a:lstStyle/>
           <a:p>
-            <a:endParaRPr lang="en-US" sz="4400" dirty="0">
+            <a:endParaRPr lang="en-US" sz="5400" dirty="0">
               <a:solidFill>
                 <a:schemeClr val="bg1"/>
               </a:solidFill>
@@ -5438,18 +4306,30 @@
           </a:p>
           <a:p>
             <a:r>
-              <a:rPr lang="en-US" sz="4400" dirty="0">
+              <a:rPr lang="en-US" sz="5400" dirty="0">
                 <a:solidFill>
                   <a:schemeClr val="bg1"/>
                 </a:solidFill>
                 <a:latin typeface="Avenir Medium" panose="02000503020000020003" pitchFamily="2" charset="0"/>
                 <a:ea typeface="Bodoni Ornaments" pitchFamily="2" charset="0"/>
               </a:rPr>
-              <a:t>Paid in full</a:t>
-            </a:r>
-          </a:p>
-          <a:p>
-            <a:endParaRPr lang="en-US" sz="4400" dirty="0">
+              <a:t>I lay down my garments Any empty boast</a:t>
+            </a:r>
+          </a:p>
+          <a:p>
+            <a:r>
+              <a:rPr lang="en-US" sz="5400" dirty="0">
+                <a:solidFill>
+                  <a:schemeClr val="bg1"/>
+                </a:solidFill>
+                <a:latin typeface="Avenir Medium" panose="02000503020000020003" pitchFamily="2" charset="0"/>
+                <a:ea typeface="Bodoni Ornaments" pitchFamily="2" charset="0"/>
+              </a:rPr>
+              <a:t>Good works now all corrupted By the sinful host</a:t>
+            </a:r>
+          </a:p>
+          <a:p>
+            <a:endParaRPr lang="en-US" sz="5400" dirty="0">
               <a:solidFill>
                 <a:schemeClr val="bg1"/>
               </a:solidFill>
@@ -5457,24 +4337,12 @@
               <a:ea typeface="Bodoni Ornaments" pitchFamily="2" charset="0"/>
             </a:endParaRPr>
           </a:p>
-          <a:p>
-            <a:r>
-              <a:rPr lang="en-US" sz="4400" dirty="0">
-                <a:solidFill>
-                  <a:schemeClr val="bg1"/>
-                </a:solidFill>
-                <a:latin typeface="Avenir Medium" panose="02000503020000020003" pitchFamily="2" charset="0"/>
-                <a:ea typeface="Bodoni Ornaments" pitchFamily="2" charset="0"/>
-              </a:rPr>
-              <a:t>All sufficient merit now my own</a:t>
-            </a:r>
-          </a:p>
         </p:txBody>
       </p:sp>
     </p:spTree>
     <p:extLst>
       <p:ext uri="{BB962C8B-B14F-4D97-AF65-F5344CB8AC3E}">
-        <p14:creationId xmlns:p14="http://schemas.microsoft.com/office/powerpoint/2010/main" val="2424527069"/>
+        <p14:creationId xmlns:p14="http://schemas.microsoft.com/office/powerpoint/2010/main" val="1465797502"/>
       </p:ext>
     </p:extLst>
   </p:cSld>
@@ -5490,7 +4358,7 @@
     <p:bg>
       <p:bgPr>
         <a:solidFill>
-          <a:schemeClr val="accent1"/>
+          <a:schemeClr val="tx1"/>
         </a:solidFill>
         <a:effectLst/>
       </p:bgPr>
@@ -5500,7 +4368,7 @@
         <p:cNvPr id="1" name="">
           <a:extLst>
             <a:ext uri="{FF2B5EF4-FFF2-40B4-BE49-F238E27FC236}">
-              <a16:creationId xmlns:a16="http://schemas.microsoft.com/office/drawing/2014/main" id="{BEF6EB98-5F43-3DA3-94A9-EB6300F45A3C}"/>
+              <a16:creationId xmlns:a16="http://schemas.microsoft.com/office/drawing/2014/main" id="{A73FB98B-E9DC-EB20-9A2E-06E59E5D7E42}"/>
             </a:ext>
           </a:extLst>
         </p:cNvPr>
@@ -5520,7 +4388,7 @@
           <p:cNvPr id="3" name="Subtitle 2">
             <a:extLst>
               <a:ext uri="{FF2B5EF4-FFF2-40B4-BE49-F238E27FC236}">
-                <a16:creationId xmlns:a16="http://schemas.microsoft.com/office/drawing/2014/main" id="{71DE054B-FBE9-55DC-2B7F-6146B7B7E5C0}"/>
+                <a16:creationId xmlns:a16="http://schemas.microsoft.com/office/drawing/2014/main" id="{F02A74DF-21E5-C209-D82A-44C6AF32A052}"/>
               </a:ext>
             </a:extLst>
           </p:cNvPr>
@@ -5533,8 +4401,8 @@
         </p:nvSpPr>
         <p:spPr>
           <a:xfrm>
-            <a:off x="682831" y="497702"/>
-            <a:ext cx="10826338" cy="5862596"/>
+            <a:off x="84221" y="213360"/>
+            <a:ext cx="8891337" cy="6416040"/>
           </a:xfrm>
         </p:spPr>
         <p:txBody>
@@ -5543,7 +4411,7 @@
           </a:bodyPr>
           <a:lstStyle/>
           <a:p>
-            <a:endParaRPr lang="en-US" sz="4400" dirty="0">
+            <a:endParaRPr lang="en-US" sz="5400" dirty="0">
               <a:solidFill>
                 <a:schemeClr val="bg1"/>
               </a:solidFill>
@@ -5553,58 +4421,55 @@
           </a:p>
           <a:p>
             <a:r>
-              <a:rPr lang="en-US" sz="4400" dirty="0">
+              <a:rPr lang="en-US" sz="5400" dirty="0">
                 <a:solidFill>
                   <a:schemeClr val="bg1"/>
                 </a:solidFill>
                 <a:latin typeface="Avenir Medium" panose="02000503020000020003" pitchFamily="2" charset="0"/>
                 <a:ea typeface="Bodoni Ornaments" pitchFamily="2" charset="0"/>
               </a:rPr>
-              <a:t>I lay down my garments</a:t>
-            </a:r>
-          </a:p>
-          <a:p>
-            <a:r>
-              <a:rPr lang="en-US" sz="4400" dirty="0">
+              <a:t>Dressed in my LORD Jesus </a:t>
+            </a:r>
+          </a:p>
+          <a:p>
+            <a:r>
+              <a:rPr lang="en-US" sz="5400" dirty="0">
                 <a:solidFill>
                   <a:schemeClr val="bg1"/>
                 </a:solidFill>
                 <a:latin typeface="Avenir Medium" panose="02000503020000020003" pitchFamily="2" charset="0"/>
                 <a:ea typeface="Bodoni Ornaments" pitchFamily="2" charset="0"/>
               </a:rPr>
-              <a:t>Any empty boast</a:t>
-            </a:r>
-          </a:p>
-          <a:p>
-            <a:r>
-              <a:rPr lang="en-US" sz="4400" dirty="0">
+              <a:t>A crimson robe made white</a:t>
+            </a:r>
+          </a:p>
+          <a:p>
+            <a:r>
+              <a:rPr lang="en-US" sz="5400" dirty="0">
                 <a:solidFill>
                   <a:schemeClr val="bg1"/>
                 </a:solidFill>
                 <a:latin typeface="Avenir Medium" panose="02000503020000020003" pitchFamily="2" charset="0"/>
                 <a:ea typeface="Bodoni Ornaments" pitchFamily="2" charset="0"/>
               </a:rPr>
-              <a:t>Good works now all corrupted</a:t>
-            </a:r>
-          </a:p>
-          <a:p>
-            <a:r>
-              <a:rPr lang="en-US" sz="4400" dirty="0">
-                <a:solidFill>
-                  <a:schemeClr val="bg1"/>
-                </a:solidFill>
-                <a:latin typeface="Avenir Medium" panose="02000503020000020003" pitchFamily="2" charset="0"/>
-                <a:ea typeface="Bodoni Ornaments" pitchFamily="2" charset="0"/>
-              </a:rPr>
-              <a:t>By the sinful host</a:t>
-            </a:r>
+              <a:t>No more fear of judgement His righteousness is mine</a:t>
+            </a:r>
+          </a:p>
+          <a:p>
+            <a:endParaRPr lang="en-US" sz="5400" dirty="0">
+              <a:solidFill>
+                <a:schemeClr val="bg1"/>
+              </a:solidFill>
+              <a:latin typeface="Avenir Medium" panose="02000503020000020003" pitchFamily="2" charset="0"/>
+              <a:ea typeface="Bodoni Ornaments" pitchFamily="2" charset="0"/>
+            </a:endParaRPr>
           </a:p>
         </p:txBody>
       </p:sp>
     </p:spTree>
     <p:extLst>
       <p:ext uri="{BB962C8B-B14F-4D97-AF65-F5344CB8AC3E}">
-        <p14:creationId xmlns:p14="http://schemas.microsoft.com/office/powerpoint/2010/main" val="291943255"/>
+        <p14:creationId xmlns:p14="http://schemas.microsoft.com/office/powerpoint/2010/main" val="2238147573"/>
       </p:ext>
     </p:extLst>
   </p:cSld>
@@ -5620,7 +4485,7 @@
     <p:bg>
       <p:bgPr>
         <a:solidFill>
-          <a:schemeClr val="accent1"/>
+          <a:schemeClr val="tx1"/>
         </a:solidFill>
         <a:effectLst/>
       </p:bgPr>
@@ -5630,7 +4495,7 @@
         <p:cNvPr id="1" name="">
           <a:extLst>
             <a:ext uri="{FF2B5EF4-FFF2-40B4-BE49-F238E27FC236}">
-              <a16:creationId xmlns:a16="http://schemas.microsoft.com/office/drawing/2014/main" id="{767266B9-C9EE-B7FF-FDA9-A064D3B5A98B}"/>
+              <a16:creationId xmlns:a16="http://schemas.microsoft.com/office/drawing/2014/main" id="{2DEA4DE8-9BC4-910B-A226-9A750F095452}"/>
             </a:ext>
           </a:extLst>
         </p:cNvPr>
@@ -5650,7 +4515,7 @@
           <p:cNvPr id="3" name="Subtitle 2">
             <a:extLst>
               <a:ext uri="{FF2B5EF4-FFF2-40B4-BE49-F238E27FC236}">
-                <a16:creationId xmlns:a16="http://schemas.microsoft.com/office/drawing/2014/main" id="{17847247-1E8D-0181-52EF-49ECFD333147}"/>
+                <a16:creationId xmlns:a16="http://schemas.microsoft.com/office/drawing/2014/main" id="{DF965397-DA90-7C31-1B54-D92DAC22B5B8}"/>
               </a:ext>
             </a:extLst>
           </p:cNvPr>
@@ -5663,8 +4528,8 @@
         </p:nvSpPr>
         <p:spPr>
           <a:xfrm>
-            <a:off x="682831" y="497702"/>
-            <a:ext cx="10826338" cy="5862596"/>
+            <a:off x="84221" y="213360"/>
+            <a:ext cx="8891337" cy="6416040"/>
           </a:xfrm>
         </p:spPr>
         <p:txBody>
@@ -5673,7 +4538,7 @@
           </a:bodyPr>
           <a:lstStyle/>
           <a:p>
-            <a:endParaRPr lang="en-US" sz="4400" dirty="0">
+            <a:endParaRPr lang="en-US" sz="5400" dirty="0">
               <a:solidFill>
                 <a:schemeClr val="bg1"/>
               </a:solidFill>
@@ -5683,18 +4548,66 @@
           </a:p>
           <a:p>
             <a:r>
-              <a:rPr lang="en-US" sz="4400" dirty="0">
+              <a:rPr lang="en-US" sz="5400" dirty="0">
                 <a:solidFill>
                   <a:schemeClr val="bg1"/>
                 </a:solidFill>
                 <a:latin typeface="Avenir Medium" panose="02000503020000020003" pitchFamily="2" charset="0"/>
                 <a:ea typeface="Bodoni Ornaments" pitchFamily="2" charset="0"/>
               </a:rPr>
-              <a:t>I’m dressed in my LORD Jesus</a:t>
-            </a:r>
-          </a:p>
-          <a:p>
-            <a:endParaRPr lang="en-US" sz="4400" dirty="0">
+              <a:t>It is done </a:t>
+            </a:r>
+          </a:p>
+          <a:p>
+            <a:r>
+              <a:rPr lang="en-US" sz="5400" dirty="0">
+                <a:solidFill>
+                  <a:schemeClr val="bg1"/>
+                </a:solidFill>
+                <a:latin typeface="Avenir Medium" panose="02000503020000020003" pitchFamily="2" charset="0"/>
+                <a:ea typeface="Bodoni Ornaments" pitchFamily="2" charset="0"/>
+              </a:rPr>
+              <a:t>It is finished</a:t>
+            </a:r>
+          </a:p>
+          <a:p>
+            <a:r>
+              <a:rPr lang="en-US" sz="5400" dirty="0">
+                <a:solidFill>
+                  <a:schemeClr val="bg1"/>
+                </a:solidFill>
+                <a:latin typeface="Avenir Medium" panose="02000503020000020003" pitchFamily="2" charset="0"/>
+                <a:ea typeface="Bodoni Ornaments" pitchFamily="2" charset="0"/>
+              </a:rPr>
+              <a:t>No more debt I owe</a:t>
+            </a:r>
+          </a:p>
+          <a:p>
+            <a:r>
+              <a:rPr lang="en-US" sz="5400" dirty="0">
+                <a:solidFill>
+                  <a:schemeClr val="bg1"/>
+                </a:solidFill>
+                <a:latin typeface="Avenir Medium" panose="02000503020000020003" pitchFamily="2" charset="0"/>
+                <a:ea typeface="Bodoni Ornaments" pitchFamily="2" charset="0"/>
+              </a:rPr>
+              <a:t>Paid in full</a:t>
+            </a:r>
+          </a:p>
+          <a:p>
+            <a:r>
+              <a:rPr lang="en-US" sz="5400" dirty="0">
+                <a:solidFill>
+                  <a:schemeClr val="bg1"/>
+                </a:solidFill>
+                <a:latin typeface="Avenir Medium" panose="02000503020000020003" pitchFamily="2" charset="0"/>
+                <a:ea typeface="Bodoni Ornaments" pitchFamily="2" charset="0"/>
+              </a:rPr>
+              <a:t>All sufficient merit now my own</a:t>
+            </a:r>
+          </a:p>
+          <a:p>
+            <a:endParaRPr lang="en-US" sz="5400" dirty="0">
               <a:solidFill>
                 <a:schemeClr val="bg1"/>
               </a:solidFill>
@@ -5702,66 +4615,12 @@
               <a:ea typeface="Bodoni Ornaments" pitchFamily="2" charset="0"/>
             </a:endParaRPr>
           </a:p>
-          <a:p>
-            <a:r>
-              <a:rPr lang="en-US" sz="4400" dirty="0">
-                <a:solidFill>
-                  <a:schemeClr val="bg1"/>
-                </a:solidFill>
-                <a:latin typeface="Avenir Medium" panose="02000503020000020003" pitchFamily="2" charset="0"/>
-                <a:ea typeface="Bodoni Ornaments" pitchFamily="2" charset="0"/>
-              </a:rPr>
-              <a:t>A crimson robe made white</a:t>
-            </a:r>
-          </a:p>
-          <a:p>
-            <a:endParaRPr lang="en-US" sz="4400" dirty="0">
-              <a:solidFill>
-                <a:schemeClr val="bg1"/>
-              </a:solidFill>
-              <a:latin typeface="Avenir Medium" panose="02000503020000020003" pitchFamily="2" charset="0"/>
-              <a:ea typeface="Bodoni Ornaments" pitchFamily="2" charset="0"/>
-            </a:endParaRPr>
-          </a:p>
-          <a:p>
-            <a:r>
-              <a:rPr lang="en-US" sz="4400" dirty="0">
-                <a:solidFill>
-                  <a:schemeClr val="bg1"/>
-                </a:solidFill>
-                <a:latin typeface="Avenir Medium" panose="02000503020000020003" pitchFamily="2" charset="0"/>
-                <a:ea typeface="Bodoni Ornaments" pitchFamily="2" charset="0"/>
-              </a:rPr>
-              <a:t>No more fear of judgement </a:t>
-            </a:r>
-          </a:p>
-          <a:p>
-            <a:endParaRPr lang="en-US" sz="4400" dirty="0">
-              <a:solidFill>
-                <a:schemeClr val="bg1"/>
-              </a:solidFill>
-              <a:latin typeface="Avenir Medium" panose="02000503020000020003" pitchFamily="2" charset="0"/>
-              <a:ea typeface="Bodoni Ornaments" pitchFamily="2" charset="0"/>
-            </a:endParaRPr>
-          </a:p>
-          <a:p>
-            <a:r>
-              <a:rPr lang="en-US" sz="4400" dirty="0">
-                <a:solidFill>
-                  <a:schemeClr val="bg1"/>
-                </a:solidFill>
-                <a:latin typeface="Avenir Medium" panose="02000503020000020003" pitchFamily="2" charset="0"/>
-                <a:ea typeface="Bodoni Ornaments" pitchFamily="2" charset="0"/>
-              </a:rPr>
-              <a:t>His righteousness is mine</a:t>
-            </a:r>
-          </a:p>
         </p:txBody>
       </p:sp>
     </p:spTree>
     <p:extLst>
       <p:ext uri="{BB962C8B-B14F-4D97-AF65-F5344CB8AC3E}">
-        <p14:creationId xmlns:p14="http://schemas.microsoft.com/office/powerpoint/2010/main" val="2305385221"/>
+        <p14:creationId xmlns:p14="http://schemas.microsoft.com/office/powerpoint/2010/main" val="359419579"/>
       </p:ext>
     </p:extLst>
   </p:cSld>
@@ -5774,7 +4633,7 @@
 <file path=ppt/theme/theme1.xml><?xml version="1.0" encoding="utf-8"?>
 <a:theme xmlns:a="http://schemas.openxmlformats.org/drawingml/2006/main" name="Office Theme">
   <a:themeElements>
-    <a:clrScheme name="Office">
+    <a:clrScheme name="Office Theme">
       <a:dk1>
         <a:sysClr val="windowText" lastClr="000000"/>
       </a:dk1>
@@ -5812,7 +4671,7 @@
         <a:srgbClr val="96607D"/>
       </a:folHlink>
     </a:clrScheme>
-    <a:fontScheme name="Office">
+    <a:fontScheme name="Office Theme">
       <a:majorFont>
         <a:latin typeface="Aptos Display" panose="02110004020202020204"/>
         <a:ea typeface=""/>
@@ -5918,7 +4777,7 @@
         <a:font script="Tfng" typeface="Ebrima"/>
       </a:minorFont>
     </a:fontScheme>
-    <a:fmtScheme name="Office">
+    <a:fmtScheme name="Office Theme">
       <a:fillStyleLst>
         <a:solidFill>
           <a:schemeClr val="phClr"/>
